--- a/docs/Presentacion_Comparador_Gas.pptx
+++ b/docs/Presentacion_Comparador_Gas.pptx
@@ -1499,7 +1499,7 @@
           <a:lstStyle/>
           <a:p>
             <a:r>
-              <a:t>El sistema ofrece cuatro funcionalidades. La consulta libre (chat) responde en lenguaje natural e incluye el análisis de interconexión en cadena: para una ruta de varios países calcula qué gas puede atravesarla entera e identifica el país y el parámetro que más restringen (el cuello de botella). La comparativa permite comparar un parámetro entre países y ver la matriz completa, con exportación a Excel o PDF. Analizar gas valida la composición de un gas concreto país a país. Todo se sirve por HTTPS y mantiene la garantía de cero cifras inventadas.</a:t>
+              <a:t>El sistema ofrece cuatro funcionalidades. La consulta libre (chat) responde en lenguaje natural e incluye el análisis de interconexión en cadena: para una ruta de varios países calcula qué gas puede atravesarla entera e identifica el país y el parámetro que más restringen (el cuello de botella). La comparativa permite comparar un parámetro entre países y ver la matriz completa, con exportación a Excel o PDF. Analizar gas valida la composición de un gas concreto país a país. Se sirve por HTTP para uso interno/local (HTTPS opcional para producción) y mantiene la garantía de cero cifras inventadas.</a:t>
             </a:r>
           </a:p>
         </p:txBody>
@@ -11163,7 +11163,7 @@
                 </a:solidFill>
                 <a:latin typeface="Calibri"/>
               </a:rPr>
-              <a:t>• Acceso por HTTPS (conexión cifrada). La IA solo interviene en el texto abierto; el resto es determinista.</a:t>
+              <a:t>• Acceso por HTTP para uso interno/local (HTTPS opcional para producción). La IA solo interviene en el texto abierto; el resto es determinista.</a:t>
             </a:r>
           </a:p>
         </p:txBody>

--- a/docs/Presentacion_Comparador_Gas.pptx
+++ b/docs/Presentacion_Comparador_Gas.pptx
@@ -10209,7 +10209,7 @@
                 </a:solidFill>
                 <a:latin typeface="Calibri"/>
               </a:rPr>
-              <a:t>Lo que la aplicación usa realmente, agrupado por capa.</a:t>
+              <a:t>Lo esencial de cada capa: la pieza que manda y el porqué. (El detalle completo, en la diapositiva siguiente.)</a:t>
             </a:r>
           </a:p>
         </p:txBody>
@@ -10347,14 +10347,58 @@
       </p:sp>
       <p:sp>
         <p:nvSpPr>
-          <p:cNvPr id="12" name="TextBox 11"/>
+          <p:cNvPr id="12" name="Rectangle 11"/>
+          <p:cNvSpPr/>
+          <p:nvPr/>
+        </p:nvSpPr>
+        <p:spPr>
+          <a:xfrm>
+            <a:off x="731520" y="2395728"/>
+            <a:ext cx="50292" cy="256032"/>
+          </a:xfrm>
+          <a:prstGeom prst="rect">
+            <a:avLst/>
+          </a:prstGeom>
+          <a:solidFill>
+            <a:srgbClr val="0099D6"/>
+          </a:solidFill>
+          <a:ln>
+            <a:noFill/>
+          </a:ln>
+          <a:effectLst/>
+        </p:spPr>
+        <p:style>
+          <a:lnRef idx="1">
+            <a:schemeClr val="accent1"/>
+          </a:lnRef>
+          <a:fillRef idx="3">
+            <a:schemeClr val="accent1"/>
+          </a:fillRef>
+          <a:effectRef idx="2">
+            <a:schemeClr val="accent1"/>
+          </a:effectRef>
+          <a:fontRef idx="minor">
+            <a:schemeClr val="lt1"/>
+          </a:fontRef>
+        </p:style>
+        <p:txBody>
+          <a:bodyPr rtlCol="0" anchor="ctr" wrap="square"/>
+          <a:lstStyle/>
+          <a:p>
+            <a:pPr algn="ctr"/>
+          </a:p>
+        </p:txBody>
+      </p:sp>
+      <p:sp>
+        <p:nvSpPr>
+          <p:cNvPr id="13" name="TextBox 12"/>
           <p:cNvSpPr txBox="1"/>
           <p:nvPr/>
         </p:nvSpPr>
         <p:spPr>
           <a:xfrm>
-            <a:off x="731520" y="2331720"/>
-            <a:ext cx="2377440" cy="2468880"/>
+            <a:off x="868680" y="2350008"/>
+            <a:ext cx="2240280" cy="292608"/>
           </a:xfrm>
           <a:prstGeom prst="rect">
             <a:avLst/>
@@ -10369,88 +10413,185 @@
           <a:p>
             <a:pPr algn="l">
               <a:spcAft>
-                <a:spcPts val="900"/>
-              </a:spcAft>
-            </a:pPr>
-            <a:r>
-              <a:rPr sz="1300" b="0">
-                <a:solidFill>
-                  <a:srgbClr val="1B2A38"/>
-                </a:solidFill>
-                <a:latin typeface="Calibri"/>
-              </a:rPr>
-              <a:t>• HTML + CSS</a:t>
-            </a:r>
-          </a:p>
-          <a:p>
-            <a:pPr algn="l">
-              <a:spcAft>
-                <a:spcPts val="900"/>
-              </a:spcAft>
-            </a:pPr>
-            <a:r>
-              <a:rPr sz="1300" b="0">
-                <a:solidFill>
-                  <a:srgbClr val="1B2A38"/>
-                </a:solidFill>
-                <a:latin typeface="Calibri"/>
-              </a:rPr>
-              <a:t>• JavaScript vanilla</a:t>
-            </a:r>
-          </a:p>
-          <a:p>
-            <a:pPr algn="l">
-              <a:spcAft>
-                <a:spcPts val="900"/>
-              </a:spcAft>
-            </a:pPr>
-            <a:r>
-              <a:rPr sz="1300" b="0">
-                <a:solidFill>
-                  <a:srgbClr val="1B2A38"/>
-                </a:solidFill>
-                <a:latin typeface="Calibri"/>
-              </a:rPr>
-              <a:t>• marked</a:t>
-            </a:r>
-          </a:p>
-          <a:p>
-            <a:pPr algn="l">
-              <a:spcAft>
-                <a:spcPts val="900"/>
-              </a:spcAft>
-            </a:pPr>
-            <a:r>
-              <a:rPr sz="1300" b="0">
-                <a:solidFill>
-                  <a:srgbClr val="1B2A38"/>
-                </a:solidFill>
-                <a:latin typeface="Calibri"/>
-              </a:rPr>
-              <a:t>• DOMPurify</a:t>
-            </a:r>
-          </a:p>
-          <a:p>
-            <a:pPr algn="l">
-              <a:spcAft>
-                <a:spcPts val="900"/>
-              </a:spcAft>
-            </a:pPr>
-            <a:r>
-              <a:rPr sz="1300" b="0">
-                <a:solidFill>
-                  <a:srgbClr val="1B2A38"/>
-                </a:solidFill>
-                <a:latin typeface="Calibri"/>
-              </a:rPr>
-              <a:t>• localStorage</a:t>
-            </a:r>
-          </a:p>
-        </p:txBody>
-      </p:sp>
-      <p:sp>
-        <p:nvSpPr>
-          <p:cNvPr id="13" name="Rounded Rectangle 12"/>
+                <a:spcPts val="600"/>
+              </a:spcAft>
+            </a:pPr>
+            <a:r>
+              <a:rPr sz="1400" b="1">
+                <a:solidFill>
+                  <a:srgbClr val="013A57"/>
+                </a:solidFill>
+                <a:latin typeface="Calibri"/>
+              </a:rPr>
+              <a:t>JavaScript vanilla</a:t>
+            </a:r>
+          </a:p>
+        </p:txBody>
+      </p:sp>
+      <p:sp>
+        <p:nvSpPr>
+          <p:cNvPr id="14" name="TextBox 13"/>
+          <p:cNvSpPr txBox="1"/>
+          <p:nvPr/>
+        </p:nvSpPr>
+        <p:spPr>
+          <a:xfrm>
+            <a:off x="868680" y="2670048"/>
+            <a:ext cx="2240280" cy="868680"/>
+          </a:xfrm>
+          <a:prstGeom prst="rect">
+            <a:avLst/>
+          </a:prstGeom>
+          <a:noFill/>
+        </p:spPr>
+        <p:txBody>
+          <a:bodyPr wrap="square" anchor="t" lIns="38100" rIns="38100" tIns="12700" bIns="12700">
+            <a:spAutoFit/>
+          </a:bodyPr>
+          <a:lstStyle/>
+          <a:p>
+            <a:pPr algn="l">
+              <a:spcAft>
+                <a:spcPts val="600"/>
+              </a:spcAft>
+            </a:pPr>
+            <a:r>
+              <a:rPr sz="1150" b="0">
+                <a:solidFill>
+                  <a:srgbClr val="4A5B68"/>
+                </a:solidFill>
+                <a:latin typeface="Calibri"/>
+              </a:rPr>
+              <a:t>La interfaz (index.html). Sin framework: una SPA ligera.</a:t>
+            </a:r>
+          </a:p>
+        </p:txBody>
+      </p:sp>
+      <p:sp>
+        <p:nvSpPr>
+          <p:cNvPr id="15" name="Rectangle 14"/>
+          <p:cNvSpPr/>
+          <p:nvPr/>
+        </p:nvSpPr>
+        <p:spPr>
+          <a:xfrm>
+            <a:off x="731520" y="3630168"/>
+            <a:ext cx="50292" cy="256032"/>
+          </a:xfrm>
+          <a:prstGeom prst="rect">
+            <a:avLst/>
+          </a:prstGeom>
+          <a:solidFill>
+            <a:srgbClr val="0099D6"/>
+          </a:solidFill>
+          <a:ln>
+            <a:noFill/>
+          </a:ln>
+          <a:effectLst/>
+        </p:spPr>
+        <p:style>
+          <a:lnRef idx="1">
+            <a:schemeClr val="accent1"/>
+          </a:lnRef>
+          <a:fillRef idx="3">
+            <a:schemeClr val="accent1"/>
+          </a:fillRef>
+          <a:effectRef idx="2">
+            <a:schemeClr val="accent1"/>
+          </a:effectRef>
+          <a:fontRef idx="minor">
+            <a:schemeClr val="lt1"/>
+          </a:fontRef>
+        </p:style>
+        <p:txBody>
+          <a:bodyPr rtlCol="0" anchor="ctr" wrap="square"/>
+          <a:lstStyle/>
+          <a:p>
+            <a:pPr algn="ctr"/>
+          </a:p>
+        </p:txBody>
+      </p:sp>
+      <p:sp>
+        <p:nvSpPr>
+          <p:cNvPr id="16" name="TextBox 15"/>
+          <p:cNvSpPr txBox="1"/>
+          <p:nvPr/>
+        </p:nvSpPr>
+        <p:spPr>
+          <a:xfrm>
+            <a:off x="868680" y="3584448"/>
+            <a:ext cx="2240280" cy="292608"/>
+          </a:xfrm>
+          <a:prstGeom prst="rect">
+            <a:avLst/>
+          </a:prstGeom>
+          <a:noFill/>
+        </p:spPr>
+        <p:txBody>
+          <a:bodyPr wrap="square" anchor="t" lIns="38100" rIns="38100" tIns="12700" bIns="12700">
+            <a:spAutoFit/>
+          </a:bodyPr>
+          <a:lstStyle/>
+          <a:p>
+            <a:pPr algn="l">
+              <a:spcAft>
+                <a:spcPts val="600"/>
+              </a:spcAft>
+            </a:pPr>
+            <a:r>
+              <a:rPr sz="1400" b="1">
+                <a:solidFill>
+                  <a:srgbClr val="013A57"/>
+                </a:solidFill>
+                <a:latin typeface="Calibri"/>
+              </a:rPr>
+              <a:t>DOMPurify</a:t>
+            </a:r>
+          </a:p>
+        </p:txBody>
+      </p:sp>
+      <p:sp>
+        <p:nvSpPr>
+          <p:cNvPr id="17" name="TextBox 16"/>
+          <p:cNvSpPr txBox="1"/>
+          <p:nvPr/>
+        </p:nvSpPr>
+        <p:spPr>
+          <a:xfrm>
+            <a:off x="868680" y="3904488"/>
+            <a:ext cx="2240280" cy="868680"/>
+          </a:xfrm>
+          <a:prstGeom prst="rect">
+            <a:avLst/>
+          </a:prstGeom>
+          <a:noFill/>
+        </p:spPr>
+        <p:txBody>
+          <a:bodyPr wrap="square" anchor="t" lIns="38100" rIns="38100" tIns="12700" bIns="12700">
+            <a:spAutoFit/>
+          </a:bodyPr>
+          <a:lstStyle/>
+          <a:p>
+            <a:pPr algn="l">
+              <a:spcAft>
+                <a:spcPts val="600"/>
+              </a:spcAft>
+            </a:pPr>
+            <a:r>
+              <a:rPr sz="1150" b="0">
+                <a:solidFill>
+                  <a:srgbClr val="4A5B68"/>
+                </a:solidFill>
+                <a:latin typeface="Calibri"/>
+              </a:rPr>
+              <a:t>Sanea el HTML de la respuesta antes de pintarlo (anti-XSS).</a:t>
+            </a:r>
+          </a:p>
+        </p:txBody>
+      </p:sp>
+      <p:sp>
+        <p:nvSpPr>
+          <p:cNvPr id="18" name="Rounded Rectangle 17"/>
           <p:cNvSpPr/>
           <p:nvPr/>
         </p:nvSpPr>
@@ -10498,7 +10639,7 @@
       </p:sp>
       <p:sp>
         <p:nvSpPr>
-          <p:cNvPr id="14" name="Rectangle 13"/>
+          <p:cNvPr id="19" name="Rectangle 18"/>
           <p:cNvSpPr/>
           <p:nvPr/>
         </p:nvSpPr>
@@ -10542,7 +10683,7 @@
       </p:sp>
       <p:sp>
         <p:nvSpPr>
-          <p:cNvPr id="15" name="TextBox 14"/>
+          <p:cNvPr id="20" name="TextBox 19"/>
           <p:cNvSpPr txBox="1"/>
           <p:nvPr/>
         </p:nvSpPr>
@@ -10581,14 +10722,58 @@
       </p:sp>
       <p:sp>
         <p:nvSpPr>
-          <p:cNvPr id="16" name="TextBox 15"/>
+          <p:cNvPr id="21" name="Rectangle 20"/>
+          <p:cNvSpPr/>
+          <p:nvPr/>
+        </p:nvSpPr>
+        <p:spPr>
+          <a:xfrm>
+            <a:off x="3575304" y="2395728"/>
+            <a:ext cx="50292" cy="256032"/>
+          </a:xfrm>
+          <a:prstGeom prst="rect">
+            <a:avLst/>
+          </a:prstGeom>
+          <a:solidFill>
+            <a:srgbClr val="013A57"/>
+          </a:solidFill>
+          <a:ln>
+            <a:noFill/>
+          </a:ln>
+          <a:effectLst/>
+        </p:spPr>
+        <p:style>
+          <a:lnRef idx="1">
+            <a:schemeClr val="accent1"/>
+          </a:lnRef>
+          <a:fillRef idx="3">
+            <a:schemeClr val="accent1"/>
+          </a:fillRef>
+          <a:effectRef idx="2">
+            <a:schemeClr val="accent1"/>
+          </a:effectRef>
+          <a:fontRef idx="minor">
+            <a:schemeClr val="lt1"/>
+          </a:fontRef>
+        </p:style>
+        <p:txBody>
+          <a:bodyPr rtlCol="0" anchor="ctr" wrap="square"/>
+          <a:lstStyle/>
+          <a:p>
+            <a:pPr algn="ctr"/>
+          </a:p>
+        </p:txBody>
+      </p:sp>
+      <p:sp>
+        <p:nvSpPr>
+          <p:cNvPr id="22" name="TextBox 21"/>
           <p:cNvSpPr txBox="1"/>
           <p:nvPr/>
         </p:nvSpPr>
         <p:spPr>
           <a:xfrm>
-            <a:off x="3575304" y="2331720"/>
-            <a:ext cx="2377440" cy="2468880"/>
+            <a:off x="3712463" y="2350008"/>
+            <a:ext cx="2240280" cy="292608"/>
           </a:xfrm>
           <a:prstGeom prst="rect">
             <a:avLst/>
@@ -10603,88 +10788,185 @@
           <a:p>
             <a:pPr algn="l">
               <a:spcAft>
-                <a:spcPts val="900"/>
-              </a:spcAft>
-            </a:pPr>
-            <a:r>
-              <a:rPr sz="1300" b="0">
-                <a:solidFill>
-                  <a:srgbClr val="1B2A38"/>
-                </a:solidFill>
-                <a:latin typeface="Calibri"/>
-              </a:rPr>
-              <a:t>• Python 3.11+</a:t>
-            </a:r>
-          </a:p>
-          <a:p>
-            <a:pPr algn="l">
-              <a:spcAft>
-                <a:spcPts val="900"/>
-              </a:spcAft>
-            </a:pPr>
-            <a:r>
-              <a:rPr sz="1300" b="0">
-                <a:solidFill>
-                  <a:srgbClr val="1B2A38"/>
-                </a:solidFill>
-                <a:latin typeface="Calibri"/>
-              </a:rPr>
-              <a:t>• FastAPI</a:t>
-            </a:r>
-          </a:p>
-          <a:p>
-            <a:pPr algn="l">
-              <a:spcAft>
-                <a:spcPts val="900"/>
-              </a:spcAft>
-            </a:pPr>
-            <a:r>
-              <a:rPr sz="1300" b="0">
-                <a:solidFill>
-                  <a:srgbClr val="1B2A38"/>
-                </a:solidFill>
-                <a:latin typeface="Calibri"/>
-              </a:rPr>
-              <a:t>• uvicorn</a:t>
-            </a:r>
-          </a:p>
-          <a:p>
-            <a:pPr algn="l">
-              <a:spcAft>
-                <a:spcPts val="900"/>
-              </a:spcAft>
-            </a:pPr>
-            <a:r>
-              <a:rPr sz="1300" b="0">
-                <a:solidFill>
-                  <a:srgbClr val="1B2A38"/>
-                </a:solidFill>
-                <a:latin typeface="Calibri"/>
-              </a:rPr>
-              <a:t>• pydantic</a:t>
-            </a:r>
-          </a:p>
-          <a:p>
-            <a:pPr algn="l">
-              <a:spcAft>
-                <a:spcPts val="900"/>
-              </a:spcAft>
-            </a:pPr>
-            <a:r>
-              <a:rPr sz="1300" b="0">
-                <a:solidFill>
-                  <a:srgbClr val="1B2A38"/>
-                </a:solidFill>
-                <a:latin typeface="Calibri"/>
-              </a:rPr>
-              <a:t>• python-dotenv</a:t>
-            </a:r>
-          </a:p>
-        </p:txBody>
-      </p:sp>
-      <p:sp>
-        <p:nvSpPr>
-          <p:cNvPr id="17" name="Rounded Rectangle 16"/>
+                <a:spcPts val="600"/>
+              </a:spcAft>
+            </a:pPr>
+            <a:r>
+              <a:rPr sz="1400" b="1">
+                <a:solidFill>
+                  <a:srgbClr val="013A57"/>
+                </a:solidFill>
+                <a:latin typeface="Calibri"/>
+              </a:rPr>
+              <a:t>FastAPI</a:t>
+            </a:r>
+          </a:p>
+        </p:txBody>
+      </p:sp>
+      <p:sp>
+        <p:nvSpPr>
+          <p:cNvPr id="23" name="TextBox 22"/>
+          <p:cNvSpPr txBox="1"/>
+          <p:nvPr/>
+        </p:nvSpPr>
+        <p:spPr>
+          <a:xfrm>
+            <a:off x="3712463" y="2670048"/>
+            <a:ext cx="2240280" cy="868680"/>
+          </a:xfrm>
+          <a:prstGeom prst="rect">
+            <a:avLst/>
+          </a:prstGeom>
+          <a:noFill/>
+        </p:spPr>
+        <p:txBody>
+          <a:bodyPr wrap="square" anchor="t" lIns="38100" rIns="38100" tIns="12700" bIns="12700">
+            <a:spAutoFit/>
+          </a:bodyPr>
+          <a:lstStyle/>
+          <a:p>
+            <a:pPr algn="l">
+              <a:spcAft>
+                <a:spcPts val="600"/>
+              </a:spcAft>
+            </a:pPr>
+            <a:r>
+              <a:rPr sz="1150" b="0">
+                <a:solidFill>
+                  <a:srgbClr val="4A5B68"/>
+                </a:solidFill>
+                <a:latin typeface="Calibri"/>
+              </a:rPr>
+              <a:t>NUESTRO servidor: define y expone los endpoints. Propio y gratuito.</a:t>
+            </a:r>
+          </a:p>
+        </p:txBody>
+      </p:sp>
+      <p:sp>
+        <p:nvSpPr>
+          <p:cNvPr id="24" name="Rectangle 23"/>
+          <p:cNvSpPr/>
+          <p:nvPr/>
+        </p:nvSpPr>
+        <p:spPr>
+          <a:xfrm>
+            <a:off x="3575304" y="3630168"/>
+            <a:ext cx="50292" cy="256032"/>
+          </a:xfrm>
+          <a:prstGeom prst="rect">
+            <a:avLst/>
+          </a:prstGeom>
+          <a:solidFill>
+            <a:srgbClr val="013A57"/>
+          </a:solidFill>
+          <a:ln>
+            <a:noFill/>
+          </a:ln>
+          <a:effectLst/>
+        </p:spPr>
+        <p:style>
+          <a:lnRef idx="1">
+            <a:schemeClr val="accent1"/>
+          </a:lnRef>
+          <a:fillRef idx="3">
+            <a:schemeClr val="accent1"/>
+          </a:fillRef>
+          <a:effectRef idx="2">
+            <a:schemeClr val="accent1"/>
+          </a:effectRef>
+          <a:fontRef idx="minor">
+            <a:schemeClr val="lt1"/>
+          </a:fontRef>
+        </p:style>
+        <p:txBody>
+          <a:bodyPr rtlCol="0" anchor="ctr" wrap="square"/>
+          <a:lstStyle/>
+          <a:p>
+            <a:pPr algn="ctr"/>
+          </a:p>
+        </p:txBody>
+      </p:sp>
+      <p:sp>
+        <p:nvSpPr>
+          <p:cNvPr id="25" name="TextBox 24"/>
+          <p:cNvSpPr txBox="1"/>
+          <p:nvPr/>
+        </p:nvSpPr>
+        <p:spPr>
+          <a:xfrm>
+            <a:off x="3712463" y="3584448"/>
+            <a:ext cx="2240280" cy="292608"/>
+          </a:xfrm>
+          <a:prstGeom prst="rect">
+            <a:avLst/>
+          </a:prstGeom>
+          <a:noFill/>
+        </p:spPr>
+        <p:txBody>
+          <a:bodyPr wrap="square" anchor="t" lIns="38100" rIns="38100" tIns="12700" bIns="12700">
+            <a:spAutoFit/>
+          </a:bodyPr>
+          <a:lstStyle/>
+          <a:p>
+            <a:pPr algn="l">
+              <a:spcAft>
+                <a:spcPts val="600"/>
+              </a:spcAft>
+            </a:pPr>
+            <a:r>
+              <a:rPr sz="1400" b="1">
+                <a:solidFill>
+                  <a:srgbClr val="013A57"/>
+                </a:solidFill>
+                <a:latin typeface="Calibri"/>
+              </a:rPr>
+              <a:t>uvicorn</a:t>
+            </a:r>
+          </a:p>
+        </p:txBody>
+      </p:sp>
+      <p:sp>
+        <p:nvSpPr>
+          <p:cNvPr id="26" name="TextBox 25"/>
+          <p:cNvSpPr txBox="1"/>
+          <p:nvPr/>
+        </p:nvSpPr>
+        <p:spPr>
+          <a:xfrm>
+            <a:off x="3712463" y="3904488"/>
+            <a:ext cx="2240280" cy="868680"/>
+          </a:xfrm>
+          <a:prstGeom prst="rect">
+            <a:avLst/>
+          </a:prstGeom>
+          <a:noFill/>
+        </p:spPr>
+        <p:txBody>
+          <a:bodyPr wrap="square" anchor="t" lIns="38100" rIns="38100" tIns="12700" bIns="12700">
+            <a:spAutoFit/>
+          </a:bodyPr>
+          <a:lstStyle/>
+          <a:p>
+            <a:pPr algn="l">
+              <a:spcAft>
+                <a:spcPts val="600"/>
+              </a:spcAft>
+            </a:pPr>
+            <a:r>
+              <a:rPr sz="1150" b="0">
+                <a:solidFill>
+                  <a:srgbClr val="4A5B68"/>
+                </a:solidFill>
+                <a:latin typeface="Calibri"/>
+              </a:rPr>
+              <a:t>Lo ejecuta y atiende las peticiones en el puerto 8000.</a:t>
+            </a:r>
+          </a:p>
+        </p:txBody>
+      </p:sp>
+      <p:sp>
+        <p:nvSpPr>
+          <p:cNvPr id="27" name="Rounded Rectangle 26"/>
           <p:cNvSpPr/>
           <p:nvPr/>
         </p:nvSpPr>
@@ -10732,7 +11014,7 @@
       </p:sp>
       <p:sp>
         <p:nvSpPr>
-          <p:cNvPr id="18" name="Rectangle 17"/>
+          <p:cNvPr id="28" name="Rectangle 27"/>
           <p:cNvSpPr/>
           <p:nvPr/>
         </p:nvSpPr>
@@ -10776,7 +11058,7 @@
       </p:sp>
       <p:sp>
         <p:nvSpPr>
-          <p:cNvPr id="19" name="TextBox 18"/>
+          <p:cNvPr id="29" name="TextBox 28"/>
           <p:cNvSpPr txBox="1"/>
           <p:nvPr/>
         </p:nvSpPr>
@@ -10815,14 +11097,58 @@
       </p:sp>
       <p:sp>
         <p:nvSpPr>
-          <p:cNvPr id="20" name="TextBox 19"/>
+          <p:cNvPr id="30" name="Rectangle 29"/>
+          <p:cNvSpPr/>
+          <p:nvPr/>
+        </p:nvSpPr>
+        <p:spPr>
+          <a:xfrm>
+            <a:off x="6419088" y="2395728"/>
+            <a:ext cx="50292" cy="256032"/>
+          </a:xfrm>
+          <a:prstGeom prst="rect">
+            <a:avLst/>
+          </a:prstGeom>
+          <a:solidFill>
+            <a:srgbClr val="6CB33E"/>
+          </a:solidFill>
+          <a:ln>
+            <a:noFill/>
+          </a:ln>
+          <a:effectLst/>
+        </p:spPr>
+        <p:style>
+          <a:lnRef idx="1">
+            <a:schemeClr val="accent1"/>
+          </a:lnRef>
+          <a:fillRef idx="3">
+            <a:schemeClr val="accent1"/>
+          </a:fillRef>
+          <a:effectRef idx="2">
+            <a:schemeClr val="accent1"/>
+          </a:effectRef>
+          <a:fontRef idx="minor">
+            <a:schemeClr val="lt1"/>
+          </a:fontRef>
+        </p:style>
+        <p:txBody>
+          <a:bodyPr rtlCol="0" anchor="ctr" wrap="square"/>
+          <a:lstStyle/>
+          <a:p>
+            <a:pPr algn="ctr"/>
+          </a:p>
+        </p:txBody>
+      </p:sp>
+      <p:sp>
+        <p:nvSpPr>
+          <p:cNvPr id="31" name="TextBox 30"/>
           <p:cNvSpPr txBox="1"/>
           <p:nvPr/>
         </p:nvSpPr>
         <p:spPr>
           <a:xfrm>
-            <a:off x="6419088" y="2331720"/>
-            <a:ext cx="2377440" cy="2468880"/>
+            <a:off x="6556248" y="2350008"/>
+            <a:ext cx="2240280" cy="292608"/>
           </a:xfrm>
           <a:prstGeom prst="rect">
             <a:avLst/>
@@ -10837,88 +11163,185 @@
           <a:p>
             <a:pPr algn="l">
               <a:spcAft>
-                <a:spcPts val="900"/>
-              </a:spcAft>
-            </a:pPr>
-            <a:r>
-              <a:rPr sz="1300" b="0">
-                <a:solidFill>
-                  <a:srgbClr val="1B2A38"/>
-                </a:solidFill>
-                <a:latin typeface="Calibri"/>
-              </a:rPr>
-              <a:t>• PyYAML</a:t>
-            </a:r>
-          </a:p>
-          <a:p>
-            <a:pPr algn="l">
-              <a:spcAft>
-                <a:spcPts val="900"/>
-              </a:spcAft>
-            </a:pPr>
-            <a:r>
-              <a:rPr sz="1300" b="0">
-                <a:solidFill>
-                  <a:srgbClr val="1B2A38"/>
-                </a:solidFill>
-                <a:latin typeface="Calibri"/>
-              </a:rPr>
-              <a:t>• SQLite</a:t>
-            </a:r>
-          </a:p>
-          <a:p>
-            <a:pPr algn="l">
-              <a:spcAft>
-                <a:spcPts val="900"/>
-              </a:spcAft>
-            </a:pPr>
-            <a:r>
-              <a:rPr sz="1300" b="0">
-                <a:solidFill>
-                  <a:srgbClr val="1B2A38"/>
-                </a:solidFill>
-                <a:latin typeface="Calibri"/>
-              </a:rPr>
-              <a:t>• pdfplumber</a:t>
-            </a:r>
-          </a:p>
-          <a:p>
-            <a:pPr algn="l">
-              <a:spcAft>
-                <a:spcPts val="900"/>
-              </a:spcAft>
-            </a:pPr>
-            <a:r>
-              <a:rPr sz="1300" b="0">
-                <a:solidFill>
-                  <a:srgbClr val="1B2A38"/>
-                </a:solidFill>
-                <a:latin typeface="Calibri"/>
-              </a:rPr>
-              <a:t>• openpyxl</a:t>
-            </a:r>
-          </a:p>
-          <a:p>
-            <a:pPr algn="l">
-              <a:spcAft>
-                <a:spcPts val="900"/>
-              </a:spcAft>
-            </a:pPr>
-            <a:r>
-              <a:rPr sz="1300" b="0">
-                <a:solidFill>
-                  <a:srgbClr val="1B2A38"/>
-                </a:solidFill>
-                <a:latin typeface="Calibri"/>
-              </a:rPr>
-              <a:t>• xhtml2pdf</a:t>
-            </a:r>
-          </a:p>
-        </p:txBody>
-      </p:sp>
-      <p:sp>
-        <p:nvSpPr>
-          <p:cNvPr id="21" name="Rounded Rectangle 20"/>
+                <a:spcPts val="600"/>
+              </a:spcAft>
+            </a:pPr>
+            <a:r>
+              <a:rPr sz="1400" b="1">
+                <a:solidFill>
+                  <a:srgbClr val="013A57"/>
+                </a:solidFill>
+                <a:latin typeface="Calibri"/>
+              </a:rPr>
+              <a:t>PyYAML</a:t>
+            </a:r>
+          </a:p>
+        </p:txBody>
+      </p:sp>
+      <p:sp>
+        <p:nvSpPr>
+          <p:cNvPr id="32" name="TextBox 31"/>
+          <p:cNvSpPr txBox="1"/>
+          <p:nvPr/>
+        </p:nvSpPr>
+        <p:spPr>
+          <a:xfrm>
+            <a:off x="6556248" y="2670048"/>
+            <a:ext cx="2240280" cy="868680"/>
+          </a:xfrm>
+          <a:prstGeom prst="rect">
+            <a:avLst/>
+          </a:prstGeom>
+          <a:noFill/>
+        </p:spPr>
+        <p:txBody>
+          <a:bodyPr wrap="square" anchor="t" lIns="38100" rIns="38100" tIns="12700" bIns="12700">
+            <a:spAutoFit/>
+          </a:bodyPr>
+          <a:lstStyle/>
+          <a:p>
+            <a:pPr algn="l">
+              <a:spcAft>
+                <a:spcPts val="600"/>
+              </a:spcAft>
+            </a:pPr>
+            <a:r>
+              <a:rPr sz="1150" b="0">
+                <a:solidFill>
+                  <a:srgbClr val="4A5B68"/>
+                </a:solidFill>
+                <a:latin typeface="Calibri"/>
+              </a:rPr>
+              <a:t>Lee la ONTOLOGÍA: la puerta a TODAS las cifras del sistema.</a:t>
+            </a:r>
+          </a:p>
+        </p:txBody>
+      </p:sp>
+      <p:sp>
+        <p:nvSpPr>
+          <p:cNvPr id="33" name="Rectangle 32"/>
+          <p:cNvSpPr/>
+          <p:nvPr/>
+        </p:nvSpPr>
+        <p:spPr>
+          <a:xfrm>
+            <a:off x="6419088" y="3630168"/>
+            <a:ext cx="50292" cy="256032"/>
+          </a:xfrm>
+          <a:prstGeom prst="rect">
+            <a:avLst/>
+          </a:prstGeom>
+          <a:solidFill>
+            <a:srgbClr val="6CB33E"/>
+          </a:solidFill>
+          <a:ln>
+            <a:noFill/>
+          </a:ln>
+          <a:effectLst/>
+        </p:spPr>
+        <p:style>
+          <a:lnRef idx="1">
+            <a:schemeClr val="accent1"/>
+          </a:lnRef>
+          <a:fillRef idx="3">
+            <a:schemeClr val="accent1"/>
+          </a:fillRef>
+          <a:effectRef idx="2">
+            <a:schemeClr val="accent1"/>
+          </a:effectRef>
+          <a:fontRef idx="minor">
+            <a:schemeClr val="lt1"/>
+          </a:fontRef>
+        </p:style>
+        <p:txBody>
+          <a:bodyPr rtlCol="0" anchor="ctr" wrap="square"/>
+          <a:lstStyle/>
+          <a:p>
+            <a:pPr algn="ctr"/>
+          </a:p>
+        </p:txBody>
+      </p:sp>
+      <p:sp>
+        <p:nvSpPr>
+          <p:cNvPr id="34" name="TextBox 33"/>
+          <p:cNvSpPr txBox="1"/>
+          <p:nvPr/>
+        </p:nvSpPr>
+        <p:spPr>
+          <a:xfrm>
+            <a:off x="6556248" y="3584448"/>
+            <a:ext cx="2240280" cy="292608"/>
+          </a:xfrm>
+          <a:prstGeom prst="rect">
+            <a:avLst/>
+          </a:prstGeom>
+          <a:noFill/>
+        </p:spPr>
+        <p:txBody>
+          <a:bodyPr wrap="square" anchor="t" lIns="38100" rIns="38100" tIns="12700" bIns="12700">
+            <a:spAutoFit/>
+          </a:bodyPr>
+          <a:lstStyle/>
+          <a:p>
+            <a:pPr algn="l">
+              <a:spcAft>
+                <a:spcPts val="600"/>
+              </a:spcAft>
+            </a:pPr>
+            <a:r>
+              <a:rPr sz="1400" b="1">
+                <a:solidFill>
+                  <a:srgbClr val="013A57"/>
+                </a:solidFill>
+                <a:latin typeface="Calibri"/>
+              </a:rPr>
+              <a:t>pdfplumber + SQLite</a:t>
+            </a:r>
+          </a:p>
+        </p:txBody>
+      </p:sp>
+      <p:sp>
+        <p:nvSpPr>
+          <p:cNvPr id="35" name="TextBox 34"/>
+          <p:cNvSpPr txBox="1"/>
+          <p:nvPr/>
+        </p:nvSpPr>
+        <p:spPr>
+          <a:xfrm>
+            <a:off x="6556248" y="3904488"/>
+            <a:ext cx="2240280" cy="868680"/>
+          </a:xfrm>
+          <a:prstGeom prst="rect">
+            <a:avLst/>
+          </a:prstGeom>
+          <a:noFill/>
+        </p:spPr>
+        <p:txBody>
+          <a:bodyPr wrap="square" anchor="t" lIns="38100" rIns="38100" tIns="12700" bIns="12700">
+            <a:spAutoFit/>
+          </a:bodyPr>
+          <a:lstStyle/>
+          <a:p>
+            <a:pPr algn="l">
+              <a:spcAft>
+                <a:spcPts val="600"/>
+              </a:spcAft>
+            </a:pPr>
+            <a:r>
+              <a:rPr sz="1150" b="0">
+                <a:solidFill>
+                  <a:srgbClr val="4A5B68"/>
+                </a:solidFill>
+                <a:latin typeface="Calibri"/>
+              </a:rPr>
+              <a:t>Extraen e indexan el texto de los PDF (RAG). Ninguna cifra.</a:t>
+            </a:r>
+          </a:p>
+        </p:txBody>
+      </p:sp>
+      <p:sp>
+        <p:nvSpPr>
+          <p:cNvPr id="36" name="Rounded Rectangle 35"/>
           <p:cNvSpPr/>
           <p:nvPr/>
         </p:nvSpPr>
@@ -10966,7 +11389,7 @@
       </p:sp>
       <p:sp>
         <p:nvSpPr>
-          <p:cNvPr id="22" name="Rectangle 21"/>
+          <p:cNvPr id="37" name="Rectangle 36"/>
           <p:cNvSpPr/>
           <p:nvPr/>
         </p:nvSpPr>
@@ -11010,7 +11433,7 @@
       </p:sp>
       <p:sp>
         <p:nvSpPr>
-          <p:cNvPr id="23" name="TextBox 22"/>
+          <p:cNvPr id="38" name="TextBox 37"/>
           <p:cNvSpPr txBox="1"/>
           <p:nvPr/>
         </p:nvSpPr>
@@ -11049,14 +11472,58 @@
       </p:sp>
       <p:sp>
         <p:nvSpPr>
-          <p:cNvPr id="24" name="TextBox 23"/>
+          <p:cNvPr id="39" name="Rectangle 38"/>
+          <p:cNvSpPr/>
+          <p:nvPr/>
+        </p:nvSpPr>
+        <p:spPr>
+          <a:xfrm>
+            <a:off x="9262872" y="2395728"/>
+            <a:ext cx="50292" cy="256032"/>
+          </a:xfrm>
+          <a:prstGeom prst="rect">
+            <a:avLst/>
+          </a:prstGeom>
+          <a:solidFill>
+            <a:srgbClr val="E88A1A"/>
+          </a:solidFill>
+          <a:ln>
+            <a:noFill/>
+          </a:ln>
+          <a:effectLst/>
+        </p:spPr>
+        <p:style>
+          <a:lnRef idx="1">
+            <a:schemeClr val="accent1"/>
+          </a:lnRef>
+          <a:fillRef idx="3">
+            <a:schemeClr val="accent1"/>
+          </a:fillRef>
+          <a:effectRef idx="2">
+            <a:schemeClr val="accent1"/>
+          </a:effectRef>
+          <a:fontRef idx="minor">
+            <a:schemeClr val="lt1"/>
+          </a:fontRef>
+        </p:style>
+        <p:txBody>
+          <a:bodyPr rtlCol="0" anchor="ctr" wrap="square"/>
+          <a:lstStyle/>
+          <a:p>
+            <a:pPr algn="ctr"/>
+          </a:p>
+        </p:txBody>
+      </p:sp>
+      <p:sp>
+        <p:nvSpPr>
+          <p:cNvPr id="40" name="TextBox 39"/>
           <p:cNvSpPr txBox="1"/>
           <p:nvPr/>
         </p:nvSpPr>
         <p:spPr>
           <a:xfrm>
-            <a:off x="9262872" y="2331720"/>
-            <a:ext cx="2377440" cy="2468880"/>
+            <a:off x="9400032" y="2350008"/>
+            <a:ext cx="2240280" cy="292608"/>
           </a:xfrm>
           <a:prstGeom prst="rect">
             <a:avLst/>
@@ -11071,88 +11538,185 @@
           <a:p>
             <a:pPr algn="l">
               <a:spcAft>
-                <a:spcPts val="900"/>
-              </a:spcAft>
-            </a:pPr>
-            <a:r>
-              <a:rPr sz="1300" b="0">
-                <a:solidFill>
-                  <a:srgbClr val="1B2A38"/>
-                </a:solidFill>
-                <a:latin typeface="Calibri"/>
-              </a:rPr>
-              <a:t>• OpenAI SDK</a:t>
-            </a:r>
-          </a:p>
-          <a:p>
-            <a:pPr algn="l">
-              <a:spcAft>
-                <a:spcPts val="900"/>
-              </a:spcAft>
-            </a:pPr>
-            <a:r>
-              <a:rPr sz="1300" b="0">
-                <a:solidFill>
-                  <a:srgbClr val="1B2A38"/>
-                </a:solidFill>
-                <a:latin typeface="Calibri"/>
-              </a:rPr>
-              <a:t>• GPT-4o-mini</a:t>
-            </a:r>
-          </a:p>
-          <a:p>
-            <a:pPr algn="l">
-              <a:spcAft>
-                <a:spcPts val="900"/>
-              </a:spcAft>
-            </a:pPr>
-            <a:r>
-              <a:rPr sz="1300" b="0">
-                <a:solidFill>
-                  <a:srgbClr val="1B2A38"/>
-                </a:solidFill>
-                <a:latin typeface="Calibri"/>
-              </a:rPr>
-              <a:t>• function calling</a:t>
-            </a:r>
-          </a:p>
-          <a:p>
-            <a:pPr algn="l">
-              <a:spcAft>
-                <a:spcPts val="900"/>
-              </a:spcAft>
-            </a:pPr>
-            <a:r>
-              <a:rPr sz="1300" b="0">
-                <a:solidFill>
-                  <a:srgbClr val="1B2A38"/>
-                </a:solidFill>
-                <a:latin typeface="Calibri"/>
-              </a:rPr>
-              <a:t>• temperatura 0</a:t>
-            </a:r>
-          </a:p>
-          <a:p>
-            <a:pPr algn="l">
-              <a:spcAft>
-                <a:spcPts val="900"/>
-              </a:spcAft>
-            </a:pPr>
-            <a:r>
-              <a:rPr sz="1300" b="0">
-                <a:solidFill>
-                  <a:srgbClr val="1B2A38"/>
-                </a:solidFill>
-                <a:latin typeface="Calibri"/>
-              </a:rPr>
-              <a:t>• sustituible</a:t>
-            </a:r>
-          </a:p>
-        </p:txBody>
-      </p:sp>
-      <p:sp>
-        <p:nvSpPr>
-          <p:cNvPr id="25" name="Rectangle 24"/>
+                <a:spcPts val="600"/>
+              </a:spcAft>
+            </a:pPr>
+            <a:r>
+              <a:rPr sz="1400" b="1">
+                <a:solidFill>
+                  <a:srgbClr val="013A57"/>
+                </a:solidFill>
+                <a:latin typeface="Calibri"/>
+              </a:rPr>
+              <a:t>GPT-4o-mini</a:t>
+            </a:r>
+          </a:p>
+        </p:txBody>
+      </p:sp>
+      <p:sp>
+        <p:nvSpPr>
+          <p:cNvPr id="41" name="TextBox 40"/>
+          <p:cNvSpPr txBox="1"/>
+          <p:nvPr/>
+        </p:nvSpPr>
+        <p:spPr>
+          <a:xfrm>
+            <a:off x="9400032" y="2670048"/>
+            <a:ext cx="2240280" cy="868680"/>
+          </a:xfrm>
+          <a:prstGeom prst="rect">
+            <a:avLst/>
+          </a:prstGeom>
+          <a:noFill/>
+        </p:spPr>
+        <p:txBody>
+          <a:bodyPr wrap="square" anchor="t" lIns="38100" rIns="38100" tIns="12700" bIns="12700">
+            <a:spAutoFit/>
+          </a:bodyPr>
+          <a:lstStyle/>
+          <a:p>
+            <a:pPr algn="l">
+              <a:spcAft>
+                <a:spcPts val="600"/>
+              </a:spcAft>
+            </a:pPr>
+            <a:r>
+              <a:rPr sz="1150" b="0">
+                <a:solidFill>
+                  <a:srgbClr val="4A5B68"/>
+                </a:solidFill>
+                <a:latin typeface="Calibri"/>
+              </a:rPr>
+              <a:t>Interpreta y REDACTA, a temperatura 0. Nunca genera cifras.</a:t>
+            </a:r>
+          </a:p>
+        </p:txBody>
+      </p:sp>
+      <p:sp>
+        <p:nvSpPr>
+          <p:cNvPr id="42" name="Rectangle 41"/>
+          <p:cNvSpPr/>
+          <p:nvPr/>
+        </p:nvSpPr>
+        <p:spPr>
+          <a:xfrm>
+            <a:off x="9262872" y="3630168"/>
+            <a:ext cx="50292" cy="256032"/>
+          </a:xfrm>
+          <a:prstGeom prst="rect">
+            <a:avLst/>
+          </a:prstGeom>
+          <a:solidFill>
+            <a:srgbClr val="E88A1A"/>
+          </a:solidFill>
+          <a:ln>
+            <a:noFill/>
+          </a:ln>
+          <a:effectLst/>
+        </p:spPr>
+        <p:style>
+          <a:lnRef idx="1">
+            <a:schemeClr val="accent1"/>
+          </a:lnRef>
+          <a:fillRef idx="3">
+            <a:schemeClr val="accent1"/>
+          </a:fillRef>
+          <a:effectRef idx="2">
+            <a:schemeClr val="accent1"/>
+          </a:effectRef>
+          <a:fontRef idx="minor">
+            <a:schemeClr val="lt1"/>
+          </a:fontRef>
+        </p:style>
+        <p:txBody>
+          <a:bodyPr rtlCol="0" anchor="ctr" wrap="square"/>
+          <a:lstStyle/>
+          <a:p>
+            <a:pPr algn="ctr"/>
+          </a:p>
+        </p:txBody>
+      </p:sp>
+      <p:sp>
+        <p:nvSpPr>
+          <p:cNvPr id="43" name="TextBox 42"/>
+          <p:cNvSpPr txBox="1"/>
+          <p:nvPr/>
+        </p:nvSpPr>
+        <p:spPr>
+          <a:xfrm>
+            <a:off x="9400032" y="3584448"/>
+            <a:ext cx="2240280" cy="292608"/>
+          </a:xfrm>
+          <a:prstGeom prst="rect">
+            <a:avLst/>
+          </a:prstGeom>
+          <a:noFill/>
+        </p:spPr>
+        <p:txBody>
+          <a:bodyPr wrap="square" anchor="t" lIns="38100" rIns="38100" tIns="12700" bIns="12700">
+            <a:spAutoFit/>
+          </a:bodyPr>
+          <a:lstStyle/>
+          <a:p>
+            <a:pPr algn="l">
+              <a:spcAft>
+                <a:spcPts val="600"/>
+              </a:spcAft>
+            </a:pPr>
+            <a:r>
+              <a:rPr sz="1400" b="1">
+                <a:solidFill>
+                  <a:srgbClr val="013A57"/>
+                </a:solidFill>
+                <a:latin typeface="Calibri"/>
+              </a:rPr>
+              <a:t>function calling</a:t>
+            </a:r>
+          </a:p>
+        </p:txBody>
+      </p:sp>
+      <p:sp>
+        <p:nvSpPr>
+          <p:cNvPr id="44" name="TextBox 43"/>
+          <p:cNvSpPr txBox="1"/>
+          <p:nvPr/>
+        </p:nvSpPr>
+        <p:spPr>
+          <a:xfrm>
+            <a:off x="9400032" y="3904488"/>
+            <a:ext cx="2240280" cy="868680"/>
+          </a:xfrm>
+          <a:prstGeom prst="rect">
+            <a:avLst/>
+          </a:prstGeom>
+          <a:noFill/>
+        </p:spPr>
+        <p:txBody>
+          <a:bodyPr wrap="square" anchor="t" lIns="38100" rIns="38100" tIns="12700" bIns="12700">
+            <a:spAutoFit/>
+          </a:bodyPr>
+          <a:lstStyle/>
+          <a:p>
+            <a:pPr algn="l">
+              <a:spcAft>
+                <a:spcPts val="600"/>
+              </a:spcAft>
+            </a:pPr>
+            <a:r>
+              <a:rPr sz="1150" b="0">
+                <a:solidFill>
+                  <a:srgbClr val="4A5B68"/>
+                </a:solidFill>
+                <a:latin typeface="Calibri"/>
+              </a:rPr>
+              <a:t>El mecanismo por el que PIDE la cifra en vez de inventarla.</a:t>
+            </a:r>
+          </a:p>
+        </p:txBody>
+      </p:sp>
+      <p:sp>
+        <p:nvSpPr>
+          <p:cNvPr id="45" name="Rectangle 44"/>
           <p:cNvSpPr/>
           <p:nvPr/>
         </p:nvSpPr>
@@ -11196,7 +11760,7 @@
       </p:sp>
       <p:sp>
         <p:nvSpPr>
-          <p:cNvPr id="26" name="Rectangle 25"/>
+          <p:cNvPr id="46" name="Rectangle 45"/>
           <p:cNvSpPr/>
           <p:nvPr/>
         </p:nvSpPr>
@@ -11240,7 +11804,7 @@
       </p:sp>
       <p:sp>
         <p:nvSpPr>
-          <p:cNvPr id="27" name="TextBox 26"/>
+          <p:cNvPr id="47" name="TextBox 46"/>
           <p:cNvSpPr txBox="1"/>
           <p:nvPr/>
         </p:nvSpPr>
@@ -11279,7 +11843,7 @@
       </p:sp>
       <p:sp>
         <p:nvSpPr>
-          <p:cNvPr id="28" name="Rectangle 27"/>
+          <p:cNvPr id="48" name="Rectangle 47"/>
           <p:cNvSpPr/>
           <p:nvPr/>
         </p:nvSpPr>
@@ -11323,7 +11887,7 @@
       </p:sp>
       <p:sp>
         <p:nvSpPr>
-          <p:cNvPr id="29" name="Rectangle 28"/>
+          <p:cNvPr id="49" name="Rectangle 48"/>
           <p:cNvSpPr/>
           <p:nvPr/>
         </p:nvSpPr>
@@ -11367,7 +11931,7 @@
       </p:sp>
       <p:sp>
         <p:nvSpPr>
-          <p:cNvPr id="30" name="TextBox 29"/>
+          <p:cNvPr id="50" name="TextBox 49"/>
           <p:cNvSpPr txBox="1"/>
           <p:nvPr/>
         </p:nvSpPr>

--- a/docs/Presentacion_Comparador_Gas.pptx
+++ b/docs/Presentacion_Comparador_Gas.pptx
@@ -22164,7 +22164,7 @@
                 </a:solidFill>
                 <a:latin typeface="Calibri"/>
               </a:rPr>
-              <a:t>motor_determinista · conversor_unidades · fuente_oficial</a:t>
+              <a:t>fuente_oficial · conversor_unidades · condiciones_referencia</a:t>
             </a:r>
           </a:p>
         </p:txBody>

--- a/docs/Presentacion_Comparador_Gas.pptx
+++ b/docs/Presentacion_Comparador_Gas.pptx
@@ -12,9 +12,6 @@
     <p:sldId id="260" r:id="rId12"/>
     <p:sldId id="261" r:id="rId13"/>
     <p:sldId id="262" r:id="rId14"/>
-    <p:sldId id="263" r:id="rId15"/>
-    <p:sldId id="264" r:id="rId16"/>
-    <p:sldId id="265" r:id="rId17"/>
   </p:sldIdLst>
   <p:sldSz cx="12191695" cy="6858000" type="screen4x3"/>
   <p:notesSz cx="6858000" cy="9144000"/>
@@ -511,77 +508,7 @@
           <a:lstStyle/>
           <a:p>
             <a:r>
-              <a:t>El hilo conductor es doble: CÓMO ESTÁ CONSTRUIDO (arquitectura y ontología) y POR QUÉ ES FIABLE (trazabilidad total y cero cifras inventadas).</a:t>
-            </a:r>
-          </a:p>
-        </p:txBody>
-      </p:sp>
-      <p:sp>
-        <p:nvSpPr>
-          <p:cNvPr id="4" name="Slide Number Placeholder 3"/>
-          <p:cNvSpPr>
-            <a:spLocks noGrp="1"/>
-          </p:cNvSpPr>
-          <p:nvPr>
-            <p:ph type="sldNum" idx="5" sz="quarter"/>
-          </p:nvPr>
-        </p:nvSpPr>
-        <p:spPr/>
-      </p:sp>
-    </p:spTree>
-  </p:cSld>
-  <p:clrMapOvr>
-    <a:masterClrMapping/>
-  </p:clrMapOvr>
-</p:notes>
-</file>
-
-<file path=ppt/notesSlides/notesSlide10.xml><?xml version="1.0" encoding="utf-8"?>
-<p:notes xmlns:a="http://schemas.openxmlformats.org/drawingml/2006/main" xmlns:p="http://schemas.openxmlformats.org/presentationml/2006/main" xmlns:r="http://schemas.openxmlformats.org/officeDocument/2006/relationships">
-  <p:cSld>
-    <p:spTree>
-      <p:nvGrpSpPr>
-        <p:cNvPr id="1" name=""/>
-        <p:cNvGrpSpPr/>
-        <p:nvPr/>
-      </p:nvGrpSpPr>
-      <p:grpSpPr>
-        <a:xfrm>
-          <a:off x="0" y="0"/>
-          <a:ext cx="0" cy="0"/>
-          <a:chOff x="0" y="0"/>
-          <a:chExt cx="0" cy="0"/>
-        </a:xfrm>
-      </p:grpSpPr>
-      <p:sp>
-        <p:nvSpPr>
-          <p:cNvPr id="2" name="Slide Image Placeholder 1"/>
-          <p:cNvSpPr>
-            <a:spLocks noGrp="1"/>
-          </p:cNvSpPr>
-          <p:nvPr>
-            <p:ph type="sldImg" idx="2"/>
-          </p:nvPr>
-        </p:nvSpPr>
-        <p:spPr/>
-      </p:sp>
-      <p:sp>
-        <p:nvSpPr>
-          <p:cNvPr id="3" name="Notes Placeholder 2"/>
-          <p:cNvSpPr>
-            <a:spLocks noGrp="1"/>
-          </p:cNvSpPr>
-          <p:nvPr>
-            <p:ph type="body" idx="3" sz="quarter"/>
-          </p:nvPr>
-        </p:nvSpPr>
-        <p:spPr/>
-        <p:txBody>
-          <a:bodyPr/>
-          <a:lstStyle/>
-          <a:p>
-            <a:r>
-              <a:t>En síntesis: una herramienta que compara la calidad regulatoria del gas natural, el biometano y el hidrógeno entre jurisdicciones, con trazabilidad total y sin cifras inventadas. Las cifras salen siempre de normativa oficial verificada; la IA solo redacta el texto. Muchas gracias; quedo a vuestra disposición para las preguntas.</a:t>
+              <a:t>[~15 s] Enlazar con la demo: 'Acabáis de ver lo que hace. En cinco minutos os enseño lo que hay debajo: la arquitectura y, sobre todo, la ontología, que es donde vive el rigor del sistema.' No repitáis funcionalidades: ya las han visto.</a:t>
             </a:r>
           </a:p>
         </p:txBody>
@@ -651,7 +578,7 @@
           <a:lstStyle/>
           <a:p>
             <a:r>
-              <a:t>El problema: la información regulatoria está dispersa y, sobre todo, NO ES DIRECTAMENTE COMPARABLE, porque cada país usa unidades y condiciones distintas. Cuatro cifras fijan el alcance: 21 jurisdicciones, 10 parámetros, 210 valores trazables y CERO cifras inventadas. Detrás de ese cero: 176 verificados verbatim y 34 declarados 'no verificable' porque la norma de ese país no los fija.</a:t>
+              <a:t>[~50 s] Recordad las cuatro cifras y saltad rápido al problema: la información regulatoria está dispersa y, sobre todo, NO ES DIRECTAMENTE COMPARABLE, porque cada país usa unidades y condiciones distintas. Y la promesa: cero cifras inventadas. De los 277 valores trazables, 209 están verificados verbatim, 20 por fuente pública secundaria (cuando la norma primaria es de pago) y 48 declarados 'no verificable' porque la norma no los fija. Cerrad enlazando: 'esto se sostiene sobre dos piezas, la arquitectura y la ontología'.</a:t>
             </a:r>
           </a:p>
         </p:txBody>
@@ -721,7 +648,7 @@
           <a:lstStyle/>
           <a:p>
             <a:r>
-              <a:t>Recorred el esquema con el dedo. Uno: el usuario pregunta desde la interfaz web. Dos: la pregunta llega a NUESTRO servidor, y lo primero que hace es pasar por el ROUTER DETERMINISTA, que decide quién la resuelve. Si es cuantitativa —RUTA A, la mayoría— la resuelve el código leyendo la ontología, sin IA y sin posibilidad de error. Si es de texto abierto —RUTA B— va al modelo. Tres, y es lo importante: fijaos en la flecha que SUBE desde la IA hasta la ontología. Incluso en la ruta B el modelo no inventa el número: lo PIDE mediante function calling. Cuatro: la IA es externa y opcional; si cae, el sistema conmuta a determinista y el chat nunca falla.</a:t>
+              <a:t>[~70 s] Recorred el esquema con el dedo. Uno: el usuario pregunta desde la interfaz. Dos: la pregunta entra en NUESTRO servidor y lo primero que encuentra es el ROUTER DETERMINISTA, que decide quién la resuelve. Si es cuantitativa —RUTA A, la mayoría— la resuelve el código leyendo la ontología: sin IA, sin posibilidad de inventar. Si es de texto abierto —RUTA B— va al modelo. Y aquí está lo importante: fijaos en la flecha que SUBE desde la IA hasta la ontología. Incluso en la ruta B el modelo no produce el número: lo PIDE, mediante function calling. Esa flecha es, técnicamente, la garantía anti-alucinación. Cerrad con la banda inferior: la IA es una comodidad, no una dependencia.</a:t>
             </a:r>
           </a:p>
         </p:txBody>
@@ -791,7 +718,7 @@
           <a:lstStyle/>
           <a:p>
             <a:r>
-              <a:t>Suele asumirse que hay una gran base de datos única. No es así. Lo importante es el reparto: las cifras viven SOLO en la capa 2, la ontología. La capa 3, el índice documental, no guarda ningún número: solo localiza el pasaje pertinente en las consultas de texto abierto. Y los PDF los guardamos en local para no depender de que una web externa siga viva. Sobre el stack: todo es software libre excepto la API de OpenAI, que además es opcional. Si os preguntan por pint, PyPDF2, pandas o cryptography: están declarados en requirements pero HOY NO SE USAN, y lo sabemos.</a:t>
+              <a:t>[~50 s] Suele asumirse que hay una gran base de datos única. No la hay. Lo que hay que retener es el reparto: las cifras viven SOLO en la capa 2, la ontología. La capa 3, el índice documental, no guarda ningún número: solo localiza el pasaje pertinente cuando la consulta es de texto abierto. Y los PDF los guardamos en local para no depender de que una web externa siga viva. Si preguntan por pint, PyPDF2, pandas o cryptography: están en requirements pero HOY NO SE USAN, y lo sabemos.</a:t>
             </a:r>
           </a:p>
         </p:txBody>
@@ -861,7 +788,7 @@
           <a:lstStyle/>
           <a:p>
             <a:r>
-              <a:t>La ontología es el elemento central: un ÚNICO fichero YAML, legible por una persona, con cinco claves —el catálogo de normas, el registro de tipos de gas y las tres secciones de parámetros, una por gas—. Lo importante: las tres secciones comparten exactamente el mismo esquema; por eso ampliar a biometano e hidrógeno no obligó a cambiar la arquitectura. El motor determinista lee de aquí; el modelo nunca calcula ni inventa valores. Y usamos YAML en vez de una base de datos porque a esta escala es más AUDITABLE y TRAZABLE, y se versiona en git junto al código.</a:t>
+              <a:t>[~70 s] Esta es la estructura REAL del fichero, no una versión idealizada. Arriba, lo que el código lee de verdad: el catálogo de las 39 normas oficiales, el registro de los 3 tipos de gas, el catálogo de unidades, y las tres secciones de parámetros —una por gas—. Lo importante: esas tres secciones comparten EXACTAMENTE el mismo esquema, y por eso ampliar a biometano e hidrógeno no obligó a tocar la arquitectura. Y sed honestos con la caja naranja: hay claves (flags, orquestador, motor_reglas, rag) que son documentación del diseño dentro del propio YAML y que el código NO lee. Decirlo vosotros primero vale más que si os lo encuentran. Por último, el porqué del YAML: a esta escala un fichero legible y versionado en git es más auditable que una base de datos.</a:t>
             </a:r>
           </a:p>
         </p:txBody>
@@ -931,7 +858,7 @@
           <a:lstStyle/>
           <a:p>
             <a:r>
-              <a:t>Aquí está el valor real del diseño: de cada dato no guardamos solo el número, sino todo su contexto. El campo clave es 'expresion_original': el texto literal de la norma, tal cual está redactado. Eso convierte la confianza en VERIFICABILIDAD. A la derecha, la garantía anti-invención: dos estados y ninguno intermedio. El ejemplo de Dinamarca es el que mejor lo ilustra: era fácil rellenar el hueco con un número que estaba en la misma norma, pero pertenecía a otro contexto —biogás de distribución, no transporte—. Preferimos el hueco honesto: informa mejor que un número falso.</a:t>
+              <a:t>[~60 s] Aquí está el valor real del diseño: de cada dato no guardamos solo el número, sino todo su contexto. Señalad dos campos. Uno, 'expresion_original': el texto literal de la norma, tal cual está redactado —eso convierte la confianza en VERIFICABILIDAD: no hay que creerse el dato, se comprueba—. Dos, 'condiciones_referencia': es lo que permite normalizar con la ISO 13443 antes de comparar, porque comparar en bruto valores medidos a 0, 15 o 25 grados sería metodológicamente incorrecto. A la derecha, los tres estados. Y el ejemplo de Dinamarca es el que mejor lo ilustra: era fácil rellenar el hueco con un número que estaba en la misma norma, pero pertenecía a otro contexto —biogás de distribución, no transporte—. Preferimos el hueco honesto: informa mejor que un número falso.</a:t>
             </a:r>
           </a:p>
         </p:txBody>
@@ -1001,147 +928,7 @@
           <a:lstStyle/>
           <a:p>
             <a:r>
-              <a:t>Un punto clave para la credibilidad es la comparabilidad: no basta con tener los números, hay que poder compararlos. Por eso llevamos todo a la base española aplicando los factores de la ISO 13443, que no estimamos sino que tomamos literalmente de la norma. Fijaos en la fila de Eslovaquia: su par de condiciones no está tabulado, así que se calcula con las ECUACIONES DEL ANEXO B de la misma norma. Sigue siendo un valor derivado de la norma, no un número inventado. Es la pregunta fina que os pueden hacer.</a:t>
-            </a:r>
-          </a:p>
-        </p:txBody>
-      </p:sp>
-      <p:sp>
-        <p:nvSpPr>
-          <p:cNvPr id="4" name="Slide Number Placeholder 3"/>
-          <p:cNvSpPr>
-            <a:spLocks noGrp="1"/>
-          </p:cNvSpPr>
-          <p:nvPr>
-            <p:ph type="sldNum" idx="5" sz="quarter"/>
-          </p:nvPr>
-        </p:nvSpPr>
-        <p:spPr/>
-      </p:sp>
-    </p:spTree>
-  </p:cSld>
-  <p:clrMapOvr>
-    <a:masterClrMapping/>
-  </p:clrMapOvr>
-</p:notes>
-</file>
-
-<file path=ppt/notesSlides/notesSlide8.xml><?xml version="1.0" encoding="utf-8"?>
-<p:notes xmlns:a="http://schemas.openxmlformats.org/drawingml/2006/main" xmlns:p="http://schemas.openxmlformats.org/presentationml/2006/main" xmlns:r="http://schemas.openxmlformats.org/officeDocument/2006/relationships">
-  <p:cSld>
-    <p:spTree>
-      <p:nvGrpSpPr>
-        <p:cNvPr id="1" name=""/>
-        <p:cNvGrpSpPr/>
-        <p:nvPr/>
-      </p:nvGrpSpPr>
-      <p:grpSpPr>
-        <a:xfrm>
-          <a:off x="0" y="0"/>
-          <a:ext cx="0" cy="0"/>
-          <a:chOff x="0" y="0"/>
-          <a:chExt cx="0" cy="0"/>
-        </a:xfrm>
-      </p:grpSpPr>
-      <p:sp>
-        <p:nvSpPr>
-          <p:cNvPr id="2" name="Slide Image Placeholder 1"/>
-          <p:cNvSpPr>
-            <a:spLocks noGrp="1"/>
-          </p:cNvSpPr>
-          <p:nvPr>
-            <p:ph type="sldImg" idx="2"/>
-          </p:nvPr>
-        </p:nvSpPr>
-        <p:spPr/>
-      </p:sp>
-      <p:sp>
-        <p:nvSpPr>
-          <p:cNvPr id="3" name="Notes Placeholder 2"/>
-          <p:cNvSpPr>
-            <a:spLocks noGrp="1"/>
-          </p:cNvSpPr>
-          <p:nvPr>
-            <p:ph type="body" idx="3" sz="quarter"/>
-          </p:nvPr>
-        </p:nvSpPr>
-        <p:spPr/>
-        <p:txBody>
-          <a:bodyPr/>
-          <a:lstStyle/>
-          <a:p>
-            <a:r>
-              <a:t>Hay que ser muy claro: el modelo NO es la fuente del dato, es la capa de lenguaje. Si necesita un número, lo pide. Sobre el RAG somos transparentes: es léxico, no semántico. No es una carencia, es una decisión: es reproducible y no depende de terceros. Y antes de decidirlo lo MEDIMOS, con el estudio de terminología. Primero medir, luego decidir. La salvaguarda de abajo es la más importante: la IA es una comodidad, no una dependencia.</a:t>
-            </a:r>
-          </a:p>
-        </p:txBody>
-      </p:sp>
-      <p:sp>
-        <p:nvSpPr>
-          <p:cNvPr id="4" name="Slide Number Placeholder 3"/>
-          <p:cNvSpPr>
-            <a:spLocks noGrp="1"/>
-          </p:cNvSpPr>
-          <p:nvPr>
-            <p:ph type="sldNum" idx="5" sz="quarter"/>
-          </p:nvPr>
-        </p:nvSpPr>
-        <p:spPr/>
-      </p:sp>
-    </p:spTree>
-  </p:cSld>
-  <p:clrMapOvr>
-    <a:masterClrMapping/>
-  </p:clrMapOvr>
-</p:notes>
-</file>
-
-<file path=ppt/notesSlides/notesSlide9.xml><?xml version="1.0" encoding="utf-8"?>
-<p:notes xmlns:a="http://schemas.openxmlformats.org/drawingml/2006/main" xmlns:p="http://schemas.openxmlformats.org/presentationml/2006/main" xmlns:r="http://schemas.openxmlformats.org/officeDocument/2006/relationships">
-  <p:cSld>
-    <p:spTree>
-      <p:nvGrpSpPr>
-        <p:cNvPr id="1" name=""/>
-        <p:cNvGrpSpPr/>
-        <p:nvPr/>
-      </p:nvGrpSpPr>
-      <p:grpSpPr>
-        <a:xfrm>
-          <a:off x="0" y="0"/>
-          <a:ext cx="0" cy="0"/>
-          <a:chOff x="0" y="0"/>
-          <a:chExt cx="0" cy="0"/>
-        </a:xfrm>
-      </p:grpSpPr>
-      <p:sp>
-        <p:nvSpPr>
-          <p:cNvPr id="2" name="Slide Image Placeholder 1"/>
-          <p:cNvSpPr>
-            <a:spLocks noGrp="1"/>
-          </p:cNvSpPr>
-          <p:nvPr>
-            <p:ph type="sldImg" idx="2"/>
-          </p:nvPr>
-        </p:nvSpPr>
-        <p:spPr/>
-      </p:sp>
-      <p:sp>
-        <p:nvSpPr>
-          <p:cNvPr id="3" name="Notes Placeholder 2"/>
-          <p:cNvSpPr>
-            <a:spLocks noGrp="1"/>
-          </p:cNvSpPr>
-          <p:nvPr>
-            <p:ph type="body" idx="3" sz="quarter"/>
-          </p:nvPr>
-        </p:nvSpPr>
-        <p:spPr/>
-        <p:txBody>
-          <a:bodyPr/>
-          <a:lstStyle/>
-          <a:p>
-            <a:r>
-              <a:t>La ampliación se hizo sin tocar nada de lo anterior: el gas natural sigue funcionando exactamente igual, y las pruebas automáticas lo confirman. Sobre el hidrógeno hay que subrayar la distinción de dominio: la calidad del H2 PARA LA RED es distinta de la del H2 como combustible de VEHÍCULO. Son especificaciones que no se pueden comparar, y la herramienta las mantiene separadas. Y hoy, de las cuatro jurisdicciones, solo Portugal fija una pureza vinculante del 98 %.</a:t>
+              <a:t>[~30 s] Cierre. Las cinco garantías salen del rigor del proceso, no de la suerte. Y la frase final es la que queremos que se lleven: la IA redacta el texto; los números salen siempre de la normativa oficial. Gracias, y quedamos a vuestra disposición para las preguntas.</a:t>
             </a:r>
           </a:p>
         </p:txBody>
@@ -4368,7 +4155,7 @@
                 </a:solidFill>
                 <a:latin typeface="Calibri"/>
               </a:rPr>
-              <a:t>Arquitectura, ontología y garantías del sistema</a:t>
+              <a:t>Lo que hay debajo: arquitectura y ontología</a:t>
             </a:r>
           </a:p>
           <a:p>
@@ -4384,7 +4171,7 @@
                 </a:solidFill>
                 <a:latin typeface="Calibri"/>
               </a:rPr>
-              <a:t>Gas natural · biometano · hidrógeno   |   21 jurisdicciones · 10 parámetros · 210 valores trazables</a:t>
+              <a:t>Acabáis de ver QUÉ hace. Ahora, CÓMO está construido y POR QUÉ es fiable.</a:t>
             </a:r>
           </a:p>
         </p:txBody>
@@ -4423,845 +4210,7 @@
                 </a:solidFill>
                 <a:latin typeface="Calibri"/>
               </a:rPr>
-              <a:t>Ontología v3.2.0  ·  Presentación técnica</a:t>
-            </a:r>
-          </a:p>
-        </p:txBody>
-      </p:sp>
-    </p:spTree>
-  </p:cSld>
-  <p:clrMapOvr>
-    <a:masterClrMapping/>
-  </p:clrMapOvr>
-</p:sld>
-</file>
-
-<file path=ppt/slides/slide10.xml><?xml version="1.0" encoding="utf-8"?>
-<p:sld xmlns:a="http://schemas.openxmlformats.org/drawingml/2006/main" xmlns:p="http://schemas.openxmlformats.org/presentationml/2006/main" xmlns:r="http://schemas.openxmlformats.org/officeDocument/2006/relationships">
-  <p:cSld>
-    <p:spTree>
-      <p:nvGrpSpPr>
-        <p:cNvPr id="1" name=""/>
-        <p:cNvGrpSpPr/>
-        <p:nvPr/>
-      </p:nvGrpSpPr>
-      <p:grpSpPr/>
-      <p:sp>
-        <p:nvSpPr>
-          <p:cNvPr id="2" name="Rectangle 1"/>
-          <p:cNvSpPr/>
-          <p:nvPr/>
-        </p:nvSpPr>
-        <p:spPr>
-          <a:xfrm>
-            <a:off x="0" y="0"/>
-            <a:ext cx="12191695" cy="6858000"/>
-          </a:xfrm>
-          <a:prstGeom prst="rect">
-            <a:avLst/>
-          </a:prstGeom>
-          <a:solidFill>
-            <a:srgbClr val="013A57"/>
-          </a:solidFill>
-          <a:ln>
-            <a:noFill/>
-          </a:ln>
-          <a:effectLst/>
-        </p:spPr>
-        <p:style>
-          <a:lnRef idx="1">
-            <a:schemeClr val="accent1"/>
-          </a:lnRef>
-          <a:fillRef idx="3">
-            <a:schemeClr val="accent1"/>
-          </a:fillRef>
-          <a:effectRef idx="2">
-            <a:schemeClr val="accent1"/>
-          </a:effectRef>
-          <a:fontRef idx="minor">
-            <a:schemeClr val="lt1"/>
-          </a:fontRef>
-        </p:style>
-        <p:txBody>
-          <a:bodyPr rtlCol="0" anchor="ctr" wrap="square"/>
-          <a:lstStyle/>
-          <a:p>
-            <a:pPr algn="ctr"/>
-          </a:p>
-        </p:txBody>
-      </p:sp>
-      <p:sp>
-        <p:nvSpPr>
-          <p:cNvPr id="3" name="Rectangle 2"/>
-          <p:cNvSpPr/>
-          <p:nvPr/>
-        </p:nvSpPr>
-        <p:spPr>
-          <a:xfrm>
-            <a:off x="0" y="1325880"/>
-            <a:ext cx="12191695" cy="45720"/>
-          </a:xfrm>
-          <a:prstGeom prst="rect">
-            <a:avLst/>
-          </a:prstGeom>
-          <a:solidFill>
-            <a:srgbClr val="0099D6"/>
-          </a:solidFill>
-          <a:ln>
-            <a:noFill/>
-          </a:ln>
-          <a:effectLst/>
-        </p:spPr>
-        <p:style>
-          <a:lnRef idx="1">
-            <a:schemeClr val="accent1"/>
-          </a:lnRef>
-          <a:fillRef idx="3">
-            <a:schemeClr val="accent1"/>
-          </a:fillRef>
-          <a:effectRef idx="2">
-            <a:schemeClr val="accent1"/>
-          </a:effectRef>
-          <a:fontRef idx="minor">
-            <a:schemeClr val="lt1"/>
-          </a:fontRef>
-        </p:style>
-        <p:txBody>
-          <a:bodyPr rtlCol="0" anchor="ctr" wrap="square"/>
-          <a:lstStyle/>
-          <a:p>
-            <a:pPr algn="ctr"/>
-          </a:p>
-        </p:txBody>
-      </p:sp>
-      <p:sp>
-        <p:nvSpPr>
-          <p:cNvPr id="4" name="TextBox 3"/>
-          <p:cNvSpPr txBox="1"/>
-          <p:nvPr/>
-        </p:nvSpPr>
-        <p:spPr>
-          <a:xfrm>
-            <a:off x="822960" y="457200"/>
-            <a:ext cx="10515600" cy="731520"/>
-          </a:xfrm>
-          <a:prstGeom prst="rect">
-            <a:avLst/>
-          </a:prstGeom>
-          <a:noFill/>
-        </p:spPr>
-        <p:txBody>
-          <a:bodyPr wrap="square" anchor="t" lIns="38100" rIns="38100" tIns="12700" bIns="12700">
-            <a:spAutoFit/>
-          </a:bodyPr>
-          <a:lstStyle/>
-          <a:p>
-            <a:pPr algn="l">
-              <a:spcAft>
-                <a:spcPts val="600"/>
-              </a:spcAft>
-            </a:pPr>
-            <a:r>
-              <a:rPr sz="3200" b="1">
-                <a:solidFill>
-                  <a:srgbClr val="FFFFFF"/>
-                </a:solidFill>
-                <a:latin typeface="Calibri"/>
-              </a:rPr>
-              <a:t>Las garantías del sistema</a:t>
-            </a:r>
-          </a:p>
-        </p:txBody>
-      </p:sp>
-      <p:sp>
-        <p:nvSpPr>
-          <p:cNvPr id="5" name="Rectangle 4"/>
-          <p:cNvSpPr/>
-          <p:nvPr/>
-        </p:nvSpPr>
-        <p:spPr>
-          <a:xfrm>
-            <a:off x="822960" y="1828800"/>
-            <a:ext cx="64008" cy="713232"/>
-          </a:xfrm>
-          <a:prstGeom prst="rect">
-            <a:avLst/>
-          </a:prstGeom>
-          <a:solidFill>
-            <a:srgbClr val="6CB33E"/>
-          </a:solidFill>
-          <a:ln>
-            <a:noFill/>
-          </a:ln>
-          <a:effectLst/>
-        </p:spPr>
-        <p:style>
-          <a:lnRef idx="1">
-            <a:schemeClr val="accent1"/>
-          </a:lnRef>
-          <a:fillRef idx="3">
-            <a:schemeClr val="accent1"/>
-          </a:fillRef>
-          <a:effectRef idx="2">
-            <a:schemeClr val="accent1"/>
-          </a:effectRef>
-          <a:fontRef idx="minor">
-            <a:schemeClr val="lt1"/>
-          </a:fontRef>
-        </p:style>
-        <p:txBody>
-          <a:bodyPr rtlCol="0" anchor="ctr" wrap="square"/>
-          <a:lstStyle/>
-          <a:p>
-            <a:pPr algn="ctr"/>
-          </a:p>
-        </p:txBody>
-      </p:sp>
-      <p:sp>
-        <p:nvSpPr>
-          <p:cNvPr id="6" name="TextBox 5"/>
-          <p:cNvSpPr txBox="1"/>
-          <p:nvPr/>
-        </p:nvSpPr>
-        <p:spPr>
-          <a:xfrm>
-            <a:off x="1143000" y="1801368"/>
-            <a:ext cx="10332720" cy="384048"/>
-          </a:xfrm>
-          <a:prstGeom prst="rect">
-            <a:avLst/>
-          </a:prstGeom>
-          <a:noFill/>
-        </p:spPr>
-        <p:txBody>
-          <a:bodyPr wrap="square" anchor="t" lIns="38100" rIns="38100" tIns="12700" bIns="12700">
-            <a:spAutoFit/>
-          </a:bodyPr>
-          <a:lstStyle/>
-          <a:p>
-            <a:pPr algn="l">
-              <a:spcAft>
-                <a:spcPts val="600"/>
-              </a:spcAft>
-            </a:pPr>
-            <a:r>
-              <a:rPr sz="1800" b="1">
-                <a:solidFill>
-                  <a:srgbClr val="0099D6"/>
-                </a:solidFill>
-                <a:latin typeface="Calibri"/>
-              </a:rPr>
-              <a:t>Cero cifras inventadas</a:t>
-            </a:r>
-          </a:p>
-        </p:txBody>
-      </p:sp>
-      <p:sp>
-        <p:nvSpPr>
-          <p:cNvPr id="7" name="TextBox 6"/>
-          <p:cNvSpPr txBox="1"/>
-          <p:nvPr/>
-        </p:nvSpPr>
-        <p:spPr>
-          <a:xfrm>
-            <a:off x="1143000" y="2130552"/>
-            <a:ext cx="10332720" cy="384048"/>
-          </a:xfrm>
-          <a:prstGeom prst="rect">
-            <a:avLst/>
-          </a:prstGeom>
-          <a:noFill/>
-        </p:spPr>
-        <p:txBody>
-          <a:bodyPr wrap="square" anchor="t" lIns="38100" rIns="38100" tIns="12700" bIns="12700">
-            <a:spAutoFit/>
-          </a:bodyPr>
-          <a:lstStyle/>
-          <a:p>
-            <a:pPr algn="l">
-              <a:spcAft>
-                <a:spcPts val="600"/>
-              </a:spcAft>
-            </a:pPr>
-            <a:r>
-              <a:rPr sz="1400" b="0">
-                <a:solidFill>
-                  <a:srgbClr val="C9D6E0"/>
-                </a:solidFill>
-                <a:latin typeface="Calibri"/>
-              </a:rPr>
-              <a:t>Los valores proceden de código y datos verificados, nunca del modelo.</a:t>
-            </a:r>
-          </a:p>
-        </p:txBody>
-      </p:sp>
-      <p:sp>
-        <p:nvSpPr>
-          <p:cNvPr id="8" name="Rectangle 7"/>
-          <p:cNvSpPr/>
-          <p:nvPr/>
-        </p:nvSpPr>
-        <p:spPr>
-          <a:xfrm>
-            <a:off x="822960" y="2670048"/>
-            <a:ext cx="64008" cy="713232"/>
-          </a:xfrm>
-          <a:prstGeom prst="rect">
-            <a:avLst/>
-          </a:prstGeom>
-          <a:solidFill>
-            <a:srgbClr val="6CB33E"/>
-          </a:solidFill>
-          <a:ln>
-            <a:noFill/>
-          </a:ln>
-          <a:effectLst/>
-        </p:spPr>
-        <p:style>
-          <a:lnRef idx="1">
-            <a:schemeClr val="accent1"/>
-          </a:lnRef>
-          <a:fillRef idx="3">
-            <a:schemeClr val="accent1"/>
-          </a:fillRef>
-          <a:effectRef idx="2">
-            <a:schemeClr val="accent1"/>
-          </a:effectRef>
-          <a:fontRef idx="minor">
-            <a:schemeClr val="lt1"/>
-          </a:fontRef>
-        </p:style>
-        <p:txBody>
-          <a:bodyPr rtlCol="0" anchor="ctr" wrap="square"/>
-          <a:lstStyle/>
-          <a:p>
-            <a:pPr algn="ctr"/>
-          </a:p>
-        </p:txBody>
-      </p:sp>
-      <p:sp>
-        <p:nvSpPr>
-          <p:cNvPr id="9" name="TextBox 8"/>
-          <p:cNvSpPr txBox="1"/>
-          <p:nvPr/>
-        </p:nvSpPr>
-        <p:spPr>
-          <a:xfrm>
-            <a:off x="1143000" y="2642616"/>
-            <a:ext cx="10332720" cy="384048"/>
-          </a:xfrm>
-          <a:prstGeom prst="rect">
-            <a:avLst/>
-          </a:prstGeom>
-          <a:noFill/>
-        </p:spPr>
-        <p:txBody>
-          <a:bodyPr wrap="square" anchor="t" lIns="38100" rIns="38100" tIns="12700" bIns="12700">
-            <a:spAutoFit/>
-          </a:bodyPr>
-          <a:lstStyle/>
-          <a:p>
-            <a:pPr algn="l">
-              <a:spcAft>
-                <a:spcPts val="600"/>
-              </a:spcAft>
-            </a:pPr>
-            <a:r>
-              <a:rPr sz="1800" b="1">
-                <a:solidFill>
-                  <a:srgbClr val="0099D6"/>
-                </a:solidFill>
-                <a:latin typeface="Calibri"/>
-              </a:rPr>
-              <a:t>Trazabilidad completa</a:t>
-            </a:r>
-          </a:p>
-        </p:txBody>
-      </p:sp>
-      <p:sp>
-        <p:nvSpPr>
-          <p:cNvPr id="10" name="TextBox 9"/>
-          <p:cNvSpPr txBox="1"/>
-          <p:nvPr/>
-        </p:nvSpPr>
-        <p:spPr>
-          <a:xfrm>
-            <a:off x="1143000" y="2971800"/>
-            <a:ext cx="10332720" cy="384048"/>
-          </a:xfrm>
-          <a:prstGeom prst="rect">
-            <a:avLst/>
-          </a:prstGeom>
-          <a:noFill/>
-        </p:spPr>
-        <p:txBody>
-          <a:bodyPr wrap="square" anchor="t" lIns="38100" rIns="38100" tIns="12700" bIns="12700">
-            <a:spAutoFit/>
-          </a:bodyPr>
-          <a:lstStyle/>
-          <a:p>
-            <a:pPr algn="l">
-              <a:spcAft>
-                <a:spcPts val="600"/>
-              </a:spcAft>
-            </a:pPr>
-            <a:r>
-              <a:rPr sz="1400" b="0">
-                <a:solidFill>
-                  <a:srgbClr val="C9D6E0"/>
-                </a:solidFill>
-                <a:latin typeface="Calibri"/>
-              </a:rPr>
-              <a:t>Cada valor cita su norma, su artículo, su página y su enlace.</a:t>
-            </a:r>
-          </a:p>
-        </p:txBody>
-      </p:sp>
-      <p:sp>
-        <p:nvSpPr>
-          <p:cNvPr id="11" name="Rectangle 10"/>
-          <p:cNvSpPr/>
-          <p:nvPr/>
-        </p:nvSpPr>
-        <p:spPr>
-          <a:xfrm>
-            <a:off x="822960" y="3511296"/>
-            <a:ext cx="64008" cy="713232"/>
-          </a:xfrm>
-          <a:prstGeom prst="rect">
-            <a:avLst/>
-          </a:prstGeom>
-          <a:solidFill>
-            <a:srgbClr val="6CB33E"/>
-          </a:solidFill>
-          <a:ln>
-            <a:noFill/>
-          </a:ln>
-          <a:effectLst/>
-        </p:spPr>
-        <p:style>
-          <a:lnRef idx="1">
-            <a:schemeClr val="accent1"/>
-          </a:lnRef>
-          <a:fillRef idx="3">
-            <a:schemeClr val="accent1"/>
-          </a:fillRef>
-          <a:effectRef idx="2">
-            <a:schemeClr val="accent1"/>
-          </a:effectRef>
-          <a:fontRef idx="minor">
-            <a:schemeClr val="lt1"/>
-          </a:fontRef>
-        </p:style>
-        <p:txBody>
-          <a:bodyPr rtlCol="0" anchor="ctr" wrap="square"/>
-          <a:lstStyle/>
-          <a:p>
-            <a:pPr algn="ctr"/>
-          </a:p>
-        </p:txBody>
-      </p:sp>
-      <p:sp>
-        <p:nvSpPr>
-          <p:cNvPr id="12" name="TextBox 11"/>
-          <p:cNvSpPr txBox="1"/>
-          <p:nvPr/>
-        </p:nvSpPr>
-        <p:spPr>
-          <a:xfrm>
-            <a:off x="1143000" y="3483864"/>
-            <a:ext cx="10332720" cy="384048"/>
-          </a:xfrm>
-          <a:prstGeom prst="rect">
-            <a:avLst/>
-          </a:prstGeom>
-          <a:noFill/>
-        </p:spPr>
-        <p:txBody>
-          <a:bodyPr wrap="square" anchor="t" lIns="38100" rIns="38100" tIns="12700" bIns="12700">
-            <a:spAutoFit/>
-          </a:bodyPr>
-          <a:lstStyle/>
-          <a:p>
-            <a:pPr algn="l">
-              <a:spcAft>
-                <a:spcPts val="600"/>
-              </a:spcAft>
-            </a:pPr>
-            <a:r>
-              <a:rPr sz="1800" b="1">
-                <a:solidFill>
-                  <a:srgbClr val="0099D6"/>
-                </a:solidFill>
-                <a:latin typeface="Calibri"/>
-              </a:rPr>
-              <a:t>Transparencia</a:t>
-            </a:r>
-          </a:p>
-        </p:txBody>
-      </p:sp>
-      <p:sp>
-        <p:nvSpPr>
-          <p:cNvPr id="13" name="TextBox 12"/>
-          <p:cNvSpPr txBox="1"/>
-          <p:nvPr/>
-        </p:nvSpPr>
-        <p:spPr>
-          <a:xfrm>
-            <a:off x="1143000" y="3813048"/>
-            <a:ext cx="10332720" cy="384048"/>
-          </a:xfrm>
-          <a:prstGeom prst="rect">
-            <a:avLst/>
-          </a:prstGeom>
-          <a:noFill/>
-        </p:spPr>
-        <p:txBody>
-          <a:bodyPr wrap="square" anchor="t" lIns="38100" rIns="38100" tIns="12700" bIns="12700">
-            <a:spAutoFit/>
-          </a:bodyPr>
-          <a:lstStyle/>
-          <a:p>
-            <a:pPr algn="l">
-              <a:spcAft>
-                <a:spcPts val="600"/>
-              </a:spcAft>
-            </a:pPr>
-            <a:r>
-              <a:rPr sz="1400" b="0">
-                <a:solidFill>
-                  <a:srgbClr val="C9D6E0"/>
-                </a:solidFill>
-                <a:latin typeface="Calibri"/>
-              </a:rPr>
-              <a:t>Lo que la norma no fija se declara explícitamente; no se completa.</a:t>
-            </a:r>
-          </a:p>
-        </p:txBody>
-      </p:sp>
-      <p:sp>
-        <p:nvSpPr>
-          <p:cNvPr id="14" name="Rectangle 13"/>
-          <p:cNvSpPr/>
-          <p:nvPr/>
-        </p:nvSpPr>
-        <p:spPr>
-          <a:xfrm>
-            <a:off x="822960" y="4352544"/>
-            <a:ext cx="64008" cy="713232"/>
-          </a:xfrm>
-          <a:prstGeom prst="rect">
-            <a:avLst/>
-          </a:prstGeom>
-          <a:solidFill>
-            <a:srgbClr val="6CB33E"/>
-          </a:solidFill>
-          <a:ln>
-            <a:noFill/>
-          </a:ln>
-          <a:effectLst/>
-        </p:spPr>
-        <p:style>
-          <a:lnRef idx="1">
-            <a:schemeClr val="accent1"/>
-          </a:lnRef>
-          <a:fillRef idx="3">
-            <a:schemeClr val="accent1"/>
-          </a:fillRef>
-          <a:effectRef idx="2">
-            <a:schemeClr val="accent1"/>
-          </a:effectRef>
-          <a:fontRef idx="minor">
-            <a:schemeClr val="lt1"/>
-          </a:fontRef>
-        </p:style>
-        <p:txBody>
-          <a:bodyPr rtlCol="0" anchor="ctr" wrap="square"/>
-          <a:lstStyle/>
-          <a:p>
-            <a:pPr algn="ctr"/>
-          </a:p>
-        </p:txBody>
-      </p:sp>
-      <p:sp>
-        <p:nvSpPr>
-          <p:cNvPr id="15" name="TextBox 14"/>
-          <p:cNvSpPr txBox="1"/>
-          <p:nvPr/>
-        </p:nvSpPr>
-        <p:spPr>
-          <a:xfrm>
-            <a:off x="1143000" y="4325112"/>
-            <a:ext cx="10332720" cy="384048"/>
-          </a:xfrm>
-          <a:prstGeom prst="rect">
-            <a:avLst/>
-          </a:prstGeom>
-          <a:noFill/>
-        </p:spPr>
-        <p:txBody>
-          <a:bodyPr wrap="square" anchor="t" lIns="38100" rIns="38100" tIns="12700" bIns="12700">
-            <a:spAutoFit/>
-          </a:bodyPr>
-          <a:lstStyle/>
-          <a:p>
-            <a:pPr algn="l">
-              <a:spcAft>
-                <a:spcPts val="600"/>
-              </a:spcAft>
-            </a:pPr>
-            <a:r>
-              <a:rPr sz="1800" b="1">
-                <a:solidFill>
-                  <a:srgbClr val="0099D6"/>
-                </a:solidFill>
-                <a:latin typeface="Calibri"/>
-              </a:rPr>
-              <a:t>Reproducibilidad</a:t>
-            </a:r>
-          </a:p>
-        </p:txBody>
-      </p:sp>
-      <p:sp>
-        <p:nvSpPr>
-          <p:cNvPr id="16" name="TextBox 15"/>
-          <p:cNvSpPr txBox="1"/>
-          <p:nvPr/>
-        </p:nvSpPr>
-        <p:spPr>
-          <a:xfrm>
-            <a:off x="1143000" y="4654296"/>
-            <a:ext cx="10332720" cy="384048"/>
-          </a:xfrm>
-          <a:prstGeom prst="rect">
-            <a:avLst/>
-          </a:prstGeom>
-          <a:noFill/>
-        </p:spPr>
-        <p:txBody>
-          <a:bodyPr wrap="square" anchor="t" lIns="38100" rIns="38100" tIns="12700" bIns="12700">
-            <a:spAutoFit/>
-          </a:bodyPr>
-          <a:lstStyle/>
-          <a:p>
-            <a:pPr algn="l">
-              <a:spcAft>
-                <a:spcPts val="600"/>
-              </a:spcAft>
-            </a:pPr>
-            <a:r>
-              <a:rPr sz="1400" b="0">
-                <a:solidFill>
-                  <a:srgbClr val="C9D6E0"/>
-                </a:solidFill>
-                <a:latin typeface="Calibri"/>
-              </a:rPr>
-              <a:t>Con el mismo código y los mismos datos, el resultado es idéntico en cualquier entorno.</a:t>
-            </a:r>
-          </a:p>
-        </p:txBody>
-      </p:sp>
-      <p:sp>
-        <p:nvSpPr>
-          <p:cNvPr id="17" name="Rectangle 16"/>
-          <p:cNvSpPr/>
-          <p:nvPr/>
-        </p:nvSpPr>
-        <p:spPr>
-          <a:xfrm>
-            <a:off x="822960" y="5193792"/>
-            <a:ext cx="64008" cy="713232"/>
-          </a:xfrm>
-          <a:prstGeom prst="rect">
-            <a:avLst/>
-          </a:prstGeom>
-          <a:solidFill>
-            <a:srgbClr val="6CB33E"/>
-          </a:solidFill>
-          <a:ln>
-            <a:noFill/>
-          </a:ln>
-          <a:effectLst/>
-        </p:spPr>
-        <p:style>
-          <a:lnRef idx="1">
-            <a:schemeClr val="accent1"/>
-          </a:lnRef>
-          <a:fillRef idx="3">
-            <a:schemeClr val="accent1"/>
-          </a:fillRef>
-          <a:effectRef idx="2">
-            <a:schemeClr val="accent1"/>
-          </a:effectRef>
-          <a:fontRef idx="minor">
-            <a:schemeClr val="lt1"/>
-          </a:fontRef>
-        </p:style>
-        <p:txBody>
-          <a:bodyPr rtlCol="0" anchor="ctr" wrap="square"/>
-          <a:lstStyle/>
-          <a:p>
-            <a:pPr algn="ctr"/>
-          </a:p>
-        </p:txBody>
-      </p:sp>
-      <p:sp>
-        <p:nvSpPr>
-          <p:cNvPr id="18" name="TextBox 17"/>
-          <p:cNvSpPr txBox="1"/>
-          <p:nvPr/>
-        </p:nvSpPr>
-        <p:spPr>
-          <a:xfrm>
-            <a:off x="1143000" y="5166359"/>
-            <a:ext cx="10332720" cy="384048"/>
-          </a:xfrm>
-          <a:prstGeom prst="rect">
-            <a:avLst/>
-          </a:prstGeom>
-          <a:noFill/>
-        </p:spPr>
-        <p:txBody>
-          <a:bodyPr wrap="square" anchor="t" lIns="38100" rIns="38100" tIns="12700" bIns="12700">
-            <a:spAutoFit/>
-          </a:bodyPr>
-          <a:lstStyle/>
-          <a:p>
-            <a:pPr algn="l">
-              <a:spcAft>
-                <a:spcPts val="600"/>
-              </a:spcAft>
-            </a:pPr>
-            <a:r>
-              <a:rPr sz="1800" b="1">
-                <a:solidFill>
-                  <a:srgbClr val="0099D6"/>
-                </a:solidFill>
-                <a:latin typeface="Calibri"/>
-              </a:rPr>
-              <a:t>Auditabilidad</a:t>
-            </a:r>
-          </a:p>
-        </p:txBody>
-      </p:sp>
-      <p:sp>
-        <p:nvSpPr>
-          <p:cNvPr id="19" name="TextBox 18"/>
-          <p:cNvSpPr txBox="1"/>
-          <p:nvPr/>
-        </p:nvSpPr>
-        <p:spPr>
-          <a:xfrm>
-            <a:off x="1143000" y="5495544"/>
-            <a:ext cx="10332720" cy="384048"/>
-          </a:xfrm>
-          <a:prstGeom prst="rect">
-            <a:avLst/>
-          </a:prstGeom>
-          <a:noFill/>
-        </p:spPr>
-        <p:txBody>
-          <a:bodyPr wrap="square" anchor="t" lIns="38100" rIns="38100" tIns="12700" bIns="12700">
-            <a:spAutoFit/>
-          </a:bodyPr>
-          <a:lstStyle/>
-          <a:p>
-            <a:pPr algn="l">
-              <a:spcAft>
-                <a:spcPts val="600"/>
-              </a:spcAft>
-            </a:pPr>
-            <a:r>
-              <a:rPr sz="1400" b="0">
-                <a:solidFill>
-                  <a:srgbClr val="C9D6E0"/>
-                </a:solidFill>
-                <a:latin typeface="Calibri"/>
-              </a:rPr>
-              <a:t>La base de conocimiento es consultable: se puede verificar el origen de cada valor.</a:t>
-            </a:r>
-          </a:p>
-        </p:txBody>
-      </p:sp>
-      <p:sp>
-        <p:nvSpPr>
-          <p:cNvPr id="20" name="Rectangle 19"/>
-          <p:cNvSpPr/>
-          <p:nvPr/>
-        </p:nvSpPr>
-        <p:spPr>
-          <a:xfrm>
-            <a:off x="822960" y="6035040"/>
-            <a:ext cx="10607040" cy="54864"/>
-          </a:xfrm>
-          <a:prstGeom prst="rect">
-            <a:avLst/>
-          </a:prstGeom>
-          <a:solidFill>
-            <a:srgbClr val="6CB33E"/>
-          </a:solidFill>
-          <a:ln>
-            <a:noFill/>
-          </a:ln>
-          <a:effectLst/>
-        </p:spPr>
-        <p:style>
-          <a:lnRef idx="1">
-            <a:schemeClr val="accent1"/>
-          </a:lnRef>
-          <a:fillRef idx="3">
-            <a:schemeClr val="accent1"/>
-          </a:fillRef>
-          <a:effectRef idx="2">
-            <a:schemeClr val="accent1"/>
-          </a:effectRef>
-          <a:fontRef idx="minor">
-            <a:schemeClr val="lt1"/>
-          </a:fontRef>
-        </p:style>
-        <p:txBody>
-          <a:bodyPr rtlCol="0" anchor="ctr" wrap="square"/>
-          <a:lstStyle/>
-          <a:p>
-            <a:pPr algn="ctr"/>
-          </a:p>
-        </p:txBody>
-      </p:sp>
-      <p:sp>
-        <p:nvSpPr>
-          <p:cNvPr id="21" name="TextBox 20"/>
-          <p:cNvSpPr txBox="1"/>
-          <p:nvPr/>
-        </p:nvSpPr>
-        <p:spPr>
-          <a:xfrm>
-            <a:off x="822960" y="6172200"/>
-            <a:ext cx="10607040" cy="457200"/>
-          </a:xfrm>
-          <a:prstGeom prst="rect">
-            <a:avLst/>
-          </a:prstGeom>
-          <a:noFill/>
-        </p:spPr>
-        <p:txBody>
-          <a:bodyPr wrap="square" anchor="t" lIns="38100" rIns="38100" tIns="12700" bIns="12700">
-            <a:spAutoFit/>
-          </a:bodyPr>
-          <a:lstStyle/>
-          <a:p>
-            <a:pPr algn="l">
-              <a:spcAft>
-                <a:spcPts val="600"/>
-              </a:spcAft>
-            </a:pPr>
-            <a:r>
-              <a:rPr sz="1800" b="1">
-                <a:solidFill>
-                  <a:srgbClr val="FFFFFF"/>
-                </a:solidFill>
-                <a:latin typeface="Calibri"/>
-              </a:rPr>
-              <a:t>La IA redacta el texto. Los números salen siempre de la normativa oficial.</a:t>
+              <a:t>Ontología v3.2.0 · rev. 2026-07</a:t>
             </a:r>
           </a:p>
         </p:txBody>
@@ -5380,47 +4329,8 @@
         </p:nvSpPr>
         <p:spPr>
           <a:xfrm>
-            <a:off x="502920" y="146304"/>
-            <a:ext cx="10607040" cy="530352"/>
-          </a:xfrm>
-          <a:prstGeom prst="rect">
-            <a:avLst/>
-          </a:prstGeom>
-          <a:noFill/>
-        </p:spPr>
-        <p:txBody>
-          <a:bodyPr wrap="square" anchor="ctr" lIns="38100" rIns="38100" tIns="12700" bIns="12700">
-            <a:spAutoFit/>
-          </a:bodyPr>
-          <a:lstStyle/>
-          <a:p>
-            <a:pPr algn="l">
-              <a:spcAft>
-                <a:spcPts val="600"/>
-              </a:spcAft>
-            </a:pPr>
-            <a:r>
-              <a:rPr sz="2500" b="1">
-                <a:solidFill>
-                  <a:srgbClr val="FFFFFF"/>
-                </a:solidFill>
-                <a:latin typeface="Calibri"/>
-              </a:rPr>
-              <a:t>Contexto, objetivo y alcance</a:t>
-            </a:r>
-          </a:p>
-        </p:txBody>
-      </p:sp>
-      <p:sp>
-        <p:nvSpPr>
-          <p:cNvPr id="5" name="TextBox 4"/>
-          <p:cNvSpPr txBox="1"/>
-          <p:nvPr/>
-        </p:nvSpPr>
-        <p:spPr>
-          <a:xfrm>
-            <a:off x="502920" y="6455664"/>
-            <a:ext cx="8229600" cy="292608"/>
+            <a:off x="502920" y="118872"/>
+            <a:ext cx="10515600" cy="237744"/>
           </a:xfrm>
           <a:prstGeom prst="rect">
             <a:avLst/>
@@ -5439,27 +4349,27 @@
               </a:spcAft>
             </a:pPr>
             <a:r>
-              <a:rPr sz="1000" b="0">
-                <a:solidFill>
-                  <a:srgbClr val="4A5B68"/>
+              <a:rPr sz="1100" b="1">
+                <a:solidFill>
+                  <a:srgbClr val="0099D6"/>
                 </a:solidFill>
                 <a:latin typeface="Calibri"/>
               </a:rPr>
-              <a:t>Comparador Regulatorio de Calidad de Gas — Enagás</a:t>
-            </a:r>
-          </a:p>
-        </p:txBody>
-      </p:sp>
-      <p:sp>
-        <p:nvSpPr>
-          <p:cNvPr id="6" name="TextBox 5"/>
+              <a:t>RESUMEN</a:t>
+            </a:r>
+          </a:p>
+        </p:txBody>
+      </p:sp>
+      <p:sp>
+        <p:nvSpPr>
+          <p:cNvPr id="5" name="TextBox 4"/>
           <p:cNvSpPr txBox="1"/>
           <p:nvPr/>
         </p:nvSpPr>
         <p:spPr>
           <a:xfrm>
-            <a:off x="11155680" y="6455664"/>
-            <a:ext cx="777240" cy="292608"/>
+            <a:off x="502920" y="347472"/>
+            <a:ext cx="10607040" cy="530352"/>
           </a:xfrm>
           <a:prstGeom prst="rect">
             <a:avLst/>
@@ -5472,33 +4382,33 @@
           </a:bodyPr>
           <a:lstStyle/>
           <a:p>
-            <a:pPr algn="r">
+            <a:pPr algn="l">
               <a:spcAft>
                 <a:spcPts val="600"/>
               </a:spcAft>
             </a:pPr>
             <a:r>
-              <a:rPr sz="1000" b="0">
-                <a:solidFill>
-                  <a:srgbClr val="4A5B68"/>
+              <a:rPr sz="2500" b="1">
+                <a:solidFill>
+                  <a:srgbClr val="FFFFFF"/>
                 </a:solidFill>
                 <a:latin typeface="Calibri"/>
               </a:rPr>
-              <a:t>1</a:t>
-            </a:r>
-          </a:p>
-        </p:txBody>
-      </p:sp>
-      <p:sp>
-        <p:nvSpPr>
-          <p:cNvPr id="7" name="TextBox 6"/>
+              <a:t>El sistema, en una diapositiva</a:t>
+            </a:r>
+          </a:p>
+        </p:txBody>
+      </p:sp>
+      <p:sp>
+        <p:nvSpPr>
+          <p:cNvPr id="6" name="TextBox 5"/>
           <p:cNvSpPr txBox="1"/>
           <p:nvPr/>
         </p:nvSpPr>
         <p:spPr>
           <a:xfrm>
-            <a:off x="548640" y="1234440"/>
-            <a:ext cx="11155680" cy="320040"/>
+            <a:off x="502920" y="6455664"/>
+            <a:ext cx="8229600" cy="292608"/>
           </a:xfrm>
           <a:prstGeom prst="rect">
             <a:avLst/>
@@ -5517,26 +4427,768 @@
               </a:spcAft>
             </a:pPr>
             <a:r>
+              <a:rPr sz="1000" b="0">
+                <a:solidFill>
+                  <a:srgbClr val="4A5B68"/>
+                </a:solidFill>
+                <a:latin typeface="Calibri"/>
+              </a:rPr>
+              <a:t>Comparador Regulatorio de Calidad de Gas — Enagás</a:t>
+            </a:r>
+          </a:p>
+        </p:txBody>
+      </p:sp>
+      <p:sp>
+        <p:nvSpPr>
+          <p:cNvPr id="7" name="TextBox 6"/>
+          <p:cNvSpPr txBox="1"/>
+          <p:nvPr/>
+        </p:nvSpPr>
+        <p:spPr>
+          <a:xfrm>
+            <a:off x="11155680" y="6455664"/>
+            <a:ext cx="777240" cy="292608"/>
+          </a:xfrm>
+          <a:prstGeom prst="rect">
+            <a:avLst/>
+          </a:prstGeom>
+          <a:noFill/>
+        </p:spPr>
+        <p:txBody>
+          <a:bodyPr wrap="square" anchor="t" lIns="38100" rIns="38100" tIns="12700" bIns="12700">
+            <a:spAutoFit/>
+          </a:bodyPr>
+          <a:lstStyle/>
+          <a:p>
+            <a:pPr algn="r">
+              <a:spcAft>
+                <a:spcPts val="600"/>
+              </a:spcAft>
+            </a:pPr>
+            <a:r>
+              <a:rPr sz="1000" b="0">
+                <a:solidFill>
+                  <a:srgbClr val="4A5B68"/>
+                </a:solidFill>
+                <a:latin typeface="Calibri"/>
+              </a:rPr>
+              <a:t>1</a:t>
+            </a:r>
+          </a:p>
+        </p:txBody>
+      </p:sp>
+      <p:sp>
+        <p:nvSpPr>
+          <p:cNvPr id="8" name="TextBox 7"/>
+          <p:cNvSpPr txBox="1"/>
+          <p:nvPr/>
+        </p:nvSpPr>
+        <p:spPr>
+          <a:xfrm>
+            <a:off x="548640" y="1234440"/>
+            <a:ext cx="11155680" cy="320040"/>
+          </a:xfrm>
+          <a:prstGeom prst="rect">
+            <a:avLst/>
+          </a:prstGeom>
+          <a:noFill/>
+        </p:spPr>
+        <p:txBody>
+          <a:bodyPr wrap="square" anchor="t" lIns="38100" rIns="38100" tIns="12700" bIns="12700">
+            <a:spAutoFit/>
+          </a:bodyPr>
+          <a:lstStyle/>
+          <a:p>
+            <a:pPr algn="l">
+              <a:spcAft>
+                <a:spcPts val="600"/>
+              </a:spcAft>
+            </a:pPr>
+            <a:r>
               <a:rPr sz="1400" b="0">
                 <a:solidFill>
                   <a:srgbClr val="4A5B68"/>
                 </a:solidFill>
                 <a:latin typeface="Calibri"/>
               </a:rPr>
-              <a:t>El problema es concreto; la propuesta de valor, también.</a:t>
-            </a:r>
-          </a:p>
-        </p:txBody>
-      </p:sp>
-      <p:sp>
-        <p:nvSpPr>
-          <p:cNvPr id="8" name="Rounded Rectangle 7"/>
+              <a:t>Lo que acabáis de ver, resumido — y la promesa que lo sostiene.</a:t>
+            </a:r>
+          </a:p>
+        </p:txBody>
+      </p:sp>
+      <p:sp>
+        <p:nvSpPr>
+          <p:cNvPr id="9" name="Rectangle 8"/>
           <p:cNvSpPr/>
           <p:nvPr/>
         </p:nvSpPr>
         <p:spPr>
           <a:xfrm>
-            <a:off x="548640" y="1600200"/>
+            <a:off x="548640" y="1645920"/>
+            <a:ext cx="2697480" cy="1600200"/>
+          </a:xfrm>
+          <a:prstGeom prst="rect">
+            <a:avLst/>
+          </a:prstGeom>
+          <a:solidFill>
+            <a:srgbClr val="EEF2F6"/>
+          </a:solidFill>
+          <a:ln>
+            <a:noFill/>
+          </a:ln>
+          <a:effectLst/>
+        </p:spPr>
+        <p:style>
+          <a:lnRef idx="1">
+            <a:schemeClr val="accent1"/>
+          </a:lnRef>
+          <a:fillRef idx="3">
+            <a:schemeClr val="accent1"/>
+          </a:fillRef>
+          <a:effectRef idx="2">
+            <a:schemeClr val="accent1"/>
+          </a:effectRef>
+          <a:fontRef idx="minor">
+            <a:schemeClr val="lt1"/>
+          </a:fontRef>
+        </p:style>
+        <p:txBody>
+          <a:bodyPr rtlCol="0" anchor="ctr" wrap="square"/>
+          <a:lstStyle/>
+          <a:p>
+            <a:pPr algn="ctr"/>
+          </a:p>
+        </p:txBody>
+      </p:sp>
+      <p:sp>
+        <p:nvSpPr>
+          <p:cNvPr id="10" name="Rectangle 9"/>
+          <p:cNvSpPr/>
+          <p:nvPr/>
+        </p:nvSpPr>
+        <p:spPr>
+          <a:xfrm>
+            <a:off x="548640" y="1645920"/>
+            <a:ext cx="2697480" cy="73152"/>
+          </a:xfrm>
+          <a:prstGeom prst="rect">
+            <a:avLst/>
+          </a:prstGeom>
+          <a:solidFill>
+            <a:srgbClr val="0099D6"/>
+          </a:solidFill>
+          <a:ln>
+            <a:noFill/>
+          </a:ln>
+          <a:effectLst/>
+        </p:spPr>
+        <p:style>
+          <a:lnRef idx="1">
+            <a:schemeClr val="accent1"/>
+          </a:lnRef>
+          <a:fillRef idx="3">
+            <a:schemeClr val="accent1"/>
+          </a:fillRef>
+          <a:effectRef idx="2">
+            <a:schemeClr val="accent1"/>
+          </a:effectRef>
+          <a:fontRef idx="minor">
+            <a:schemeClr val="lt1"/>
+          </a:fontRef>
+        </p:style>
+        <p:txBody>
+          <a:bodyPr rtlCol="0" anchor="ctr" wrap="square"/>
+          <a:lstStyle/>
+          <a:p>
+            <a:pPr algn="ctr"/>
+          </a:p>
+        </p:txBody>
+      </p:sp>
+      <p:sp>
+        <p:nvSpPr>
+          <p:cNvPr id="11" name="TextBox 10"/>
+          <p:cNvSpPr txBox="1"/>
+          <p:nvPr/>
+        </p:nvSpPr>
+        <p:spPr>
+          <a:xfrm>
+            <a:off x="548640" y="1828800"/>
+            <a:ext cx="2697480" cy="822960"/>
+          </a:xfrm>
+          <a:prstGeom prst="rect">
+            <a:avLst/>
+          </a:prstGeom>
+          <a:noFill/>
+        </p:spPr>
+        <p:txBody>
+          <a:bodyPr wrap="square" anchor="t" lIns="38100" rIns="38100" tIns="12700" bIns="12700">
+            <a:spAutoFit/>
+          </a:bodyPr>
+          <a:lstStyle/>
+          <a:p>
+            <a:pPr algn="ctr">
+              <a:spcAft>
+                <a:spcPts val="600"/>
+              </a:spcAft>
+            </a:pPr>
+            <a:r>
+              <a:rPr sz="4200" b="1">
+                <a:solidFill>
+                  <a:srgbClr val="013A57"/>
+                </a:solidFill>
+                <a:latin typeface="Calibri"/>
+              </a:rPr>
+              <a:t>21</a:t>
+            </a:r>
+          </a:p>
+        </p:txBody>
+      </p:sp>
+      <p:sp>
+        <p:nvSpPr>
+          <p:cNvPr id="12" name="TextBox 11"/>
+          <p:cNvSpPr txBox="1"/>
+          <p:nvPr/>
+        </p:nvSpPr>
+        <p:spPr>
+          <a:xfrm>
+            <a:off x="548640" y="2697480"/>
+            <a:ext cx="2697480" cy="411480"/>
+          </a:xfrm>
+          <a:prstGeom prst="rect">
+            <a:avLst/>
+          </a:prstGeom>
+          <a:noFill/>
+        </p:spPr>
+        <p:txBody>
+          <a:bodyPr wrap="square" anchor="t" lIns="38100" rIns="38100" tIns="12700" bIns="12700">
+            <a:spAutoFit/>
+          </a:bodyPr>
+          <a:lstStyle/>
+          <a:p>
+            <a:pPr algn="ctr">
+              <a:spcAft>
+                <a:spcPts val="600"/>
+              </a:spcAft>
+            </a:pPr>
+            <a:r>
+              <a:rPr sz="1300" b="0">
+                <a:solidFill>
+                  <a:srgbClr val="4A5B68"/>
+                </a:solidFill>
+                <a:latin typeface="Calibri"/>
+              </a:rPr>
+              <a:t>jurisdicciones</a:t>
+            </a:r>
+          </a:p>
+        </p:txBody>
+      </p:sp>
+      <p:sp>
+        <p:nvSpPr>
+          <p:cNvPr id="13" name="Rectangle 12"/>
+          <p:cNvSpPr/>
+          <p:nvPr/>
+        </p:nvSpPr>
+        <p:spPr>
+          <a:xfrm>
+            <a:off x="3392424" y="1645920"/>
+            <a:ext cx="2697480" cy="1600200"/>
+          </a:xfrm>
+          <a:prstGeom prst="rect">
+            <a:avLst/>
+          </a:prstGeom>
+          <a:solidFill>
+            <a:srgbClr val="EEF2F6"/>
+          </a:solidFill>
+          <a:ln>
+            <a:noFill/>
+          </a:ln>
+          <a:effectLst/>
+        </p:spPr>
+        <p:style>
+          <a:lnRef idx="1">
+            <a:schemeClr val="accent1"/>
+          </a:lnRef>
+          <a:fillRef idx="3">
+            <a:schemeClr val="accent1"/>
+          </a:fillRef>
+          <a:effectRef idx="2">
+            <a:schemeClr val="accent1"/>
+          </a:effectRef>
+          <a:fontRef idx="minor">
+            <a:schemeClr val="lt1"/>
+          </a:fontRef>
+        </p:style>
+        <p:txBody>
+          <a:bodyPr rtlCol="0" anchor="ctr" wrap="square"/>
+          <a:lstStyle/>
+          <a:p>
+            <a:pPr algn="ctr"/>
+          </a:p>
+        </p:txBody>
+      </p:sp>
+      <p:sp>
+        <p:nvSpPr>
+          <p:cNvPr id="14" name="Rectangle 13"/>
+          <p:cNvSpPr/>
+          <p:nvPr/>
+        </p:nvSpPr>
+        <p:spPr>
+          <a:xfrm>
+            <a:off x="3392424" y="1645920"/>
+            <a:ext cx="2697480" cy="73152"/>
+          </a:xfrm>
+          <a:prstGeom prst="rect">
+            <a:avLst/>
+          </a:prstGeom>
+          <a:solidFill>
+            <a:srgbClr val="0099D6"/>
+          </a:solidFill>
+          <a:ln>
+            <a:noFill/>
+          </a:ln>
+          <a:effectLst/>
+        </p:spPr>
+        <p:style>
+          <a:lnRef idx="1">
+            <a:schemeClr val="accent1"/>
+          </a:lnRef>
+          <a:fillRef idx="3">
+            <a:schemeClr val="accent1"/>
+          </a:fillRef>
+          <a:effectRef idx="2">
+            <a:schemeClr val="accent1"/>
+          </a:effectRef>
+          <a:fontRef idx="minor">
+            <a:schemeClr val="lt1"/>
+          </a:fontRef>
+        </p:style>
+        <p:txBody>
+          <a:bodyPr rtlCol="0" anchor="ctr" wrap="square"/>
+          <a:lstStyle/>
+          <a:p>
+            <a:pPr algn="ctr"/>
+          </a:p>
+        </p:txBody>
+      </p:sp>
+      <p:sp>
+        <p:nvSpPr>
+          <p:cNvPr id="15" name="TextBox 14"/>
+          <p:cNvSpPr txBox="1"/>
+          <p:nvPr/>
+        </p:nvSpPr>
+        <p:spPr>
+          <a:xfrm>
+            <a:off x="3392424" y="1828800"/>
+            <a:ext cx="2697480" cy="822960"/>
+          </a:xfrm>
+          <a:prstGeom prst="rect">
+            <a:avLst/>
+          </a:prstGeom>
+          <a:noFill/>
+        </p:spPr>
+        <p:txBody>
+          <a:bodyPr wrap="square" anchor="t" lIns="38100" rIns="38100" tIns="12700" bIns="12700">
+            <a:spAutoFit/>
+          </a:bodyPr>
+          <a:lstStyle/>
+          <a:p>
+            <a:pPr algn="ctr">
+              <a:spcAft>
+                <a:spcPts val="600"/>
+              </a:spcAft>
+            </a:pPr>
+            <a:r>
+              <a:rPr sz="4200" b="1">
+                <a:solidFill>
+                  <a:srgbClr val="013A57"/>
+                </a:solidFill>
+                <a:latin typeface="Calibri"/>
+              </a:rPr>
+              <a:t>10</a:t>
+            </a:r>
+          </a:p>
+        </p:txBody>
+      </p:sp>
+      <p:sp>
+        <p:nvSpPr>
+          <p:cNvPr id="16" name="TextBox 15"/>
+          <p:cNvSpPr txBox="1"/>
+          <p:nvPr/>
+        </p:nvSpPr>
+        <p:spPr>
+          <a:xfrm>
+            <a:off x="3392424" y="2697480"/>
+            <a:ext cx="2697480" cy="411480"/>
+          </a:xfrm>
+          <a:prstGeom prst="rect">
+            <a:avLst/>
+          </a:prstGeom>
+          <a:noFill/>
+        </p:spPr>
+        <p:txBody>
+          <a:bodyPr wrap="square" anchor="t" lIns="38100" rIns="38100" tIns="12700" bIns="12700">
+            <a:spAutoFit/>
+          </a:bodyPr>
+          <a:lstStyle/>
+          <a:p>
+            <a:pPr algn="ctr">
+              <a:spcAft>
+                <a:spcPts val="600"/>
+              </a:spcAft>
+            </a:pPr>
+            <a:r>
+              <a:rPr sz="1300" b="0">
+                <a:solidFill>
+                  <a:srgbClr val="4A5B68"/>
+                </a:solidFill>
+                <a:latin typeface="Calibri"/>
+              </a:rPr>
+              <a:t>parámetros de calidad</a:t>
+            </a:r>
+          </a:p>
+        </p:txBody>
+      </p:sp>
+      <p:sp>
+        <p:nvSpPr>
+          <p:cNvPr id="17" name="Rectangle 16"/>
+          <p:cNvSpPr/>
+          <p:nvPr/>
+        </p:nvSpPr>
+        <p:spPr>
+          <a:xfrm>
+            <a:off x="6236208" y="1645920"/>
+            <a:ext cx="2697480" cy="1600200"/>
+          </a:xfrm>
+          <a:prstGeom prst="rect">
+            <a:avLst/>
+          </a:prstGeom>
+          <a:solidFill>
+            <a:srgbClr val="EEF2F6"/>
+          </a:solidFill>
+          <a:ln>
+            <a:noFill/>
+          </a:ln>
+          <a:effectLst/>
+        </p:spPr>
+        <p:style>
+          <a:lnRef idx="1">
+            <a:schemeClr val="accent1"/>
+          </a:lnRef>
+          <a:fillRef idx="3">
+            <a:schemeClr val="accent1"/>
+          </a:fillRef>
+          <a:effectRef idx="2">
+            <a:schemeClr val="accent1"/>
+          </a:effectRef>
+          <a:fontRef idx="minor">
+            <a:schemeClr val="lt1"/>
+          </a:fontRef>
+        </p:style>
+        <p:txBody>
+          <a:bodyPr rtlCol="0" anchor="ctr" wrap="square"/>
+          <a:lstStyle/>
+          <a:p>
+            <a:pPr algn="ctr"/>
+          </a:p>
+        </p:txBody>
+      </p:sp>
+      <p:sp>
+        <p:nvSpPr>
+          <p:cNvPr id="18" name="Rectangle 17"/>
+          <p:cNvSpPr/>
+          <p:nvPr/>
+        </p:nvSpPr>
+        <p:spPr>
+          <a:xfrm>
+            <a:off x="6236208" y="1645920"/>
+            <a:ext cx="2697480" cy="73152"/>
+          </a:xfrm>
+          <a:prstGeom prst="rect">
+            <a:avLst/>
+          </a:prstGeom>
+          <a:solidFill>
+            <a:srgbClr val="0099D6"/>
+          </a:solidFill>
+          <a:ln>
+            <a:noFill/>
+          </a:ln>
+          <a:effectLst/>
+        </p:spPr>
+        <p:style>
+          <a:lnRef idx="1">
+            <a:schemeClr val="accent1"/>
+          </a:lnRef>
+          <a:fillRef idx="3">
+            <a:schemeClr val="accent1"/>
+          </a:fillRef>
+          <a:effectRef idx="2">
+            <a:schemeClr val="accent1"/>
+          </a:effectRef>
+          <a:fontRef idx="minor">
+            <a:schemeClr val="lt1"/>
+          </a:fontRef>
+        </p:style>
+        <p:txBody>
+          <a:bodyPr rtlCol="0" anchor="ctr" wrap="square"/>
+          <a:lstStyle/>
+          <a:p>
+            <a:pPr algn="ctr"/>
+          </a:p>
+        </p:txBody>
+      </p:sp>
+      <p:sp>
+        <p:nvSpPr>
+          <p:cNvPr id="19" name="TextBox 18"/>
+          <p:cNvSpPr txBox="1"/>
+          <p:nvPr/>
+        </p:nvSpPr>
+        <p:spPr>
+          <a:xfrm>
+            <a:off x="6236208" y="1828800"/>
+            <a:ext cx="2697480" cy="822960"/>
+          </a:xfrm>
+          <a:prstGeom prst="rect">
+            <a:avLst/>
+          </a:prstGeom>
+          <a:noFill/>
+        </p:spPr>
+        <p:txBody>
+          <a:bodyPr wrap="square" anchor="t" lIns="38100" rIns="38100" tIns="12700" bIns="12700">
+            <a:spAutoFit/>
+          </a:bodyPr>
+          <a:lstStyle/>
+          <a:p>
+            <a:pPr algn="ctr">
+              <a:spcAft>
+                <a:spcPts val="600"/>
+              </a:spcAft>
+            </a:pPr>
+            <a:r>
+              <a:rPr sz="4200" b="1">
+                <a:solidFill>
+                  <a:srgbClr val="013A57"/>
+                </a:solidFill>
+                <a:latin typeface="Calibri"/>
+              </a:rPr>
+              <a:t>277</a:t>
+            </a:r>
+          </a:p>
+        </p:txBody>
+      </p:sp>
+      <p:sp>
+        <p:nvSpPr>
+          <p:cNvPr id="20" name="TextBox 19"/>
+          <p:cNvSpPr txBox="1"/>
+          <p:nvPr/>
+        </p:nvSpPr>
+        <p:spPr>
+          <a:xfrm>
+            <a:off x="6236208" y="2697480"/>
+            <a:ext cx="2697480" cy="411480"/>
+          </a:xfrm>
+          <a:prstGeom prst="rect">
+            <a:avLst/>
+          </a:prstGeom>
+          <a:noFill/>
+        </p:spPr>
+        <p:txBody>
+          <a:bodyPr wrap="square" anchor="t" lIns="38100" rIns="38100" tIns="12700" bIns="12700">
+            <a:spAutoFit/>
+          </a:bodyPr>
+          <a:lstStyle/>
+          <a:p>
+            <a:pPr algn="ctr">
+              <a:spcAft>
+                <a:spcPts val="600"/>
+              </a:spcAft>
+            </a:pPr>
+            <a:r>
+              <a:rPr sz="1300" b="0">
+                <a:solidFill>
+                  <a:srgbClr val="4A5B68"/>
+                </a:solidFill>
+                <a:latin typeface="Calibri"/>
+              </a:rPr>
+              <a:t>valores trazables</a:t>
+            </a:r>
+          </a:p>
+        </p:txBody>
+      </p:sp>
+      <p:sp>
+        <p:nvSpPr>
+          <p:cNvPr id="21" name="Rectangle 20"/>
+          <p:cNvSpPr/>
+          <p:nvPr/>
+        </p:nvSpPr>
+        <p:spPr>
+          <a:xfrm>
+            <a:off x="9079992" y="1645920"/>
+            <a:ext cx="2697480" cy="1600200"/>
+          </a:xfrm>
+          <a:prstGeom prst="rect">
+            <a:avLst/>
+          </a:prstGeom>
+          <a:solidFill>
+            <a:srgbClr val="EEF2F6"/>
+          </a:solidFill>
+          <a:ln>
+            <a:noFill/>
+          </a:ln>
+          <a:effectLst/>
+        </p:spPr>
+        <p:style>
+          <a:lnRef idx="1">
+            <a:schemeClr val="accent1"/>
+          </a:lnRef>
+          <a:fillRef idx="3">
+            <a:schemeClr val="accent1"/>
+          </a:fillRef>
+          <a:effectRef idx="2">
+            <a:schemeClr val="accent1"/>
+          </a:effectRef>
+          <a:fontRef idx="minor">
+            <a:schemeClr val="lt1"/>
+          </a:fontRef>
+        </p:style>
+        <p:txBody>
+          <a:bodyPr rtlCol="0" anchor="ctr" wrap="square"/>
+          <a:lstStyle/>
+          <a:p>
+            <a:pPr algn="ctr"/>
+          </a:p>
+        </p:txBody>
+      </p:sp>
+      <p:sp>
+        <p:nvSpPr>
+          <p:cNvPr id="22" name="Rectangle 21"/>
+          <p:cNvSpPr/>
+          <p:nvPr/>
+        </p:nvSpPr>
+        <p:spPr>
+          <a:xfrm>
+            <a:off x="9079992" y="1645920"/>
+            <a:ext cx="2697480" cy="73152"/>
+          </a:xfrm>
+          <a:prstGeom prst="rect">
+            <a:avLst/>
+          </a:prstGeom>
+          <a:solidFill>
+            <a:srgbClr val="6CB33E"/>
+          </a:solidFill>
+          <a:ln>
+            <a:noFill/>
+          </a:ln>
+          <a:effectLst/>
+        </p:spPr>
+        <p:style>
+          <a:lnRef idx="1">
+            <a:schemeClr val="accent1"/>
+          </a:lnRef>
+          <a:fillRef idx="3">
+            <a:schemeClr val="accent1"/>
+          </a:fillRef>
+          <a:effectRef idx="2">
+            <a:schemeClr val="accent1"/>
+          </a:effectRef>
+          <a:fontRef idx="minor">
+            <a:schemeClr val="lt1"/>
+          </a:fontRef>
+        </p:style>
+        <p:txBody>
+          <a:bodyPr rtlCol="0" anchor="ctr" wrap="square"/>
+          <a:lstStyle/>
+          <a:p>
+            <a:pPr algn="ctr"/>
+          </a:p>
+        </p:txBody>
+      </p:sp>
+      <p:sp>
+        <p:nvSpPr>
+          <p:cNvPr id="23" name="TextBox 22"/>
+          <p:cNvSpPr txBox="1"/>
+          <p:nvPr/>
+        </p:nvSpPr>
+        <p:spPr>
+          <a:xfrm>
+            <a:off x="9079992" y="1828800"/>
+            <a:ext cx="2697480" cy="822960"/>
+          </a:xfrm>
+          <a:prstGeom prst="rect">
+            <a:avLst/>
+          </a:prstGeom>
+          <a:noFill/>
+        </p:spPr>
+        <p:txBody>
+          <a:bodyPr wrap="square" anchor="t" lIns="38100" rIns="38100" tIns="12700" bIns="12700">
+            <a:spAutoFit/>
+          </a:bodyPr>
+          <a:lstStyle/>
+          <a:p>
+            <a:pPr algn="ctr">
+              <a:spcAft>
+                <a:spcPts val="600"/>
+              </a:spcAft>
+            </a:pPr>
+            <a:r>
+              <a:rPr sz="4200" b="1">
+                <a:solidFill>
+                  <a:srgbClr val="013A57"/>
+                </a:solidFill>
+                <a:latin typeface="Calibri"/>
+              </a:rPr>
+              <a:t>0</a:t>
+            </a:r>
+          </a:p>
+        </p:txBody>
+      </p:sp>
+      <p:sp>
+        <p:nvSpPr>
+          <p:cNvPr id="24" name="TextBox 23"/>
+          <p:cNvSpPr txBox="1"/>
+          <p:nvPr/>
+        </p:nvSpPr>
+        <p:spPr>
+          <a:xfrm>
+            <a:off x="9079992" y="2697480"/>
+            <a:ext cx="2697480" cy="411480"/>
+          </a:xfrm>
+          <a:prstGeom prst="rect">
+            <a:avLst/>
+          </a:prstGeom>
+          <a:noFill/>
+        </p:spPr>
+        <p:txBody>
+          <a:bodyPr wrap="square" anchor="t" lIns="38100" rIns="38100" tIns="12700" bIns="12700">
+            <a:spAutoFit/>
+          </a:bodyPr>
+          <a:lstStyle/>
+          <a:p>
+            <a:pPr algn="ctr">
+              <a:spcAft>
+                <a:spcPts val="600"/>
+              </a:spcAft>
+            </a:pPr>
+            <a:r>
+              <a:rPr sz="1300" b="0">
+                <a:solidFill>
+                  <a:srgbClr val="4A5B68"/>
+                </a:solidFill>
+                <a:latin typeface="Calibri"/>
+              </a:rPr>
+              <a:t>cifras inventadas</a:t>
+            </a:r>
+          </a:p>
+        </p:txBody>
+      </p:sp>
+      <p:sp>
+        <p:nvSpPr>
+          <p:cNvPr id="25" name="Rounded Rectangle 24"/>
+          <p:cNvSpPr/>
+          <p:nvPr/>
+        </p:nvSpPr>
+        <p:spPr>
+          <a:xfrm>
+            <a:off x="548640" y="3429000"/>
             <a:ext cx="5394960" cy="2148840"/>
           </a:xfrm>
           <a:prstGeom prst="roundRect">
@@ -5578,13 +5230,13 @@
       </p:sp>
       <p:sp>
         <p:nvSpPr>
-          <p:cNvPr id="9" name="Rectangle 8"/>
+          <p:cNvPr id="26" name="Rectangle 25"/>
           <p:cNvSpPr/>
           <p:nvPr/>
         </p:nvSpPr>
         <p:spPr>
           <a:xfrm>
-            <a:off x="548640" y="1600200"/>
+            <a:off x="548640" y="3429000"/>
             <a:ext cx="5394960" cy="457200"/>
           </a:xfrm>
           <a:prstGeom prst="rect">
@@ -5622,13 +5274,13 @@
       </p:sp>
       <p:sp>
         <p:nvSpPr>
-          <p:cNvPr id="10" name="TextBox 9"/>
+          <p:cNvPr id="27" name="TextBox 26"/>
           <p:cNvSpPr txBox="1"/>
           <p:nvPr/>
         </p:nvSpPr>
         <p:spPr>
           <a:xfrm>
-            <a:off x="713232" y="1645920"/>
+            <a:off x="713232" y="3474720"/>
             <a:ext cx="5029200" cy="384048"/>
           </a:xfrm>
           <a:prstGeom prst="rect">
@@ -5654,20 +5306,20 @@
                 </a:solidFill>
                 <a:latin typeface="Calibri"/>
               </a:rPr>
-              <a:t>EL PROBLEMA</a:t>
-            </a:r>
-          </a:p>
-        </p:txBody>
-      </p:sp>
-      <p:sp>
-        <p:nvSpPr>
-          <p:cNvPr id="11" name="TextBox 10"/>
+              <a:t>EL PROBLEMA QUE RESUELVE</a:t>
+            </a:r>
+          </a:p>
+        </p:txBody>
+      </p:sp>
+      <p:sp>
+        <p:nvSpPr>
+          <p:cNvPr id="28" name="TextBox 27"/>
           <p:cNvSpPr txBox="1"/>
           <p:nvPr/>
         </p:nvSpPr>
         <p:spPr>
           <a:xfrm>
-            <a:off x="731520" y="2194560"/>
+            <a:off x="731520" y="4023360"/>
             <a:ext cx="5029200" cy="1463040"/>
           </a:xfrm>
           <a:prstGeom prst="rect">
@@ -5709,7 +5361,7 @@
                 </a:solidFill>
                 <a:latin typeface="Calibri"/>
               </a:rPr>
-              <a:t>• Las unidades y las condiciones de referencia NO coinciden: unos miden a 0 °C, otros a 15 o a 25 °C.</a:t>
+              <a:t>• Las unidades y las condiciones NO coinciden: unos miden a 0 °C, otros a 15 o a 25 °C.</a:t>
             </a:r>
           </a:p>
           <a:p>
@@ -5732,13 +5384,13 @@
       </p:sp>
       <p:sp>
         <p:nvSpPr>
-          <p:cNvPr id="12" name="Rounded Rectangle 11"/>
+          <p:cNvPr id="29" name="Rounded Rectangle 28"/>
           <p:cNvSpPr/>
           <p:nvPr/>
         </p:nvSpPr>
         <p:spPr>
           <a:xfrm>
-            <a:off x="6263640" y="1600200"/>
+            <a:off x="6263640" y="3429000"/>
             <a:ext cx="5394960" cy="2148840"/>
           </a:xfrm>
           <a:prstGeom prst="roundRect">
@@ -5780,13 +5432,13 @@
       </p:sp>
       <p:sp>
         <p:nvSpPr>
-          <p:cNvPr id="13" name="Rectangle 12"/>
+          <p:cNvPr id="30" name="Rectangle 29"/>
           <p:cNvSpPr/>
           <p:nvPr/>
         </p:nvSpPr>
         <p:spPr>
           <a:xfrm>
-            <a:off x="6263640" y="1600200"/>
+            <a:off x="6263640" y="3429000"/>
             <a:ext cx="5394960" cy="457200"/>
           </a:xfrm>
           <a:prstGeom prst="rect">
@@ -5824,13 +5476,13 @@
       </p:sp>
       <p:sp>
         <p:nvSpPr>
-          <p:cNvPr id="14" name="TextBox 13"/>
+          <p:cNvPr id="31" name="TextBox 30"/>
           <p:cNvSpPr txBox="1"/>
           <p:nvPr/>
         </p:nvSpPr>
         <p:spPr>
           <a:xfrm>
-            <a:off x="6428232" y="1645920"/>
+            <a:off x="6428232" y="3474720"/>
             <a:ext cx="5029200" cy="384048"/>
           </a:xfrm>
           <a:prstGeom prst="rect">
@@ -5856,20 +5508,20 @@
                 </a:solidFill>
                 <a:latin typeface="Calibri"/>
               </a:rPr>
-              <a:t>LA SOLUCIÓN</a:t>
-            </a:r>
-          </a:p>
-        </p:txBody>
-      </p:sp>
-      <p:sp>
-        <p:nvSpPr>
-          <p:cNvPr id="15" name="TextBox 14"/>
+              <a:t>CÓMO LO GARANTIZAMOS</a:t>
+            </a:r>
+          </a:p>
+        </p:txBody>
+      </p:sp>
+      <p:sp>
+        <p:nvSpPr>
+          <p:cNvPr id="32" name="TextBox 31"/>
           <p:cNvSpPr txBox="1"/>
           <p:nvPr/>
         </p:nvSpPr>
         <p:spPr>
           <a:xfrm>
-            <a:off x="6446520" y="2194560"/>
+            <a:off x="6446520" y="4023360"/>
             <a:ext cx="5029200" cy="1463040"/>
           </a:xfrm>
           <a:prstGeom prst="rect">
@@ -5889,13 +5541,29 @@
               </a:spcAft>
             </a:pPr>
             <a:r>
+              <a:rPr sz="1300" b="1">
+                <a:solidFill>
+                  <a:srgbClr val="013A57"/>
+                </a:solidFill>
+                <a:latin typeface="Calibri"/>
+              </a:rPr>
+              <a:t>• Las cifras NO nacen en el modelo: salen de una base verificada, con su cita.</a:t>
+            </a:r>
+          </a:p>
+          <a:p>
+            <a:pPr algn="l">
+              <a:spcAft>
+                <a:spcPts val="700"/>
+              </a:spcAft>
+            </a:pPr>
+            <a:r>
               <a:rPr sz="1300" b="0">
                 <a:solidFill>
                   <a:srgbClr val="1B2A38"/>
                 </a:solidFill>
                 <a:latin typeface="Calibri"/>
               </a:rPr>
-              <a:t>• Un asistente que compara 21 jurisdicciones y 10 parámetros, en lenguaje natural.</a:t>
+              <a:t>• Antes de comparar, se normalizan unidades y condiciones (ISO 13443).</a:t>
             </a:r>
           </a:p>
           <a:p>
@@ -5911,701 +5579,21 @@
                 </a:solidFill>
                 <a:latin typeface="Calibri"/>
               </a:rPr>
-              <a:t>• Normaliza unidades y condiciones (ISO 13443) ANTES de comparar, y cita la fuente de cada cifra.</a:t>
-            </a:r>
-          </a:p>
-          <a:p>
-            <a:pPr algn="l">
-              <a:spcAft>
-                <a:spcPts val="700"/>
-              </a:spcAft>
-            </a:pPr>
-            <a:r>
-              <a:rPr sz="1300" b="1">
-                <a:solidFill>
-                  <a:srgbClr val="013A57"/>
-                </a:solidFill>
-                <a:latin typeface="Calibri"/>
-              </a:rPr>
-              <a:t>• Principio de diseño: CERO CIFRAS INVENTADAS.</a:t>
-            </a:r>
-          </a:p>
-        </p:txBody>
-      </p:sp>
-      <p:sp>
-        <p:nvSpPr>
-          <p:cNvPr id="16" name="Rectangle 15"/>
+              <a:t>• Lo que la norma no fija, se declara: no se rellena con estimaciones.</a:t>
+            </a:r>
+          </a:p>
+        </p:txBody>
+      </p:sp>
+      <p:sp>
+        <p:nvSpPr>
+          <p:cNvPr id="33" name="Rectangle 32"/>
           <p:cNvSpPr/>
           <p:nvPr/>
         </p:nvSpPr>
         <p:spPr>
           <a:xfrm>
-            <a:off x="548640" y="3931920"/>
-            <a:ext cx="2697480" cy="1463040"/>
-          </a:xfrm>
-          <a:prstGeom prst="rect">
-            <a:avLst/>
-          </a:prstGeom>
-          <a:solidFill>
-            <a:srgbClr val="EEF2F6"/>
-          </a:solidFill>
-          <a:ln>
-            <a:noFill/>
-          </a:ln>
-          <a:effectLst/>
-        </p:spPr>
-        <p:style>
-          <a:lnRef idx="1">
-            <a:schemeClr val="accent1"/>
-          </a:lnRef>
-          <a:fillRef idx="3">
-            <a:schemeClr val="accent1"/>
-          </a:fillRef>
-          <a:effectRef idx="2">
-            <a:schemeClr val="accent1"/>
-          </a:effectRef>
-          <a:fontRef idx="minor">
-            <a:schemeClr val="lt1"/>
-          </a:fontRef>
-        </p:style>
-        <p:txBody>
-          <a:bodyPr rtlCol="0" anchor="ctr" wrap="square"/>
-          <a:lstStyle/>
-          <a:p>
-            <a:pPr algn="ctr"/>
-          </a:p>
-        </p:txBody>
-      </p:sp>
-      <p:sp>
-        <p:nvSpPr>
-          <p:cNvPr id="17" name="Rectangle 16"/>
-          <p:cNvSpPr/>
-          <p:nvPr/>
-        </p:nvSpPr>
-        <p:spPr>
-          <a:xfrm>
-            <a:off x="548640" y="3931920"/>
-            <a:ext cx="2697480" cy="73152"/>
-          </a:xfrm>
-          <a:prstGeom prst="rect">
-            <a:avLst/>
-          </a:prstGeom>
-          <a:solidFill>
-            <a:srgbClr val="0099D6"/>
-          </a:solidFill>
-          <a:ln>
-            <a:noFill/>
-          </a:ln>
-          <a:effectLst/>
-        </p:spPr>
-        <p:style>
-          <a:lnRef idx="1">
-            <a:schemeClr val="accent1"/>
-          </a:lnRef>
-          <a:fillRef idx="3">
-            <a:schemeClr val="accent1"/>
-          </a:fillRef>
-          <a:effectRef idx="2">
-            <a:schemeClr val="accent1"/>
-          </a:effectRef>
-          <a:fontRef idx="minor">
-            <a:schemeClr val="lt1"/>
-          </a:fontRef>
-        </p:style>
-        <p:txBody>
-          <a:bodyPr rtlCol="0" anchor="ctr" wrap="square"/>
-          <a:lstStyle/>
-          <a:p>
-            <a:pPr algn="ctr"/>
-          </a:p>
-        </p:txBody>
-      </p:sp>
-      <p:sp>
-        <p:nvSpPr>
-          <p:cNvPr id="18" name="TextBox 17"/>
-          <p:cNvSpPr txBox="1"/>
-          <p:nvPr/>
-        </p:nvSpPr>
-        <p:spPr>
-          <a:xfrm>
-            <a:off x="548640" y="4114800"/>
-            <a:ext cx="2697480" cy="777240"/>
-          </a:xfrm>
-          <a:prstGeom prst="rect">
-            <a:avLst/>
-          </a:prstGeom>
-          <a:noFill/>
-        </p:spPr>
-        <p:txBody>
-          <a:bodyPr wrap="square" anchor="t" lIns="38100" rIns="38100" tIns="12700" bIns="12700">
-            <a:spAutoFit/>
-          </a:bodyPr>
-          <a:lstStyle/>
-          <a:p>
-            <a:pPr algn="ctr">
-              <a:spcAft>
-                <a:spcPts val="600"/>
-              </a:spcAft>
-            </a:pPr>
-            <a:r>
-              <a:rPr sz="4000" b="1">
-                <a:solidFill>
-                  <a:srgbClr val="013A57"/>
-                </a:solidFill>
-                <a:latin typeface="Calibri"/>
-              </a:rPr>
-              <a:t>21</a:t>
-            </a:r>
-          </a:p>
-        </p:txBody>
-      </p:sp>
-      <p:sp>
-        <p:nvSpPr>
-          <p:cNvPr id="19" name="TextBox 18"/>
-          <p:cNvSpPr txBox="1"/>
-          <p:nvPr/>
-        </p:nvSpPr>
-        <p:spPr>
-          <a:xfrm>
-            <a:off x="548640" y="4937760"/>
-            <a:ext cx="2697480" cy="411480"/>
-          </a:xfrm>
-          <a:prstGeom prst="rect">
-            <a:avLst/>
-          </a:prstGeom>
-          <a:noFill/>
-        </p:spPr>
-        <p:txBody>
-          <a:bodyPr wrap="square" anchor="t" lIns="38100" rIns="38100" tIns="12700" bIns="12700">
-            <a:spAutoFit/>
-          </a:bodyPr>
-          <a:lstStyle/>
-          <a:p>
-            <a:pPr algn="ctr">
-              <a:spcAft>
-                <a:spcPts val="600"/>
-              </a:spcAft>
-            </a:pPr>
-            <a:r>
-              <a:rPr sz="1300" b="0">
-                <a:solidFill>
-                  <a:srgbClr val="4A5B68"/>
-                </a:solidFill>
-                <a:latin typeface="Calibri"/>
-              </a:rPr>
-              <a:t>jurisdicciones</a:t>
-            </a:r>
-          </a:p>
-        </p:txBody>
-      </p:sp>
-      <p:sp>
-        <p:nvSpPr>
-          <p:cNvPr id="20" name="Rectangle 19"/>
-          <p:cNvSpPr/>
-          <p:nvPr/>
-        </p:nvSpPr>
-        <p:spPr>
-          <a:xfrm>
-            <a:off x="3392424" y="3931920"/>
-            <a:ext cx="2697480" cy="1463040"/>
-          </a:xfrm>
-          <a:prstGeom prst="rect">
-            <a:avLst/>
-          </a:prstGeom>
-          <a:solidFill>
-            <a:srgbClr val="EEF2F6"/>
-          </a:solidFill>
-          <a:ln>
-            <a:noFill/>
-          </a:ln>
-          <a:effectLst/>
-        </p:spPr>
-        <p:style>
-          <a:lnRef idx="1">
-            <a:schemeClr val="accent1"/>
-          </a:lnRef>
-          <a:fillRef idx="3">
-            <a:schemeClr val="accent1"/>
-          </a:fillRef>
-          <a:effectRef idx="2">
-            <a:schemeClr val="accent1"/>
-          </a:effectRef>
-          <a:fontRef idx="minor">
-            <a:schemeClr val="lt1"/>
-          </a:fontRef>
-        </p:style>
-        <p:txBody>
-          <a:bodyPr rtlCol="0" anchor="ctr" wrap="square"/>
-          <a:lstStyle/>
-          <a:p>
-            <a:pPr algn="ctr"/>
-          </a:p>
-        </p:txBody>
-      </p:sp>
-      <p:sp>
-        <p:nvSpPr>
-          <p:cNvPr id="21" name="Rectangle 20"/>
-          <p:cNvSpPr/>
-          <p:nvPr/>
-        </p:nvSpPr>
-        <p:spPr>
-          <a:xfrm>
-            <a:off x="3392424" y="3931920"/>
-            <a:ext cx="2697480" cy="73152"/>
-          </a:xfrm>
-          <a:prstGeom prst="rect">
-            <a:avLst/>
-          </a:prstGeom>
-          <a:solidFill>
-            <a:srgbClr val="0099D6"/>
-          </a:solidFill>
-          <a:ln>
-            <a:noFill/>
-          </a:ln>
-          <a:effectLst/>
-        </p:spPr>
-        <p:style>
-          <a:lnRef idx="1">
-            <a:schemeClr val="accent1"/>
-          </a:lnRef>
-          <a:fillRef idx="3">
-            <a:schemeClr val="accent1"/>
-          </a:fillRef>
-          <a:effectRef idx="2">
-            <a:schemeClr val="accent1"/>
-          </a:effectRef>
-          <a:fontRef idx="minor">
-            <a:schemeClr val="lt1"/>
-          </a:fontRef>
-        </p:style>
-        <p:txBody>
-          <a:bodyPr rtlCol="0" anchor="ctr" wrap="square"/>
-          <a:lstStyle/>
-          <a:p>
-            <a:pPr algn="ctr"/>
-          </a:p>
-        </p:txBody>
-      </p:sp>
-      <p:sp>
-        <p:nvSpPr>
-          <p:cNvPr id="22" name="TextBox 21"/>
-          <p:cNvSpPr txBox="1"/>
-          <p:nvPr/>
-        </p:nvSpPr>
-        <p:spPr>
-          <a:xfrm>
-            <a:off x="3392424" y="4114800"/>
-            <a:ext cx="2697480" cy="777240"/>
-          </a:xfrm>
-          <a:prstGeom prst="rect">
-            <a:avLst/>
-          </a:prstGeom>
-          <a:noFill/>
-        </p:spPr>
-        <p:txBody>
-          <a:bodyPr wrap="square" anchor="t" lIns="38100" rIns="38100" tIns="12700" bIns="12700">
-            <a:spAutoFit/>
-          </a:bodyPr>
-          <a:lstStyle/>
-          <a:p>
-            <a:pPr algn="ctr">
-              <a:spcAft>
-                <a:spcPts val="600"/>
-              </a:spcAft>
-            </a:pPr>
-            <a:r>
-              <a:rPr sz="4000" b="1">
-                <a:solidFill>
-                  <a:srgbClr val="013A57"/>
-                </a:solidFill>
-                <a:latin typeface="Calibri"/>
-              </a:rPr>
-              <a:t>10</a:t>
-            </a:r>
-          </a:p>
-        </p:txBody>
-      </p:sp>
-      <p:sp>
-        <p:nvSpPr>
-          <p:cNvPr id="23" name="TextBox 22"/>
-          <p:cNvSpPr txBox="1"/>
-          <p:nvPr/>
-        </p:nvSpPr>
-        <p:spPr>
-          <a:xfrm>
-            <a:off x="3392424" y="4937760"/>
-            <a:ext cx="2697480" cy="411480"/>
-          </a:xfrm>
-          <a:prstGeom prst="rect">
-            <a:avLst/>
-          </a:prstGeom>
-          <a:noFill/>
-        </p:spPr>
-        <p:txBody>
-          <a:bodyPr wrap="square" anchor="t" lIns="38100" rIns="38100" tIns="12700" bIns="12700">
-            <a:spAutoFit/>
-          </a:bodyPr>
-          <a:lstStyle/>
-          <a:p>
-            <a:pPr algn="ctr">
-              <a:spcAft>
-                <a:spcPts val="600"/>
-              </a:spcAft>
-            </a:pPr>
-            <a:r>
-              <a:rPr sz="1300" b="0">
-                <a:solidFill>
-                  <a:srgbClr val="4A5B68"/>
-                </a:solidFill>
-                <a:latin typeface="Calibri"/>
-              </a:rPr>
-              <a:t>parámetros</a:t>
-            </a:r>
-          </a:p>
-        </p:txBody>
-      </p:sp>
-      <p:sp>
-        <p:nvSpPr>
-          <p:cNvPr id="24" name="Rectangle 23"/>
-          <p:cNvSpPr/>
-          <p:nvPr/>
-        </p:nvSpPr>
-        <p:spPr>
-          <a:xfrm>
-            <a:off x="6236208" y="3931920"/>
-            <a:ext cx="2697480" cy="1463040"/>
-          </a:xfrm>
-          <a:prstGeom prst="rect">
-            <a:avLst/>
-          </a:prstGeom>
-          <a:solidFill>
-            <a:srgbClr val="EEF2F6"/>
-          </a:solidFill>
-          <a:ln>
-            <a:noFill/>
-          </a:ln>
-          <a:effectLst/>
-        </p:spPr>
-        <p:style>
-          <a:lnRef idx="1">
-            <a:schemeClr val="accent1"/>
-          </a:lnRef>
-          <a:fillRef idx="3">
-            <a:schemeClr val="accent1"/>
-          </a:fillRef>
-          <a:effectRef idx="2">
-            <a:schemeClr val="accent1"/>
-          </a:effectRef>
-          <a:fontRef idx="minor">
-            <a:schemeClr val="lt1"/>
-          </a:fontRef>
-        </p:style>
-        <p:txBody>
-          <a:bodyPr rtlCol="0" anchor="ctr" wrap="square"/>
-          <a:lstStyle/>
-          <a:p>
-            <a:pPr algn="ctr"/>
-          </a:p>
-        </p:txBody>
-      </p:sp>
-      <p:sp>
-        <p:nvSpPr>
-          <p:cNvPr id="25" name="Rectangle 24"/>
-          <p:cNvSpPr/>
-          <p:nvPr/>
-        </p:nvSpPr>
-        <p:spPr>
-          <a:xfrm>
-            <a:off x="6236208" y="3931920"/>
-            <a:ext cx="2697480" cy="73152"/>
-          </a:xfrm>
-          <a:prstGeom prst="rect">
-            <a:avLst/>
-          </a:prstGeom>
-          <a:solidFill>
-            <a:srgbClr val="0099D6"/>
-          </a:solidFill>
-          <a:ln>
-            <a:noFill/>
-          </a:ln>
-          <a:effectLst/>
-        </p:spPr>
-        <p:style>
-          <a:lnRef idx="1">
-            <a:schemeClr val="accent1"/>
-          </a:lnRef>
-          <a:fillRef idx="3">
-            <a:schemeClr val="accent1"/>
-          </a:fillRef>
-          <a:effectRef idx="2">
-            <a:schemeClr val="accent1"/>
-          </a:effectRef>
-          <a:fontRef idx="minor">
-            <a:schemeClr val="lt1"/>
-          </a:fontRef>
-        </p:style>
-        <p:txBody>
-          <a:bodyPr rtlCol="0" anchor="ctr" wrap="square"/>
-          <a:lstStyle/>
-          <a:p>
-            <a:pPr algn="ctr"/>
-          </a:p>
-        </p:txBody>
-      </p:sp>
-      <p:sp>
-        <p:nvSpPr>
-          <p:cNvPr id="26" name="TextBox 25"/>
-          <p:cNvSpPr txBox="1"/>
-          <p:nvPr/>
-        </p:nvSpPr>
-        <p:spPr>
-          <a:xfrm>
-            <a:off x="6236208" y="4114800"/>
-            <a:ext cx="2697480" cy="777240"/>
-          </a:xfrm>
-          <a:prstGeom prst="rect">
-            <a:avLst/>
-          </a:prstGeom>
-          <a:noFill/>
-        </p:spPr>
-        <p:txBody>
-          <a:bodyPr wrap="square" anchor="t" lIns="38100" rIns="38100" tIns="12700" bIns="12700">
-            <a:spAutoFit/>
-          </a:bodyPr>
-          <a:lstStyle/>
-          <a:p>
-            <a:pPr algn="ctr">
-              <a:spcAft>
-                <a:spcPts val="600"/>
-              </a:spcAft>
-            </a:pPr>
-            <a:r>
-              <a:rPr sz="4000" b="1">
-                <a:solidFill>
-                  <a:srgbClr val="013A57"/>
-                </a:solidFill>
-                <a:latin typeface="Calibri"/>
-              </a:rPr>
-              <a:t>210</a:t>
-            </a:r>
-          </a:p>
-        </p:txBody>
-      </p:sp>
-      <p:sp>
-        <p:nvSpPr>
-          <p:cNvPr id="27" name="TextBox 26"/>
-          <p:cNvSpPr txBox="1"/>
-          <p:nvPr/>
-        </p:nvSpPr>
-        <p:spPr>
-          <a:xfrm>
-            <a:off x="6236208" y="4937760"/>
-            <a:ext cx="2697480" cy="411480"/>
-          </a:xfrm>
-          <a:prstGeom prst="rect">
-            <a:avLst/>
-          </a:prstGeom>
-          <a:noFill/>
-        </p:spPr>
-        <p:txBody>
-          <a:bodyPr wrap="square" anchor="t" lIns="38100" rIns="38100" tIns="12700" bIns="12700">
-            <a:spAutoFit/>
-          </a:bodyPr>
-          <a:lstStyle/>
-          <a:p>
-            <a:pPr algn="ctr">
-              <a:spcAft>
-                <a:spcPts val="600"/>
-              </a:spcAft>
-            </a:pPr>
-            <a:r>
-              <a:rPr sz="1300" b="0">
-                <a:solidFill>
-                  <a:srgbClr val="4A5B68"/>
-                </a:solidFill>
-                <a:latin typeface="Calibri"/>
-              </a:rPr>
-              <a:t>valores trazables</a:t>
-            </a:r>
-          </a:p>
-        </p:txBody>
-      </p:sp>
-      <p:sp>
-        <p:nvSpPr>
-          <p:cNvPr id="28" name="Rectangle 27"/>
-          <p:cNvSpPr/>
-          <p:nvPr/>
-        </p:nvSpPr>
-        <p:spPr>
-          <a:xfrm>
-            <a:off x="9079992" y="3931920"/>
-            <a:ext cx="2697480" cy="1463040"/>
-          </a:xfrm>
-          <a:prstGeom prst="rect">
-            <a:avLst/>
-          </a:prstGeom>
-          <a:solidFill>
-            <a:srgbClr val="EEF2F6"/>
-          </a:solidFill>
-          <a:ln>
-            <a:noFill/>
-          </a:ln>
-          <a:effectLst/>
-        </p:spPr>
-        <p:style>
-          <a:lnRef idx="1">
-            <a:schemeClr val="accent1"/>
-          </a:lnRef>
-          <a:fillRef idx="3">
-            <a:schemeClr val="accent1"/>
-          </a:fillRef>
-          <a:effectRef idx="2">
-            <a:schemeClr val="accent1"/>
-          </a:effectRef>
-          <a:fontRef idx="minor">
-            <a:schemeClr val="lt1"/>
-          </a:fontRef>
-        </p:style>
-        <p:txBody>
-          <a:bodyPr rtlCol="0" anchor="ctr" wrap="square"/>
-          <a:lstStyle/>
-          <a:p>
-            <a:pPr algn="ctr"/>
-          </a:p>
-        </p:txBody>
-      </p:sp>
-      <p:sp>
-        <p:nvSpPr>
-          <p:cNvPr id="29" name="Rectangle 28"/>
-          <p:cNvSpPr/>
-          <p:nvPr/>
-        </p:nvSpPr>
-        <p:spPr>
-          <a:xfrm>
-            <a:off x="9079992" y="3931920"/>
-            <a:ext cx="2697480" cy="73152"/>
-          </a:xfrm>
-          <a:prstGeom prst="rect">
-            <a:avLst/>
-          </a:prstGeom>
-          <a:solidFill>
-            <a:srgbClr val="6CB33E"/>
-          </a:solidFill>
-          <a:ln>
-            <a:noFill/>
-          </a:ln>
-          <a:effectLst/>
-        </p:spPr>
-        <p:style>
-          <a:lnRef idx="1">
-            <a:schemeClr val="accent1"/>
-          </a:lnRef>
-          <a:fillRef idx="3">
-            <a:schemeClr val="accent1"/>
-          </a:fillRef>
-          <a:effectRef idx="2">
-            <a:schemeClr val="accent1"/>
-          </a:effectRef>
-          <a:fontRef idx="minor">
-            <a:schemeClr val="lt1"/>
-          </a:fontRef>
-        </p:style>
-        <p:txBody>
-          <a:bodyPr rtlCol="0" anchor="ctr" wrap="square"/>
-          <a:lstStyle/>
-          <a:p>
-            <a:pPr algn="ctr"/>
-          </a:p>
-        </p:txBody>
-      </p:sp>
-      <p:sp>
-        <p:nvSpPr>
-          <p:cNvPr id="30" name="TextBox 29"/>
-          <p:cNvSpPr txBox="1"/>
-          <p:nvPr/>
-        </p:nvSpPr>
-        <p:spPr>
-          <a:xfrm>
-            <a:off x="9079992" y="4114800"/>
-            <a:ext cx="2697480" cy="777240"/>
-          </a:xfrm>
-          <a:prstGeom prst="rect">
-            <a:avLst/>
-          </a:prstGeom>
-          <a:noFill/>
-        </p:spPr>
-        <p:txBody>
-          <a:bodyPr wrap="square" anchor="t" lIns="38100" rIns="38100" tIns="12700" bIns="12700">
-            <a:spAutoFit/>
-          </a:bodyPr>
-          <a:lstStyle/>
-          <a:p>
-            <a:pPr algn="ctr">
-              <a:spcAft>
-                <a:spcPts val="600"/>
-              </a:spcAft>
-            </a:pPr>
-            <a:r>
-              <a:rPr sz="4000" b="1">
-                <a:solidFill>
-                  <a:srgbClr val="013A57"/>
-                </a:solidFill>
-                <a:latin typeface="Calibri"/>
-              </a:rPr>
-              <a:t>0</a:t>
-            </a:r>
-          </a:p>
-        </p:txBody>
-      </p:sp>
-      <p:sp>
-        <p:nvSpPr>
-          <p:cNvPr id="31" name="TextBox 30"/>
-          <p:cNvSpPr txBox="1"/>
-          <p:nvPr/>
-        </p:nvSpPr>
-        <p:spPr>
-          <a:xfrm>
-            <a:off x="9079992" y="4937760"/>
-            <a:ext cx="2697480" cy="411480"/>
-          </a:xfrm>
-          <a:prstGeom prst="rect">
-            <a:avLst/>
-          </a:prstGeom>
-          <a:noFill/>
-        </p:spPr>
-        <p:txBody>
-          <a:bodyPr wrap="square" anchor="t" lIns="38100" rIns="38100" tIns="12700" bIns="12700">
-            <a:spAutoFit/>
-          </a:bodyPr>
-          <a:lstStyle/>
-          <a:p>
-            <a:pPr algn="ctr">
-              <a:spcAft>
-                <a:spcPts val="600"/>
-              </a:spcAft>
-            </a:pPr>
-            <a:r>
-              <a:rPr sz="1300" b="0">
-                <a:solidFill>
-                  <a:srgbClr val="4A5B68"/>
-                </a:solidFill>
-                <a:latin typeface="Calibri"/>
-              </a:rPr>
-              <a:t>cifras inventadas</a:t>
-            </a:r>
-          </a:p>
-        </p:txBody>
-      </p:sp>
-      <p:sp>
-        <p:nvSpPr>
-          <p:cNvPr id="32" name="Rectangle 31"/>
-          <p:cNvSpPr/>
-          <p:nvPr/>
-        </p:nvSpPr>
-        <p:spPr>
-          <a:xfrm>
-            <a:off x="548640" y="5532120"/>
-            <a:ext cx="11091672" cy="777240"/>
+            <a:off x="548640" y="5715000"/>
+            <a:ext cx="11109960" cy="594360"/>
           </a:xfrm>
           <a:prstGeom prst="rect">
             <a:avLst/>
@@ -6642,14 +5630,14 @@
       </p:sp>
       <p:sp>
         <p:nvSpPr>
-          <p:cNvPr id="33" name="Rectangle 32"/>
+          <p:cNvPr id="34" name="Rectangle 33"/>
           <p:cNvSpPr/>
           <p:nvPr/>
         </p:nvSpPr>
         <p:spPr>
           <a:xfrm>
-            <a:off x="548640" y="5532120"/>
-            <a:ext cx="82296" cy="777240"/>
+            <a:off x="548640" y="5715000"/>
+            <a:ext cx="82296" cy="594360"/>
           </a:xfrm>
           <a:prstGeom prst="rect">
             <a:avLst/>
@@ -6686,14 +5674,14 @@
       </p:sp>
       <p:sp>
         <p:nvSpPr>
-          <p:cNvPr id="34" name="TextBox 33"/>
+          <p:cNvPr id="35" name="TextBox 34"/>
           <p:cNvSpPr txBox="1"/>
           <p:nvPr/>
         </p:nvSpPr>
         <p:spPr>
           <a:xfrm>
-            <a:off x="822960" y="5596128"/>
-            <a:ext cx="10698480" cy="685800"/>
+            <a:off x="822960" y="5733288"/>
+            <a:ext cx="10744200" cy="548640"/>
           </a:xfrm>
           <a:prstGeom prst="rect">
             <a:avLst/>
@@ -6701,14 +5689,14 @@
           <a:noFill/>
         </p:spPr>
         <p:txBody>
-          <a:bodyPr wrap="square" anchor="t" lIns="38100" rIns="38100" tIns="12700" bIns="12700">
+          <a:bodyPr wrap="square" anchor="ctr" lIns="38100" rIns="38100" tIns="12700" bIns="12700">
             <a:spAutoFit/>
           </a:bodyPr>
           <a:lstStyle/>
           <a:p>
             <a:pPr algn="l">
               <a:spcAft>
-                <a:spcPts val="300"/>
+                <a:spcPts val="600"/>
               </a:spcAft>
             </a:pPr>
             <a:r>
@@ -6718,23 +5706,7 @@
                 </a:solidFill>
                 <a:latin typeface="Calibri"/>
               </a:rPr>
-              <a:t>Detrás de ese cero: 176 valores VERIFICADOS verbatim contra su boletín oficial y 34 declarados NO VERIFICABLES.</a:t>
-            </a:r>
-          </a:p>
-          <a:p>
-            <a:pPr algn="l">
-              <a:spcAft>
-                <a:spcPts val="300"/>
-              </a:spcAft>
-            </a:pPr>
-            <a:r>
-              <a:rPr sz="1250" b="0">
-                <a:solidFill>
-                  <a:srgbClr val="4A5B68"/>
-                </a:solidFill>
-                <a:latin typeface="Calibri"/>
-              </a:rPr>
-              <a:t>Cuando la norma de un país no fija un parámetro, no lo rellenamos con una estimación: lo marcamos y explicamos por qué.</a:t>
+              <a:t>Todo lo anterior descansa en dos piezas: la ARQUITECTURA (que separa el dato del lenguaje) y la ONTOLOGÍA (donde vive el dato). Vamos a ellas.</a:t>
             </a:r>
           </a:p>
         </p:txBody>
@@ -6879,7 +5851,7 @@
                 </a:solidFill>
                 <a:latin typeface="Calibri"/>
               </a:rPr>
-              <a:t>CÓMO ESTÁ CONSTRUIDO</a:t>
+              <a:t>PIEZA 1 · ARQUITECTURA</a:t>
             </a:r>
           </a:p>
         </p:txBody>
@@ -7035,7 +6007,7 @@
                 </a:solidFill>
                 <a:latin typeface="Calibri"/>
               </a:rPr>
-              <a:t>Cuatro componentes. Sigue las flechas: toda cifra procede de la ontología; la IA solo redacta.</a:t>
+              <a:t>Cuatro componentes. La regla: toda cifra procede de la ontología; la IA solo redacta.</a:t>
             </a:r>
           </a:p>
         </p:txBody>
@@ -8164,7 +7136,7 @@
                 </a:solidFill>
                 <a:latin typeface="Calibri"/>
               </a:rPr>
-              <a:t>Las 210 cifras, cada una con su unidad, sus condiciones y su cita oficial.</a:t>
+              <a:t>Las 277 cifras, cada una con su unidad, sus condiciones y su cita oficial.</a:t>
             </a:r>
           </a:p>
         </p:txBody>
@@ -8478,7 +7450,7 @@
                 </a:solidFill>
                 <a:latin typeface="Calibri"/>
               </a:rPr>
-              <a:t>Debajo de todo: los ~22 PDF oficiales (data/raw) y su índice de búsqueda SQLite — el índice guarda TEXTO, ninguna cifra.</a:t>
+              <a:t>Si la IA no está disponible, el router conmuta a determinista: el chat nunca falla, y las cifras son las mismas.</a:t>
             </a:r>
           </a:p>
         </p:txBody>
@@ -8623,7 +7595,7 @@
                 </a:solidFill>
                 <a:latin typeface="Calibri"/>
               </a:rPr>
-              <a:t>CÓMO ESTÁ CONSTRUIDO</a:t>
+              <a:t>PIEZA 1 · ARQUITECTURA</a:t>
             </a:r>
           </a:p>
         </p:txBody>
@@ -9314,7 +8286,7 @@
                 </a:solidFill>
                 <a:latin typeface="Calibri"/>
               </a:rPr>
-              <a:t>• Las 210 cifras extraídas de esos PDF, con su contexto y su cita.</a:t>
+              <a:t>• Las 277 cifras extraídas de esos PDF, con su contexto y su cita.</a:t>
             </a:r>
           </a:p>
           <a:p>
@@ -10188,7 +9160,7 @@
                 </a:solidFill>
                 <a:latin typeface="Calibri"/>
               </a:rPr>
-              <a:t>EL CORAZÓN DEL DATO</a:t>
+              <a:t>PIEZA 2 · ONTOLOGÍA</a:t>
             </a:r>
           </a:p>
         </p:txBody>
@@ -10344,7 +9316,7 @@
                 </a:solidFill>
                 <a:latin typeface="Calibri"/>
               </a:rPr>
-              <a:t>Un único fichero YAML. Cinco claves. Toda la base de conocimiento del sistema.</a:t>
+              <a:t>Un único fichero YAML. Esto es lo que hay dentro, exactamente.</a:t>
             </a:r>
           </a:p>
         </p:txBody>
@@ -10357,8 +9329,8 @@
         </p:nvSpPr>
         <p:spPr>
           <a:xfrm>
-            <a:off x="457200" y="1920240"/>
-            <a:ext cx="2880360" cy="3246120"/>
+            <a:off x="457200" y="1645920"/>
+            <a:ext cx="2697480" cy="3520440"/>
           </a:xfrm>
           <a:prstGeom prst="roundRect">
             <a:avLst>
@@ -10403,8 +9375,8 @@
         </p:nvSpPr>
         <p:spPr>
           <a:xfrm>
-            <a:off x="658368" y="2103120"/>
-            <a:ext cx="2514600" cy="2926080"/>
+            <a:off x="640080" y="1810512"/>
+            <a:ext cx="2377440" cy="3200400"/>
           </a:xfrm>
           <a:prstGeom prst="rect">
             <a:avLst/>
@@ -10419,11 +9391,11 @@
           <a:p>
             <a:pPr algn="l">
               <a:spcAft>
-                <a:spcPts val="400"/>
-              </a:spcAft>
-            </a:pPr>
-            <a:r>
-              <a:rPr sz="1100" b="1">
+                <a:spcPts val="300"/>
+              </a:spcAft>
+            </a:pPr>
+            <a:r>
+              <a:rPr sz="1050" b="1">
                 <a:solidFill>
                   <a:srgbClr val="0099D6"/>
                 </a:solidFill>
@@ -10435,11 +9407,11 @@
           <a:p>
             <a:pPr algn="l">
               <a:spcAft>
-                <a:spcPts val="400"/>
-              </a:spcAft>
-            </a:pPr>
-            <a:r>
-              <a:rPr sz="1500" b="1">
+                <a:spcPts val="300"/>
+              </a:spcAft>
+            </a:pPr>
+            <a:r>
+              <a:rPr sz="1400" b="1">
                 <a:solidFill>
                   <a:srgbClr val="FFFFFF"/>
                 </a:solidFill>
@@ -10451,43 +9423,75 @@
           <a:p>
             <a:pPr algn="l">
               <a:spcAft>
-                <a:spcPts val="400"/>
-              </a:spcAft>
-            </a:pPr>
-            <a:r>
-              <a:rPr sz="1100" b="0">
+                <a:spcPts val="300"/>
+              </a:spcAft>
+            </a:pPr>
+            <a:r>
+              <a:rPr sz="1050" b="0">
                 <a:solidFill>
                   <a:srgbClr val="9FB3C4"/>
                 </a:solidFill>
                 <a:latin typeface="Calibri"/>
               </a:rPr>
-              <a:t>data/ontologia/</a:t>
+              <a:t>v3.2.0 · rev. 2026-07</a:t>
             </a:r>
           </a:p>
           <a:p>
             <a:pPr algn="l">
               <a:spcAft>
-                <a:spcPts val="400"/>
-              </a:spcAft>
-            </a:pPr>
-            <a:r>
-              <a:rPr sz="1100" b="0">
-                <a:solidFill>
-                  <a:srgbClr val="9FB3C4"/>
+                <a:spcPts val="300"/>
+              </a:spcAft>
+            </a:pPr>
+            <a:r>
+              <a:rPr sz="500" b="0">
+                <a:solidFill>
+                  <a:srgbClr val="FFFFFF"/>
                 </a:solidFill>
                 <a:latin typeface="Calibri"/>
               </a:rPr>
-              <a:t>versión 3.2.0</a:t>
+              <a:t/>
             </a:r>
           </a:p>
           <a:p>
             <a:pPr algn="l">
               <a:spcAft>
-                <a:spcPts val="400"/>
-              </a:spcAft>
-            </a:pPr>
-            <a:r>
-              <a:rPr sz="600" b="0">
+                <a:spcPts val="300"/>
+              </a:spcAft>
+            </a:pPr>
+            <a:r>
+              <a:rPr sz="1150" b="0">
+                <a:solidFill>
+                  <a:srgbClr val="C9D6E0"/>
+                </a:solidFill>
+                <a:latin typeface="Calibri"/>
+              </a:rPr>
+              <a:t>Legible por una persona.</a:t>
+            </a:r>
+          </a:p>
+          <a:p>
+            <a:pPr algn="l">
+              <a:spcAft>
+                <a:spcPts val="300"/>
+              </a:spcAft>
+            </a:pPr>
+            <a:r>
+              <a:rPr sz="1150" b="0">
+                <a:solidFill>
+                  <a:srgbClr val="C9D6E0"/>
+                </a:solidFill>
+                <a:latin typeface="Calibri"/>
+              </a:rPr>
+              <a:t>Versionado en git junto al código: cada cambio de una cifra queda registrado.</a:t>
+            </a:r>
+          </a:p>
+          <a:p>
+            <a:pPr algn="l">
+              <a:spcAft>
+                <a:spcPts val="300"/>
+              </a:spcAft>
+            </a:pPr>
+            <a:r>
+              <a:rPr sz="500" b="0">
                 <a:solidFill>
                   <a:srgbClr val="FFFFFF"/>
                 </a:solidFill>
@@ -10499,49 +9503,17 @@
           <a:p>
             <a:pPr algn="l">
               <a:spcAft>
-                <a:spcPts val="400"/>
-              </a:spcAft>
-            </a:pPr>
-            <a:r>
-              <a:rPr sz="1200" b="0">
-                <a:solidFill>
-                  <a:srgbClr val="C9D6E0"/>
+                <a:spcPts val="300"/>
+              </a:spcAft>
+            </a:pPr>
+            <a:r>
+              <a:rPr sz="1150" b="0">
+                <a:solidFill>
+                  <a:srgbClr val="0099D6"/>
                 </a:solidFill>
                 <a:latin typeface="Calibri"/>
               </a:rPr>
-              <a:t>Legible por una persona.</a:t>
-            </a:r>
-          </a:p>
-          <a:p>
-            <a:pPr algn="l">
-              <a:spcAft>
-                <a:spcPts val="400"/>
-              </a:spcAft>
-            </a:pPr>
-            <a:r>
-              <a:rPr sz="1200" b="0">
-                <a:solidFill>
-                  <a:srgbClr val="C9D6E0"/>
-                </a:solidFill>
-                <a:latin typeface="Calibri"/>
-              </a:rPr>
-              <a:t>Versionado en git junto al código.</a:t>
-            </a:r>
-          </a:p>
-          <a:p>
-            <a:pPr algn="l">
-              <a:spcAft>
-                <a:spcPts val="400"/>
-              </a:spcAft>
-            </a:pPr>
-            <a:r>
-              <a:rPr sz="1200" b="0">
-                <a:solidFill>
-                  <a:srgbClr val="C9D6E0"/>
-                </a:solidFill>
-                <a:latin typeface="Calibri"/>
-              </a:rPr>
-              <a:t>Auditable celda a celda.</a:t>
+              <a:t>Por eso YAML y no una base de datos: a esta escala es más AUDITABLE.</a:t>
             </a:r>
           </a:p>
         </p:txBody>
@@ -10554,8 +9526,8 @@
         </p:nvSpPr>
         <p:spPr>
           <a:xfrm>
-            <a:off x="3657600" y="2057400"/>
-            <a:ext cx="41148" cy="3017520"/>
+            <a:off x="3456432" y="1783080"/>
+            <a:ext cx="41148" cy="3200400"/>
           </a:xfrm>
           <a:prstGeom prst="rect">
             <a:avLst/>
@@ -10598,8 +9570,8 @@
         </p:nvSpPr>
         <p:spPr>
           <a:xfrm>
-            <a:off x="3698748" y="2185416"/>
-            <a:ext cx="411480" cy="41148"/>
+            <a:off x="3497580" y="1911095"/>
+            <a:ext cx="365760" cy="41148"/>
           </a:xfrm>
           <a:prstGeom prst="rect">
             <a:avLst/>
@@ -10642,8 +9614,8 @@
         </p:nvSpPr>
         <p:spPr>
           <a:xfrm>
-            <a:off x="4160520" y="1920240"/>
-            <a:ext cx="7589520" cy="566928"/>
+            <a:off x="3931920" y="1691640"/>
+            <a:ext cx="7818120" cy="484632"/>
           </a:xfrm>
           <a:prstGeom prst="roundRect">
             <a:avLst>
@@ -10690,8 +9662,8 @@
         </p:nvSpPr>
         <p:spPr>
           <a:xfrm>
-            <a:off x="4160520" y="1920240"/>
-            <a:ext cx="73152" cy="566928"/>
+            <a:off x="3931920" y="1691640"/>
+            <a:ext cx="73152" cy="484632"/>
           </a:xfrm>
           <a:prstGeom prst="rect">
             <a:avLst/>
@@ -10734,8 +9706,8 @@
         </p:nvSpPr>
         <p:spPr>
           <a:xfrm>
-            <a:off x="4343400" y="1947672"/>
-            <a:ext cx="3017520" cy="512064"/>
+            <a:off x="4096512" y="1709928"/>
+            <a:ext cx="2880360" cy="448056"/>
           </a:xfrm>
           <a:prstGeom prst="rect">
             <a:avLst/>
@@ -10754,7 +9726,7 @@
               </a:spcAft>
             </a:pPr>
             <a:r>
-              <a:rPr sz="1250" b="1">
+              <a:rPr sz="1150" b="1">
                 <a:solidFill>
                   <a:srgbClr val="0A5A82"/>
                 </a:solidFill>
@@ -10773,8 +9745,8 @@
         </p:nvSpPr>
         <p:spPr>
           <a:xfrm>
-            <a:off x="7360920" y="1947672"/>
-            <a:ext cx="4297680" cy="512064"/>
+            <a:off x="7040880" y="1709928"/>
+            <a:ext cx="4572000" cy="448056"/>
           </a:xfrm>
           <a:prstGeom prst="rect">
             <a:avLst/>
@@ -10793,13 +9765,13 @@
               </a:spcAft>
             </a:pPr>
             <a:r>
-              <a:rPr sz="1150" b="0">
+              <a:rPr sz="1100" b="0">
                 <a:solidFill>
                   <a:srgbClr val="1B2A38"/>
                 </a:solidFill>
                 <a:latin typeface="Calibri"/>
               </a:rPr>
-              <a:t>El catálogo de las 39 normas oficiales: id, organismo, publicación, URL y copia local del PDF.</a:t>
+              <a:t>El catálogo de las 39 normas oficiales: organismo, publicación, URL y copia local del PDF.</a:t>
             </a:r>
           </a:p>
         </p:txBody>
@@ -10812,8 +9784,8 @@
         </p:nvSpPr>
         <p:spPr>
           <a:xfrm>
-            <a:off x="3698748" y="2843784"/>
-            <a:ext cx="411480" cy="41148"/>
+            <a:off x="3497580" y="2478024"/>
+            <a:ext cx="365760" cy="41148"/>
           </a:xfrm>
           <a:prstGeom prst="rect">
             <a:avLst/>
@@ -10856,8 +9828,8 @@
         </p:nvSpPr>
         <p:spPr>
           <a:xfrm>
-            <a:off x="4160520" y="2578608"/>
-            <a:ext cx="7589520" cy="566928"/>
+            <a:off x="3931920" y="2258568"/>
+            <a:ext cx="7818120" cy="484632"/>
           </a:xfrm>
           <a:prstGeom prst="roundRect">
             <a:avLst>
@@ -10904,8 +9876,8 @@
         </p:nvSpPr>
         <p:spPr>
           <a:xfrm>
-            <a:off x="4160520" y="2578608"/>
-            <a:ext cx="73152" cy="566928"/>
+            <a:off x="3931920" y="2258568"/>
+            <a:ext cx="73152" cy="484632"/>
           </a:xfrm>
           <a:prstGeom prst="rect">
             <a:avLst/>
@@ -10948,8 +9920,8 @@
         </p:nvSpPr>
         <p:spPr>
           <a:xfrm>
-            <a:off x="4343400" y="2606040"/>
-            <a:ext cx="3017520" cy="512064"/>
+            <a:off x="4096512" y="2276856"/>
+            <a:ext cx="2880360" cy="448056"/>
           </a:xfrm>
           <a:prstGeom prst="rect">
             <a:avLst/>
@@ -10968,7 +9940,7 @@
               </a:spcAft>
             </a:pPr>
             <a:r>
-              <a:rPr sz="1250" b="1">
+              <a:rPr sz="1150" b="1">
                 <a:solidFill>
                   <a:srgbClr val="0A5A82"/>
                 </a:solidFill>
@@ -10987,8 +9959,8 @@
         </p:nvSpPr>
         <p:spPr>
           <a:xfrm>
-            <a:off x="7360920" y="2606040"/>
-            <a:ext cx="4297680" cy="512064"/>
+            <a:off x="7040880" y="2276856"/>
+            <a:ext cx="4572000" cy="448056"/>
           </a:xfrm>
           <a:prstGeom prst="rect">
             <a:avLst/>
@@ -11007,13 +9979,13 @@
               </a:spcAft>
             </a:pPr>
             <a:r>
-              <a:rPr sz="1150" b="0">
+              <a:rPr sz="1100" b="0">
                 <a:solidFill>
                   <a:srgbClr val="1B2A38"/>
                 </a:solidFill>
                 <a:latin typeface="Calibri"/>
               </a:rPr>
-              <a:t>El registro de los 3 tipos de gas y a qué sección de parámetros apunta cada uno.</a:t>
+              <a:t>Los 3 tipos de gas y a qué sección de parámetros apunta cada uno.</a:t>
             </a:r>
           </a:p>
         </p:txBody>
@@ -11026,8 +9998,8 @@
         </p:nvSpPr>
         <p:spPr>
           <a:xfrm>
-            <a:off x="3698748" y="3502152"/>
-            <a:ext cx="411480" cy="41148"/>
+            <a:off x="3497580" y="3044952"/>
+            <a:ext cx="365760" cy="41148"/>
           </a:xfrm>
           <a:prstGeom prst="rect">
             <a:avLst/>
@@ -11070,8 +10042,8 @@
         </p:nvSpPr>
         <p:spPr>
           <a:xfrm>
-            <a:off x="4160520" y="3236976"/>
-            <a:ext cx="7589520" cy="566928"/>
+            <a:off x="3931920" y="2825496"/>
+            <a:ext cx="7818120" cy="484632"/>
           </a:xfrm>
           <a:prstGeom prst="roundRect">
             <a:avLst>
@@ -11118,14 +10090,14 @@
         </p:nvSpPr>
         <p:spPr>
           <a:xfrm>
-            <a:off x="4160520" y="3236976"/>
-            <a:ext cx="73152" cy="566928"/>
+            <a:off x="3931920" y="2825496"/>
+            <a:ext cx="73152" cy="484632"/>
           </a:xfrm>
           <a:prstGeom prst="rect">
             <a:avLst/>
           </a:prstGeom>
           <a:solidFill>
-            <a:srgbClr val="6CB33E"/>
+            <a:srgbClr val="0A5A82"/>
           </a:solidFill>
           <a:ln>
             <a:noFill/>
@@ -11162,8 +10134,8 @@
         </p:nvSpPr>
         <p:spPr>
           <a:xfrm>
-            <a:off x="4343400" y="3264408"/>
-            <a:ext cx="3017520" cy="512064"/>
+            <a:off x="4096512" y="2843784"/>
+            <a:ext cx="2880360" cy="448056"/>
           </a:xfrm>
           <a:prstGeom prst="rect">
             <a:avLst/>
@@ -11182,13 +10154,13 @@
               </a:spcAft>
             </a:pPr>
             <a:r>
-              <a:rPr sz="1250" b="1">
-                <a:solidFill>
-                  <a:srgbClr val="6CB33E"/>
+              <a:rPr sz="1150" b="1">
+                <a:solidFill>
+                  <a:srgbClr val="0A5A82"/>
                 </a:solidFill>
                 <a:latin typeface="Consolas"/>
               </a:rPr>
-              <a:t>parametros</a:t>
+              <a:t>unidades</a:t>
             </a:r>
           </a:p>
         </p:txBody>
@@ -11201,8 +10173,8 @@
         </p:nvSpPr>
         <p:spPr>
           <a:xfrm>
-            <a:off x="7360920" y="3264408"/>
-            <a:ext cx="4297680" cy="512064"/>
+            <a:off x="7040880" y="2843784"/>
+            <a:ext cx="4572000" cy="448056"/>
           </a:xfrm>
           <a:prstGeom prst="rect">
             <a:avLst/>
@@ -11221,13 +10193,13 @@
               </a:spcAft>
             </a:pPr>
             <a:r>
-              <a:rPr sz="1150" b="0">
+              <a:rPr sz="1100" b="0">
                 <a:solidFill>
                   <a:srgbClr val="1B2A38"/>
                 </a:solidFill>
                 <a:latin typeface="Calibri"/>
               </a:rPr>
-              <a:t>GAS NATURAL — 10 parámetros × 21 jurisdicciones = 210 celdas.</a:t>
+              <a:t>El catálogo de unidades admitidas (% mol, mg/m3, kWh/m3, MJ/m3, °C…).</a:t>
             </a:r>
           </a:p>
         </p:txBody>
@@ -11240,8 +10212,8 @@
         </p:nvSpPr>
         <p:spPr>
           <a:xfrm>
-            <a:off x="3698748" y="4160520"/>
-            <a:ext cx="411480" cy="41148"/>
+            <a:off x="3497580" y="3611880"/>
+            <a:ext cx="365760" cy="41148"/>
           </a:xfrm>
           <a:prstGeom prst="rect">
             <a:avLst/>
@@ -11284,8 +10256,8 @@
         </p:nvSpPr>
         <p:spPr>
           <a:xfrm>
-            <a:off x="4160520" y="3895344"/>
-            <a:ext cx="7589520" cy="566928"/>
+            <a:off x="3931920" y="3392424"/>
+            <a:ext cx="7818120" cy="484632"/>
           </a:xfrm>
           <a:prstGeom prst="roundRect">
             <a:avLst>
@@ -11332,8 +10304,8 @@
         </p:nvSpPr>
         <p:spPr>
           <a:xfrm>
-            <a:off x="4160520" y="3895344"/>
-            <a:ext cx="73152" cy="566928"/>
+            <a:off x="3931920" y="3392424"/>
+            <a:ext cx="73152" cy="484632"/>
           </a:xfrm>
           <a:prstGeom prst="rect">
             <a:avLst/>
@@ -11376,8 +10348,8 @@
         </p:nvSpPr>
         <p:spPr>
           <a:xfrm>
-            <a:off x="4343400" y="3922776"/>
-            <a:ext cx="3017520" cy="512064"/>
+            <a:off x="4096512" y="3410712"/>
+            <a:ext cx="2880360" cy="448056"/>
           </a:xfrm>
           <a:prstGeom prst="rect">
             <a:avLst/>
@@ -11396,13 +10368,13 @@
               </a:spcAft>
             </a:pPr>
             <a:r>
-              <a:rPr sz="1250" b="1">
+              <a:rPr sz="1150" b="1">
                 <a:solidFill>
                   <a:srgbClr val="6CB33E"/>
                 </a:solidFill>
                 <a:latin typeface="Consolas"/>
               </a:rPr>
-              <a:t>parametros_biometano</a:t>
+              <a:t>parametros</a:t>
             </a:r>
           </a:p>
         </p:txBody>
@@ -11415,8 +10387,8 @@
         </p:nvSpPr>
         <p:spPr>
           <a:xfrm>
-            <a:off x="7360920" y="3922776"/>
-            <a:ext cx="4297680" cy="512064"/>
+            <a:off x="7040880" y="3410712"/>
+            <a:ext cx="4572000" cy="448056"/>
           </a:xfrm>
           <a:prstGeom prst="rect">
             <a:avLst/>
@@ -11435,13 +10407,13 @@
               </a:spcAft>
             </a:pPr>
             <a:r>
-              <a:rPr sz="1150" b="0">
+              <a:rPr sz="1100" b="0">
                 <a:solidFill>
                   <a:srgbClr val="1B2A38"/>
                 </a:solidFill>
                 <a:latin typeface="Calibri"/>
               </a:rPr>
-              <a:t>BIOMETANO — 12 parámetros × 4 jurisdicciones (ES · PT · FR · UE).</a:t>
+              <a:t>GAS NATURAL — 10 parámetros × 21 jurisdicciones = 210 celdas.</a:t>
             </a:r>
           </a:p>
         </p:txBody>
@@ -11454,8 +10426,8 @@
         </p:nvSpPr>
         <p:spPr>
           <a:xfrm>
-            <a:off x="3698748" y="4818888"/>
-            <a:ext cx="411480" cy="41148"/>
+            <a:off x="3497580" y="4178808"/>
+            <a:ext cx="365760" cy="41148"/>
           </a:xfrm>
           <a:prstGeom prst="rect">
             <a:avLst/>
@@ -11498,8 +10470,8 @@
         </p:nvSpPr>
         <p:spPr>
           <a:xfrm>
-            <a:off x="4160520" y="4553712"/>
-            <a:ext cx="7589520" cy="566928"/>
+            <a:off x="3931920" y="3959352"/>
+            <a:ext cx="7818120" cy="484632"/>
           </a:xfrm>
           <a:prstGeom prst="roundRect">
             <a:avLst>
@@ -11546,8 +10518,8 @@
         </p:nvSpPr>
         <p:spPr>
           <a:xfrm>
-            <a:off x="4160520" y="4553712"/>
-            <a:ext cx="73152" cy="566928"/>
+            <a:off x="3931920" y="3959352"/>
+            <a:ext cx="73152" cy="484632"/>
           </a:xfrm>
           <a:prstGeom prst="rect">
             <a:avLst/>
@@ -11590,8 +10562,8 @@
         </p:nvSpPr>
         <p:spPr>
           <a:xfrm>
-            <a:off x="4343400" y="4581144"/>
-            <a:ext cx="3017520" cy="512064"/>
+            <a:off x="4096512" y="3977639"/>
+            <a:ext cx="2880360" cy="448056"/>
           </a:xfrm>
           <a:prstGeom prst="rect">
             <a:avLst/>
@@ -11610,13 +10582,13 @@
               </a:spcAft>
             </a:pPr>
             <a:r>
-              <a:rPr sz="1250" b="1">
+              <a:rPr sz="1150" b="1">
                 <a:solidFill>
                   <a:srgbClr val="6CB33E"/>
                 </a:solidFill>
                 <a:latin typeface="Consolas"/>
               </a:rPr>
-              <a:t>parametros_hidrogeno</a:t>
+              <a:t>parametros_biometano</a:t>
             </a:r>
           </a:p>
         </p:txBody>
@@ -11629,8 +10601,8 @@
         </p:nvSpPr>
         <p:spPr>
           <a:xfrm>
-            <a:off x="7360920" y="4581144"/>
-            <a:ext cx="4297680" cy="512064"/>
+            <a:off x="7040880" y="3977639"/>
+            <a:ext cx="4572000" cy="448056"/>
           </a:xfrm>
           <a:prstGeom prst="rect">
             <a:avLst/>
@@ -11649,13 +10621,13 @@
               </a:spcAft>
             </a:pPr>
             <a:r>
-              <a:rPr sz="1150" b="0">
+              <a:rPr sz="1100" b="0">
                 <a:solidFill>
                   <a:srgbClr val="1B2A38"/>
                 </a:solidFill>
                 <a:latin typeface="Calibri"/>
               </a:rPr>
-              <a:t>HIDRÓGENO — 18 parámetros · dominio de RED y dominio de PRODUCTO.</a:t>
+              <a:t>BIOMETANO — 12 parámetros × 4 jurisdicciones = 27 celdas.</a:t>
             </a:r>
           </a:p>
         </p:txBody>
@@ -11668,8 +10640,349 @@
         </p:nvSpPr>
         <p:spPr>
           <a:xfrm>
-            <a:off x="457200" y="5394960"/>
-            <a:ext cx="11292840" cy="914400"/>
+            <a:off x="3497580" y="4745736"/>
+            <a:ext cx="365760" cy="41148"/>
+          </a:xfrm>
+          <a:prstGeom prst="rect">
+            <a:avLst/>
+          </a:prstGeom>
+          <a:solidFill>
+            <a:srgbClr val="C8D4DD"/>
+          </a:solidFill>
+          <a:ln>
+            <a:noFill/>
+          </a:ln>
+          <a:effectLst/>
+        </p:spPr>
+        <p:style>
+          <a:lnRef idx="1">
+            <a:schemeClr val="accent1"/>
+          </a:lnRef>
+          <a:fillRef idx="3">
+            <a:schemeClr val="accent1"/>
+          </a:fillRef>
+          <a:effectRef idx="2">
+            <a:schemeClr val="accent1"/>
+          </a:effectRef>
+          <a:fontRef idx="minor">
+            <a:schemeClr val="lt1"/>
+          </a:fontRef>
+        </p:style>
+        <p:txBody>
+          <a:bodyPr rtlCol="0" anchor="ctr" wrap="square"/>
+          <a:lstStyle/>
+          <a:p>
+            <a:pPr algn="ctr"/>
+          </a:p>
+        </p:txBody>
+      </p:sp>
+      <p:sp>
+        <p:nvSpPr>
+          <p:cNvPr id="38" name="Rounded Rectangle 37"/>
+          <p:cNvSpPr/>
+          <p:nvPr/>
+        </p:nvSpPr>
+        <p:spPr>
+          <a:xfrm>
+            <a:off x="3931920" y="4526280"/>
+            <a:ext cx="7818120" cy="484632"/>
+          </a:xfrm>
+          <a:prstGeom prst="roundRect">
+            <a:avLst>
+              <a:gd name="adj" fmla="val 6000"/>
+            </a:avLst>
+          </a:prstGeom>
+          <a:solidFill>
+            <a:srgbClr val="EEF2F6"/>
+          </a:solidFill>
+          <a:ln w="12700">
+            <a:solidFill>
+              <a:srgbClr val="C8D4DD"/>
+            </a:solidFill>
+          </a:ln>
+          <a:effectLst/>
+        </p:spPr>
+        <p:style>
+          <a:lnRef idx="1">
+            <a:schemeClr val="accent1"/>
+          </a:lnRef>
+          <a:fillRef idx="3">
+            <a:schemeClr val="accent1"/>
+          </a:fillRef>
+          <a:effectRef idx="2">
+            <a:schemeClr val="accent1"/>
+          </a:effectRef>
+          <a:fontRef idx="minor">
+            <a:schemeClr val="lt1"/>
+          </a:fontRef>
+        </p:style>
+        <p:txBody>
+          <a:bodyPr rtlCol="0" anchor="ctr" wrap="square"/>
+          <a:lstStyle/>
+          <a:p>
+            <a:pPr algn="ctr"/>
+          </a:p>
+        </p:txBody>
+      </p:sp>
+      <p:sp>
+        <p:nvSpPr>
+          <p:cNvPr id="39" name="Rectangle 38"/>
+          <p:cNvSpPr/>
+          <p:nvPr/>
+        </p:nvSpPr>
+        <p:spPr>
+          <a:xfrm>
+            <a:off x="3931920" y="4526280"/>
+            <a:ext cx="73152" cy="484632"/>
+          </a:xfrm>
+          <a:prstGeom prst="rect">
+            <a:avLst/>
+          </a:prstGeom>
+          <a:solidFill>
+            <a:srgbClr val="6CB33E"/>
+          </a:solidFill>
+          <a:ln>
+            <a:noFill/>
+          </a:ln>
+          <a:effectLst/>
+        </p:spPr>
+        <p:style>
+          <a:lnRef idx="1">
+            <a:schemeClr val="accent1"/>
+          </a:lnRef>
+          <a:fillRef idx="3">
+            <a:schemeClr val="accent1"/>
+          </a:fillRef>
+          <a:effectRef idx="2">
+            <a:schemeClr val="accent1"/>
+          </a:effectRef>
+          <a:fontRef idx="minor">
+            <a:schemeClr val="lt1"/>
+          </a:fontRef>
+        </p:style>
+        <p:txBody>
+          <a:bodyPr rtlCol="0" anchor="ctr" wrap="square"/>
+          <a:lstStyle/>
+          <a:p>
+            <a:pPr algn="ctr"/>
+          </a:p>
+        </p:txBody>
+      </p:sp>
+      <p:sp>
+        <p:nvSpPr>
+          <p:cNvPr id="40" name="TextBox 39"/>
+          <p:cNvSpPr txBox="1"/>
+          <p:nvPr/>
+        </p:nvSpPr>
+        <p:spPr>
+          <a:xfrm>
+            <a:off x="4096512" y="4544568"/>
+            <a:ext cx="2880360" cy="448056"/>
+          </a:xfrm>
+          <a:prstGeom prst="rect">
+            <a:avLst/>
+          </a:prstGeom>
+          <a:noFill/>
+        </p:spPr>
+        <p:txBody>
+          <a:bodyPr wrap="square" anchor="ctr" lIns="38100" rIns="38100" tIns="12700" bIns="12700">
+            <a:spAutoFit/>
+          </a:bodyPr>
+          <a:lstStyle/>
+          <a:p>
+            <a:pPr algn="l">
+              <a:spcAft>
+                <a:spcPts val="600"/>
+              </a:spcAft>
+            </a:pPr>
+            <a:r>
+              <a:rPr sz="1150" b="1">
+                <a:solidFill>
+                  <a:srgbClr val="6CB33E"/>
+                </a:solidFill>
+                <a:latin typeface="Consolas"/>
+              </a:rPr>
+              <a:t>parametros_hidrogeno</a:t>
+            </a:r>
+          </a:p>
+        </p:txBody>
+      </p:sp>
+      <p:sp>
+        <p:nvSpPr>
+          <p:cNvPr id="41" name="TextBox 40"/>
+          <p:cNvSpPr txBox="1"/>
+          <p:nvPr/>
+        </p:nvSpPr>
+        <p:spPr>
+          <a:xfrm>
+            <a:off x="7040880" y="4544568"/>
+            <a:ext cx="4572000" cy="448056"/>
+          </a:xfrm>
+          <a:prstGeom prst="rect">
+            <a:avLst/>
+          </a:prstGeom>
+          <a:noFill/>
+        </p:spPr>
+        <p:txBody>
+          <a:bodyPr wrap="square" anchor="ctr" lIns="38100" rIns="38100" tIns="12700" bIns="12700">
+            <a:spAutoFit/>
+          </a:bodyPr>
+          <a:lstStyle/>
+          <a:p>
+            <a:pPr algn="l">
+              <a:spcAft>
+                <a:spcPts val="600"/>
+              </a:spcAft>
+            </a:pPr>
+            <a:r>
+              <a:rPr sz="1100" b="0">
+                <a:solidFill>
+                  <a:srgbClr val="1B2A38"/>
+                </a:solidFill>
+                <a:latin typeface="Calibri"/>
+              </a:rPr>
+              <a:t>HIDRÓGENO — 18 parámetros × 6 jurisdicciones = 40 celdas.</a:t>
+            </a:r>
+          </a:p>
+        </p:txBody>
+      </p:sp>
+      <p:sp>
+        <p:nvSpPr>
+          <p:cNvPr id="42" name="Rectangle 41"/>
+          <p:cNvSpPr/>
+          <p:nvPr/>
+        </p:nvSpPr>
+        <p:spPr>
+          <a:xfrm>
+            <a:off x="3931920" y="5166360"/>
+            <a:ext cx="7818120" cy="502920"/>
+          </a:xfrm>
+          <a:prstGeom prst="rect">
+            <a:avLst/>
+          </a:prstGeom>
+          <a:solidFill>
+            <a:srgbClr val="FDF0DF"/>
+          </a:solidFill>
+          <a:ln>
+            <a:noFill/>
+          </a:ln>
+          <a:effectLst/>
+        </p:spPr>
+        <p:style>
+          <a:lnRef idx="1">
+            <a:schemeClr val="accent1"/>
+          </a:lnRef>
+          <a:fillRef idx="3">
+            <a:schemeClr val="accent1"/>
+          </a:fillRef>
+          <a:effectRef idx="2">
+            <a:schemeClr val="accent1"/>
+          </a:effectRef>
+          <a:fontRef idx="minor">
+            <a:schemeClr val="lt1"/>
+          </a:fontRef>
+        </p:style>
+        <p:txBody>
+          <a:bodyPr rtlCol="0" anchor="ctr" wrap="square"/>
+          <a:lstStyle/>
+          <a:p>
+            <a:pPr algn="ctr"/>
+          </a:p>
+        </p:txBody>
+      </p:sp>
+      <p:sp>
+        <p:nvSpPr>
+          <p:cNvPr id="43" name="Rectangle 42"/>
+          <p:cNvSpPr/>
+          <p:nvPr/>
+        </p:nvSpPr>
+        <p:spPr>
+          <a:xfrm>
+            <a:off x="3931920" y="5166360"/>
+            <a:ext cx="73152" cy="502920"/>
+          </a:xfrm>
+          <a:prstGeom prst="rect">
+            <a:avLst/>
+          </a:prstGeom>
+          <a:solidFill>
+            <a:srgbClr val="E88A1A"/>
+          </a:solidFill>
+          <a:ln>
+            <a:noFill/>
+          </a:ln>
+          <a:effectLst/>
+        </p:spPr>
+        <p:style>
+          <a:lnRef idx="1">
+            <a:schemeClr val="accent1"/>
+          </a:lnRef>
+          <a:fillRef idx="3">
+            <a:schemeClr val="accent1"/>
+          </a:fillRef>
+          <a:effectRef idx="2">
+            <a:schemeClr val="accent1"/>
+          </a:effectRef>
+          <a:fontRef idx="minor">
+            <a:schemeClr val="lt1"/>
+          </a:fontRef>
+        </p:style>
+        <p:txBody>
+          <a:bodyPr rtlCol="0" anchor="ctr" wrap="square"/>
+          <a:lstStyle/>
+          <a:p>
+            <a:pPr algn="ctr"/>
+          </a:p>
+        </p:txBody>
+      </p:sp>
+      <p:sp>
+        <p:nvSpPr>
+          <p:cNvPr id="44" name="TextBox 43"/>
+          <p:cNvSpPr txBox="1"/>
+          <p:nvPr/>
+        </p:nvSpPr>
+        <p:spPr>
+          <a:xfrm>
+            <a:off x="4096512" y="5184648"/>
+            <a:ext cx="7498079" cy="466344"/>
+          </a:xfrm>
+          <a:prstGeom prst="rect">
+            <a:avLst/>
+          </a:prstGeom>
+          <a:noFill/>
+        </p:spPr>
+        <p:txBody>
+          <a:bodyPr wrap="square" anchor="ctr" lIns="38100" rIns="38100" tIns="12700" bIns="12700">
+            <a:spAutoFit/>
+          </a:bodyPr>
+          <a:lstStyle/>
+          <a:p>
+            <a:pPr algn="l">
+              <a:spcAft>
+                <a:spcPts val="600"/>
+              </a:spcAft>
+            </a:pPr>
+            <a:r>
+              <a:rPr sz="1100" b="1">
+                <a:solidFill>
+                  <a:srgbClr val="A5610E"/>
+                </a:solidFill>
+                <a:latin typeface="Calibri"/>
+              </a:rPr>
+              <a:t>flags · orquestador · motor_reglas · rag  —  documentación de diseño dentro del YAML: el código NO las lee.</a:t>
+            </a:r>
+          </a:p>
+        </p:txBody>
+      </p:sp>
+      <p:sp>
+        <p:nvSpPr>
+          <p:cNvPr id="45" name="Rectangle 44"/>
+          <p:cNvSpPr/>
+          <p:nvPr/>
+        </p:nvSpPr>
+        <p:spPr>
+          <a:xfrm>
+            <a:off x="457200" y="5806440"/>
+            <a:ext cx="11292840" cy="502920"/>
           </a:xfrm>
           <a:prstGeom prst="rect">
             <a:avLst/>
@@ -11706,14 +11019,14 @@
       </p:sp>
       <p:sp>
         <p:nvSpPr>
-          <p:cNvPr id="38" name="Rectangle 37"/>
+          <p:cNvPr id="46" name="Rectangle 45"/>
           <p:cNvSpPr/>
           <p:nvPr/>
         </p:nvSpPr>
         <p:spPr>
           <a:xfrm>
-            <a:off x="457200" y="5394960"/>
-            <a:ext cx="82296" cy="914400"/>
+            <a:off x="457200" y="5806440"/>
+            <a:ext cx="82296" cy="502920"/>
           </a:xfrm>
           <a:prstGeom prst="rect">
             <a:avLst/>
@@ -11750,14 +11063,14 @@
       </p:sp>
       <p:sp>
         <p:nvSpPr>
-          <p:cNvPr id="39" name="TextBox 38"/>
+          <p:cNvPr id="47" name="TextBox 46"/>
           <p:cNvSpPr txBox="1"/>
           <p:nvPr/>
         </p:nvSpPr>
         <p:spPr>
           <a:xfrm>
-            <a:off x="731520" y="5468112"/>
-            <a:ext cx="10881360" cy="822960"/>
+            <a:off x="731520" y="5824728"/>
+            <a:ext cx="10881360" cy="466344"/>
           </a:xfrm>
           <a:prstGeom prst="rect">
             <a:avLst/>
@@ -11765,40 +11078,24 @@
           <a:noFill/>
         </p:spPr>
         <p:txBody>
-          <a:bodyPr wrap="square" anchor="t" lIns="38100" rIns="38100" tIns="12700" bIns="12700">
+          <a:bodyPr wrap="square" anchor="ctr" lIns="38100" rIns="38100" tIns="12700" bIns="12700">
             <a:spAutoFit/>
           </a:bodyPr>
           <a:lstStyle/>
           <a:p>
             <a:pPr algn="l">
               <a:spcAft>
-                <a:spcPts val="300"/>
-              </a:spcAft>
-            </a:pPr>
-            <a:r>
-              <a:rPr sz="1400" b="1">
+                <a:spcPts val="600"/>
+              </a:spcAft>
+            </a:pPr>
+            <a:r>
+              <a:rPr sz="1300" b="1">
                 <a:solidFill>
                   <a:srgbClr val="013A57"/>
                 </a:solidFill>
                 <a:latin typeface="Calibri"/>
               </a:rPr>
-              <a:t>Las tres secciones de parámetros comparten EXACTAMENTE el mismo esquema.</a:t>
-            </a:r>
-          </a:p>
-          <a:p>
-            <a:pPr algn="l">
-              <a:spcAft>
-                <a:spcPts val="300"/>
-              </a:spcAft>
-            </a:pPr>
-            <a:r>
-              <a:rPr sz="1250" b="0">
-                <a:solidFill>
-                  <a:srgbClr val="4A5B68"/>
-                </a:solidFill>
-                <a:latin typeface="Calibri"/>
-              </a:rPr>
-              <a:t>Por eso la ampliación a biometano e hidrógeno no cambió la arquitectura: reutiliza la misma maquinaria (consulta, comparativa, matriz, normalización ISO 13443 y estados de verificación).</a:t>
+              <a:t>Las tres secciones de parámetros comparten EXACTAMENTE el mismo esquema: por eso ampliar a biometano e hidrógeno no obligó a cambiar la arquitectura.</a:t>
             </a:r>
           </a:p>
         </p:txBody>
@@ -11943,7 +11240,7 @@
                 </a:solidFill>
                 <a:latin typeface="Calibri"/>
               </a:rPr>
-              <a:t>EL CORAZÓN DEL DATO</a:t>
+              <a:t>PIEZA 2 · ONTOLOGÍA</a:t>
             </a:r>
           </a:p>
         </p:txBody>
@@ -12113,7 +11410,7 @@
         <p:spPr>
           <a:xfrm>
             <a:off x="502920" y="1645920"/>
-            <a:ext cx="5806440" cy="3383280"/>
+            <a:ext cx="5806440" cy="3429000"/>
           </a:xfrm>
           <a:prstGeom prst="roundRect">
             <a:avLst>
@@ -12244,7 +11541,7 @@
         <p:spPr>
           <a:xfrm>
             <a:off x="713232" y="2103120"/>
-            <a:ext cx="5486400" cy="2834640"/>
+            <a:ext cx="5486400" cy="2880360"/>
           </a:xfrm>
           <a:prstGeom prst="rect">
             <a:avLst/>
@@ -12436,14 +11733,53 @@
       </p:sp>
       <p:sp>
         <p:nvSpPr>
-          <p:cNvPr id="13" name="Rounded Rectangle 12"/>
+          <p:cNvPr id="13" name="TextBox 12"/>
+          <p:cNvSpPr txBox="1"/>
+          <p:nvPr/>
+        </p:nvSpPr>
+        <p:spPr>
+          <a:xfrm>
+            <a:off x="713232" y="4617720"/>
+            <a:ext cx="5486400" cy="411480"/>
+          </a:xfrm>
+          <a:prstGeom prst="rect">
+            <a:avLst/>
+          </a:prstGeom>
+          <a:noFill/>
+        </p:spPr>
+        <p:txBody>
+          <a:bodyPr wrap="square" anchor="t" lIns="38100" rIns="38100" tIns="12700" bIns="12700">
+            <a:spAutoFit/>
+          </a:bodyPr>
+          <a:lstStyle/>
+          <a:p>
+            <a:pPr algn="l">
+              <a:spcAft>
+                <a:spcPts val="600"/>
+              </a:spcAft>
+            </a:pPr>
+            <a:r>
+              <a:rPr sz="1050" b="0">
+                <a:solidFill>
+                  <a:srgbClr val="4A5B68"/>
+                </a:solidFill>
+                <a:latin typeface="Calibri"/>
+              </a:rPr>
+              <a:t>La cita (fuente + artículo) y el TEXTO LITERAL permiten recomprobar la celda sin abrir el PDF. Y condiciones_referencia es lo que hace posible normalizar con ISO 13443 antes de comparar.</a:t>
+            </a:r>
+          </a:p>
+        </p:txBody>
+      </p:sp>
+      <p:sp>
+        <p:nvSpPr>
+          <p:cNvPr id="14" name="Rounded Rectangle 13"/>
           <p:cNvSpPr/>
           <p:nvPr/>
         </p:nvSpPr>
         <p:spPr>
           <a:xfrm>
             <a:off x="6537960" y="1645920"/>
-            <a:ext cx="5166360" cy="1600200"/>
+            <a:ext cx="5184648" cy="1051560"/>
           </a:xfrm>
           <a:prstGeom prst="roundRect">
             <a:avLst>
@@ -12484,14 +11820,14 @@
       </p:sp>
       <p:sp>
         <p:nvSpPr>
-          <p:cNvPr id="14" name="Rectangle 13"/>
+          <p:cNvPr id="15" name="Rectangle 14"/>
           <p:cNvSpPr/>
           <p:nvPr/>
         </p:nvSpPr>
         <p:spPr>
           <a:xfrm>
             <a:off x="6537960" y="1645920"/>
-            <a:ext cx="82296" cy="1600200"/>
+            <a:ext cx="82296" cy="1051560"/>
           </a:xfrm>
           <a:prstGeom prst="rect">
             <a:avLst/>
@@ -12528,14 +11864,14 @@
       </p:sp>
       <p:sp>
         <p:nvSpPr>
-          <p:cNvPr id="15" name="TextBox 14"/>
+          <p:cNvPr id="16" name="TextBox 15"/>
           <p:cNvSpPr txBox="1"/>
           <p:nvPr/>
         </p:nvSpPr>
         <p:spPr>
           <a:xfrm>
-            <a:off x="6812280" y="1783080"/>
-            <a:ext cx="4754880" cy="1371600"/>
+            <a:off x="6784848" y="1700784"/>
+            <a:ext cx="1234440" cy="502920"/>
           </a:xfrm>
           <a:prstGeom prst="rect">
             <a:avLst/>
@@ -12550,47 +11886,272 @@
           <a:p>
             <a:pPr algn="l">
               <a:spcAft>
-                <a:spcPts val="400"/>
-              </a:spcAft>
-            </a:pPr>
-            <a:r>
-              <a:rPr sz="2000" b="1">
+                <a:spcPts val="600"/>
+              </a:spcAft>
+            </a:pPr>
+            <a:r>
+              <a:rPr sz="2600" b="1">
                 <a:solidFill>
                   <a:srgbClr val="3E6B22"/>
                 </a:solidFill>
                 <a:latin typeface="Calibri"/>
               </a:rPr>
-              <a:t>176   VERIFICADO</a:t>
-            </a:r>
-          </a:p>
+              <a:t>209</a:t>
+            </a:r>
+          </a:p>
+        </p:txBody>
+      </p:sp>
+      <p:sp>
+        <p:nvSpPr>
+          <p:cNvPr id="17" name="TextBox 16"/>
+          <p:cNvSpPr txBox="1"/>
+          <p:nvPr/>
+        </p:nvSpPr>
+        <p:spPr>
+          <a:xfrm>
+            <a:off x="8001000" y="1691640"/>
+            <a:ext cx="3566160" cy="960120"/>
+          </a:xfrm>
+          <a:prstGeom prst="rect">
+            <a:avLst/>
+          </a:prstGeom>
+          <a:noFill/>
+        </p:spPr>
+        <p:txBody>
+          <a:bodyPr wrap="square" anchor="t" lIns="38100" rIns="38100" tIns="12700" bIns="12700">
+            <a:spAutoFit/>
+          </a:bodyPr>
+          <a:lstStyle/>
           <a:p>
             <a:pPr algn="l">
               <a:spcAft>
-                <a:spcPts val="400"/>
-              </a:spcAft>
-            </a:pPr>
-            <a:r>
-              <a:rPr sz="1250" b="0">
+                <a:spcPts val="100"/>
+              </a:spcAft>
+            </a:pPr>
+            <a:r>
+              <a:rPr sz="1200" b="1">
+                <a:solidFill>
+                  <a:srgbClr val="3E6B22"/>
+                </a:solidFill>
+                <a:latin typeface="Calibri"/>
+              </a:rPr>
+              <a:t>VERIFICADO</a:t>
+            </a:r>
+          </a:p>
+          <a:p>
+            <a:pPr algn="l">
+              <a:spcAft>
+                <a:spcPts val="100"/>
+              </a:spcAft>
+            </a:pPr>
+            <a:r>
+              <a:rPr sz="1050" b="0">
                 <a:solidFill>
                   <a:srgbClr val="1B2A38"/>
                 </a:solidFill>
                 <a:latin typeface="Calibri"/>
               </a:rPr>
-              <a:t>Cifra contrastada VERBATIM contra su boletín oficial, con artículo y página.</a:t>
-            </a:r>
-          </a:p>
-        </p:txBody>
-      </p:sp>
-      <p:sp>
-        <p:nvSpPr>
-          <p:cNvPr id="16" name="Rounded Rectangle 15"/>
+              <a:t>Contrastado VERBATIM contra el boletín oficial.</a:t>
+            </a:r>
+          </a:p>
+        </p:txBody>
+      </p:sp>
+      <p:sp>
+        <p:nvSpPr>
+          <p:cNvPr id="18" name="Rounded Rectangle 17"/>
           <p:cNvSpPr/>
           <p:nvPr/>
         </p:nvSpPr>
         <p:spPr>
           <a:xfrm>
-            <a:off x="6537960" y="3429000"/>
-            <a:ext cx="5166360" cy="1600200"/>
+            <a:off x="6537960" y="2834640"/>
+            <a:ext cx="5184648" cy="1051560"/>
+          </a:xfrm>
+          <a:prstGeom prst="roundRect">
+            <a:avLst>
+              <a:gd name="adj" fmla="val 6000"/>
+            </a:avLst>
+          </a:prstGeom>
+          <a:solidFill>
+            <a:srgbClr val="E4EFF6"/>
+          </a:solidFill>
+          <a:ln w="15875">
+            <a:solidFill>
+              <a:srgbClr val="0099D6"/>
+            </a:solidFill>
+          </a:ln>
+          <a:effectLst/>
+        </p:spPr>
+        <p:style>
+          <a:lnRef idx="1">
+            <a:schemeClr val="accent1"/>
+          </a:lnRef>
+          <a:fillRef idx="3">
+            <a:schemeClr val="accent1"/>
+          </a:fillRef>
+          <a:effectRef idx="2">
+            <a:schemeClr val="accent1"/>
+          </a:effectRef>
+          <a:fontRef idx="minor">
+            <a:schemeClr val="lt1"/>
+          </a:fontRef>
+        </p:style>
+        <p:txBody>
+          <a:bodyPr rtlCol="0" anchor="ctr" wrap="square"/>
+          <a:lstStyle/>
+          <a:p>
+            <a:pPr algn="ctr"/>
+          </a:p>
+        </p:txBody>
+      </p:sp>
+      <p:sp>
+        <p:nvSpPr>
+          <p:cNvPr id="19" name="Rectangle 18"/>
+          <p:cNvSpPr/>
+          <p:nvPr/>
+        </p:nvSpPr>
+        <p:spPr>
+          <a:xfrm>
+            <a:off x="6537960" y="2834640"/>
+            <a:ext cx="82296" cy="1051560"/>
+          </a:xfrm>
+          <a:prstGeom prst="rect">
+            <a:avLst/>
+          </a:prstGeom>
+          <a:solidFill>
+            <a:srgbClr val="0099D6"/>
+          </a:solidFill>
+          <a:ln>
+            <a:noFill/>
+          </a:ln>
+          <a:effectLst/>
+        </p:spPr>
+        <p:style>
+          <a:lnRef idx="1">
+            <a:schemeClr val="accent1"/>
+          </a:lnRef>
+          <a:fillRef idx="3">
+            <a:schemeClr val="accent1"/>
+          </a:fillRef>
+          <a:effectRef idx="2">
+            <a:schemeClr val="accent1"/>
+          </a:effectRef>
+          <a:fontRef idx="minor">
+            <a:schemeClr val="lt1"/>
+          </a:fontRef>
+        </p:style>
+        <p:txBody>
+          <a:bodyPr rtlCol="0" anchor="ctr" wrap="square"/>
+          <a:lstStyle/>
+          <a:p>
+            <a:pPr algn="ctr"/>
+          </a:p>
+        </p:txBody>
+      </p:sp>
+      <p:sp>
+        <p:nvSpPr>
+          <p:cNvPr id="20" name="TextBox 19"/>
+          <p:cNvSpPr txBox="1"/>
+          <p:nvPr/>
+        </p:nvSpPr>
+        <p:spPr>
+          <a:xfrm>
+            <a:off x="6784848" y="2889504"/>
+            <a:ext cx="1234440" cy="502920"/>
+          </a:xfrm>
+          <a:prstGeom prst="rect">
+            <a:avLst/>
+          </a:prstGeom>
+          <a:noFill/>
+        </p:spPr>
+        <p:txBody>
+          <a:bodyPr wrap="square" anchor="t" lIns="38100" rIns="38100" tIns="12700" bIns="12700">
+            <a:spAutoFit/>
+          </a:bodyPr>
+          <a:lstStyle/>
+          <a:p>
+            <a:pPr algn="l">
+              <a:spcAft>
+                <a:spcPts val="600"/>
+              </a:spcAft>
+            </a:pPr>
+            <a:r>
+              <a:rPr sz="2600" b="1">
+                <a:solidFill>
+                  <a:srgbClr val="013A57"/>
+                </a:solidFill>
+                <a:latin typeface="Calibri"/>
+              </a:rPr>
+              <a:t>20</a:t>
+            </a:r>
+          </a:p>
+        </p:txBody>
+      </p:sp>
+      <p:sp>
+        <p:nvSpPr>
+          <p:cNvPr id="21" name="TextBox 20"/>
+          <p:cNvSpPr txBox="1"/>
+          <p:nvPr/>
+        </p:nvSpPr>
+        <p:spPr>
+          <a:xfrm>
+            <a:off x="8001000" y="2880360"/>
+            <a:ext cx="3566160" cy="960120"/>
+          </a:xfrm>
+          <a:prstGeom prst="rect">
+            <a:avLst/>
+          </a:prstGeom>
+          <a:noFill/>
+        </p:spPr>
+        <p:txBody>
+          <a:bodyPr wrap="square" anchor="t" lIns="38100" rIns="38100" tIns="12700" bIns="12700">
+            <a:spAutoFit/>
+          </a:bodyPr>
+          <a:lstStyle/>
+          <a:p>
+            <a:pPr algn="l">
+              <a:spcAft>
+                <a:spcPts val="100"/>
+              </a:spcAft>
+            </a:pPr>
+            <a:r>
+              <a:rPr sz="1200" b="1">
+                <a:solidFill>
+                  <a:srgbClr val="013A57"/>
+                </a:solidFill>
+                <a:latin typeface="Calibri"/>
+              </a:rPr>
+              <a:t>VERIFICADO_SECUNDARIO</a:t>
+            </a:r>
+          </a:p>
+          <a:p>
+            <a:pPr algn="l">
+              <a:spcAft>
+                <a:spcPts val="100"/>
+              </a:spcAft>
+            </a:pPr>
+            <a:r>
+              <a:rPr sz="1050" b="0">
+                <a:solidFill>
+                  <a:srgbClr val="1B2A38"/>
+                </a:solidFill>
+                <a:latin typeface="Calibri"/>
+              </a:rPr>
+              <a:t>La norma primaria es de pago: valor tomado de fuente pública secundaria, citada.</a:t>
+            </a:r>
+          </a:p>
+        </p:txBody>
+      </p:sp>
+      <p:sp>
+        <p:nvSpPr>
+          <p:cNvPr id="22" name="Rounded Rectangle 21"/>
+          <p:cNvSpPr/>
+          <p:nvPr/>
+        </p:nvSpPr>
+        <p:spPr>
+          <a:xfrm>
+            <a:off x="6537960" y="4023360"/>
+            <a:ext cx="5184648" cy="1051560"/>
           </a:xfrm>
           <a:prstGeom prst="roundRect">
             <a:avLst>
@@ -12631,14 +12192,14 @@
       </p:sp>
       <p:sp>
         <p:nvSpPr>
-          <p:cNvPr id="17" name="Rectangle 16"/>
+          <p:cNvPr id="23" name="Rectangle 22"/>
           <p:cNvSpPr/>
           <p:nvPr/>
         </p:nvSpPr>
         <p:spPr>
           <a:xfrm>
-            <a:off x="6537960" y="3429000"/>
-            <a:ext cx="82296" cy="1600200"/>
+            <a:off x="6537960" y="4023360"/>
+            <a:ext cx="82296" cy="1051560"/>
           </a:xfrm>
           <a:prstGeom prst="rect">
             <a:avLst/>
@@ -12675,14 +12236,14 @@
       </p:sp>
       <p:sp>
         <p:nvSpPr>
-          <p:cNvPr id="18" name="TextBox 17"/>
+          <p:cNvPr id="24" name="TextBox 23"/>
           <p:cNvSpPr txBox="1"/>
           <p:nvPr/>
         </p:nvSpPr>
         <p:spPr>
           <a:xfrm>
-            <a:off x="6812280" y="3566160"/>
-            <a:ext cx="4754880" cy="1371600"/>
+            <a:off x="6784848" y="4078224"/>
+            <a:ext cx="1234440" cy="502920"/>
           </a:xfrm>
           <a:prstGeom prst="rect">
             <a:avLst/>
@@ -12697,47 +12258,169 @@
           <a:p>
             <a:pPr algn="l">
               <a:spcAft>
-                <a:spcPts val="400"/>
-              </a:spcAft>
-            </a:pPr>
-            <a:r>
-              <a:rPr sz="2000" b="1">
+                <a:spcPts val="600"/>
+              </a:spcAft>
+            </a:pPr>
+            <a:r>
+              <a:rPr sz="2600" b="1">
                 <a:solidFill>
                   <a:srgbClr val="A5610E"/>
                 </a:solidFill>
                 <a:latin typeface="Calibri"/>
               </a:rPr>
-              <a:t>34   NO VERIFICABLE</a:t>
-            </a:r>
-          </a:p>
+              <a:t>48</a:t>
+            </a:r>
+          </a:p>
+        </p:txBody>
+      </p:sp>
+      <p:sp>
+        <p:nvSpPr>
+          <p:cNvPr id="25" name="TextBox 24"/>
+          <p:cNvSpPr txBox="1"/>
+          <p:nvPr/>
+        </p:nvSpPr>
+        <p:spPr>
+          <a:xfrm>
+            <a:off x="8001000" y="4069080"/>
+            <a:ext cx="3566160" cy="960120"/>
+          </a:xfrm>
+          <a:prstGeom prst="rect">
+            <a:avLst/>
+          </a:prstGeom>
+          <a:noFill/>
+        </p:spPr>
+        <p:txBody>
+          <a:bodyPr wrap="square" anchor="t" lIns="38100" rIns="38100" tIns="12700" bIns="12700">
+            <a:spAutoFit/>
+          </a:bodyPr>
+          <a:lstStyle/>
           <a:p>
             <a:pPr algn="l">
               <a:spcAft>
-                <a:spcPts val="400"/>
-              </a:spcAft>
-            </a:pPr>
-            <a:r>
-              <a:rPr sz="1250" b="0">
+                <a:spcPts val="100"/>
+              </a:spcAft>
+            </a:pPr>
+            <a:r>
+              <a:rPr sz="1200" b="1">
+                <a:solidFill>
+                  <a:srgbClr val="A5610E"/>
+                </a:solidFill>
+                <a:latin typeface="Calibri"/>
+              </a:rPr>
+              <a:t>NO VERIFICABLE</a:t>
+            </a:r>
+          </a:p>
+          <a:p>
+            <a:pPr algn="l">
+              <a:spcAft>
+                <a:spcPts val="100"/>
+              </a:spcAft>
+            </a:pPr>
+            <a:r>
+              <a:rPr sz="1050" b="0">
                 <a:solidFill>
                   <a:srgbClr val="1B2A38"/>
                 </a:solidFill>
                 <a:latin typeface="Calibri"/>
               </a:rPr>
-              <a:t>La norma de ese país NO FIJA ese parámetro. No se inventa: se declara el hueco y se explica.</a:t>
-            </a:r>
-          </a:p>
-        </p:txBody>
-      </p:sp>
-      <p:sp>
-        <p:nvSpPr>
-          <p:cNvPr id="19" name="Rectangle 18"/>
+              <a:t>La norma NO FIJA ese parámetro. No se inventa: se declara el hueco.</a:t>
+            </a:r>
+          </a:p>
+        </p:txBody>
+      </p:sp>
+      <p:sp>
+        <p:nvSpPr>
+          <p:cNvPr id="26" name="Rectangle 25"/>
           <p:cNvSpPr/>
           <p:nvPr/>
         </p:nvSpPr>
         <p:spPr>
           <a:xfrm>
-            <a:off x="502920" y="5212080"/>
-            <a:ext cx="11219688" cy="1097280"/>
+            <a:off x="6537960" y="5212080"/>
+            <a:ext cx="5184648" cy="457200"/>
+          </a:xfrm>
+          <a:prstGeom prst="rect">
+            <a:avLst/>
+          </a:prstGeom>
+          <a:solidFill>
+            <a:srgbClr val="EEF2F6"/>
+          </a:solidFill>
+          <a:ln>
+            <a:noFill/>
+          </a:ln>
+          <a:effectLst/>
+        </p:spPr>
+        <p:style>
+          <a:lnRef idx="1">
+            <a:schemeClr val="accent1"/>
+          </a:lnRef>
+          <a:fillRef idx="3">
+            <a:schemeClr val="accent1"/>
+          </a:fillRef>
+          <a:effectRef idx="2">
+            <a:schemeClr val="accent1"/>
+          </a:effectRef>
+          <a:fontRef idx="minor">
+            <a:schemeClr val="lt1"/>
+          </a:fontRef>
+        </p:style>
+        <p:txBody>
+          <a:bodyPr rtlCol="0" anchor="ctr" wrap="square"/>
+          <a:lstStyle/>
+          <a:p>
+            <a:pPr algn="ctr"/>
+          </a:p>
+        </p:txBody>
+      </p:sp>
+      <p:sp>
+        <p:nvSpPr>
+          <p:cNvPr id="27" name="TextBox 26"/>
+          <p:cNvSpPr txBox="1"/>
+          <p:nvPr/>
+        </p:nvSpPr>
+        <p:spPr>
+          <a:xfrm>
+            <a:off x="6784848" y="5230368"/>
+            <a:ext cx="4754880" cy="420624"/>
+          </a:xfrm>
+          <a:prstGeom prst="rect">
+            <a:avLst/>
+          </a:prstGeom>
+          <a:noFill/>
+        </p:spPr>
+        <p:txBody>
+          <a:bodyPr wrap="square" anchor="ctr" lIns="38100" rIns="38100" tIns="12700" bIns="12700">
+            <a:spAutoFit/>
+          </a:bodyPr>
+          <a:lstStyle/>
+          <a:p>
+            <a:pPr algn="l">
+              <a:spcAft>
+                <a:spcPts val="600"/>
+              </a:spcAft>
+            </a:pPr>
+            <a:r>
+              <a:rPr sz="1100" b="1">
+                <a:solidFill>
+                  <a:srgbClr val="013A57"/>
+                </a:solidFill>
+                <a:latin typeface="Calibri"/>
+              </a:rPr>
+              <a:t>277 celdas en total  ·  gas natural: 176 verificadas / 34 no verificables</a:t>
+            </a:r>
+          </a:p>
+        </p:txBody>
+      </p:sp>
+      <p:sp>
+        <p:nvSpPr>
+          <p:cNvPr id="28" name="Rectangle 27"/>
+          <p:cNvSpPr/>
+          <p:nvPr/>
+        </p:nvSpPr>
+        <p:spPr>
+          <a:xfrm>
+            <a:off x="502920" y="5806440"/>
+            <a:ext cx="11219688" cy="502920"/>
           </a:xfrm>
           <a:prstGeom prst="rect">
             <a:avLst/>
@@ -12774,14 +12457,14 @@
       </p:sp>
       <p:sp>
         <p:nvSpPr>
-          <p:cNvPr id="20" name="Rectangle 19"/>
+          <p:cNvPr id="29" name="Rectangle 28"/>
           <p:cNvSpPr/>
           <p:nvPr/>
         </p:nvSpPr>
         <p:spPr>
           <a:xfrm>
-            <a:off x="502920" y="5212080"/>
-            <a:ext cx="82296" cy="1097280"/>
+            <a:off x="502920" y="5806440"/>
+            <a:ext cx="82296" cy="502920"/>
           </a:xfrm>
           <a:prstGeom prst="rect">
             <a:avLst/>
@@ -12818,14 +12501,14 @@
       </p:sp>
       <p:sp>
         <p:nvSpPr>
-          <p:cNvPr id="21" name="TextBox 20"/>
+          <p:cNvPr id="30" name="TextBox 29"/>
           <p:cNvSpPr txBox="1"/>
           <p:nvPr/>
         </p:nvSpPr>
         <p:spPr>
           <a:xfrm>
-            <a:off x="777240" y="5276088"/>
-            <a:ext cx="10835640" cy="1005840"/>
+            <a:off x="777240" y="5824728"/>
+            <a:ext cx="10835640" cy="466344"/>
           </a:xfrm>
           <a:prstGeom prst="rect">
             <a:avLst/>
@@ -12833,56 +12516,24 @@
           <a:noFill/>
         </p:spPr>
         <p:txBody>
-          <a:bodyPr wrap="square" anchor="t" lIns="38100" rIns="38100" tIns="12700" bIns="12700">
+          <a:bodyPr wrap="square" anchor="ctr" lIns="38100" rIns="38100" tIns="12700" bIns="12700">
             <a:spAutoFit/>
           </a:bodyPr>
           <a:lstStyle/>
           <a:p>
             <a:pPr algn="l">
               <a:spcAft>
-                <a:spcPts val="200"/>
-              </a:spcAft>
-            </a:pPr>
-            <a:r>
-              <a:rPr sz="1400" b="1">
+                <a:spcPts val="600"/>
+              </a:spcAft>
+            </a:pPr>
+            <a:r>
+              <a:rPr sz="1250" b="1">
                 <a:solidFill>
                   <a:srgbClr val="013A57"/>
                 </a:solidFill>
                 <a:latin typeface="Calibri"/>
               </a:rPr>
-              <a:t>Solo hay dos estados, y ningún intermedio. Los huecos no son errores: son honestidad.</a:t>
-            </a:r>
-          </a:p>
-          <a:p>
-            <a:pPr algn="l">
-              <a:spcAft>
-                <a:spcPts val="200"/>
-              </a:spcAft>
-            </a:pPr>
-            <a:r>
-              <a:rPr sz="1250" b="0">
-                <a:solidFill>
-                  <a:srgbClr val="1B2A38"/>
-                </a:solidFill>
-                <a:latin typeface="Calibri"/>
-              </a:rPr>
-              <a:t>Ejemplo real — DINAMARCA: los límites de O2 y CO2 de su norma corresponden al BIOGÁS DE DISTRIBUCIÓN, no al gas natural de transporte. Trasladar ese valor sería un error metodológico; por eso se marcaron como no verificable.</a:t>
-            </a:r>
-          </a:p>
-          <a:p>
-            <a:pPr algn="l">
-              <a:spcAft>
-                <a:spcPts val="200"/>
-              </a:spcAft>
-            </a:pPr>
-            <a:r>
-              <a:rPr sz="1250" b="0">
-                <a:solidFill>
-                  <a:srgbClr val="4A5B68"/>
-                </a:solidFill>
-                <a:latin typeface="Calibri"/>
-              </a:rPr>
-              <a:t>Gracias a expresion_original (el texto literal de la norma), un auditor puede recomprobar cualquier celda SIN abrir el PDF.</a:t>
+              <a:t>DINAMARCA: los límites de O2/CO2 de su norma son del BIOGÁS DE DISTRIBUCIÓN, no del gas natural de transporte. Por eso se marcaron NO VERIFICABLE en vez de rellenar el hueco.</a:t>
             </a:r>
           </a:p>
         </p:txBody>
@@ -12914,7 +12565,7 @@
         <p:spPr>
           <a:xfrm>
             <a:off x="0" y="0"/>
-            <a:ext cx="12191695" cy="932688"/>
+            <a:ext cx="12191695" cy="6858000"/>
           </a:xfrm>
           <a:prstGeom prst="rect">
             <a:avLst/>
@@ -12957,8 +12608,8 @@
         </p:nvSpPr>
         <p:spPr>
           <a:xfrm>
-            <a:off x="0" y="932688"/>
-            <a:ext cx="12191695" cy="50292"/>
+            <a:off x="0" y="1325880"/>
+            <a:ext cx="12191695" cy="45720"/>
           </a:xfrm>
           <a:prstGeom prst="rect">
             <a:avLst/>
@@ -13001,8 +12652,8 @@
         </p:nvSpPr>
         <p:spPr>
           <a:xfrm>
-            <a:off x="502920" y="118872"/>
-            <a:ext cx="10515600" cy="237744"/>
+            <a:off x="822960" y="457200"/>
+            <a:ext cx="10515600" cy="731520"/>
           </a:xfrm>
           <a:prstGeom prst="rect">
             <a:avLst/>
@@ -13021,2016 +12672,27 @@
               </a:spcAft>
             </a:pPr>
             <a:r>
-              <a:rPr sz="1100" b="1">
-                <a:solidFill>
-                  <a:srgbClr val="0099D6"/>
+              <a:rPr sz="3200" b="1">
+                <a:solidFill>
+                  <a:srgbClr val="FFFFFF"/>
                 </a:solidFill>
                 <a:latin typeface="Calibri"/>
               </a:rPr>
-              <a:t>CÓMO FUNCIONA</a:t>
-            </a:r>
-          </a:p>
-        </p:txBody>
-      </p:sp>
-      <p:sp>
-        <p:nvSpPr>
-          <p:cNvPr id="5" name="TextBox 4"/>
-          <p:cNvSpPr txBox="1"/>
-          <p:nvPr/>
-        </p:nvSpPr>
-        <p:spPr>
-          <a:xfrm>
-            <a:off x="502920" y="347472"/>
-            <a:ext cx="10607040" cy="530352"/>
-          </a:xfrm>
-          <a:prstGeom prst="rect">
-            <a:avLst/>
-          </a:prstGeom>
-          <a:noFill/>
-        </p:spPr>
-        <p:txBody>
-          <a:bodyPr wrap="square" anchor="t" lIns="38100" rIns="38100" tIns="12700" bIns="12700">
-            <a:spAutoFit/>
-          </a:bodyPr>
-          <a:lstStyle/>
-          <a:p>
-            <a:pPr algn="l">
-              <a:spcAft>
-                <a:spcPts val="600"/>
-              </a:spcAft>
-            </a:pPr>
-            <a:r>
-              <a:rPr sz="2500" b="1">
-                <a:solidFill>
-                  <a:srgbClr val="FFFFFF"/>
-                </a:solidFill>
-                <a:latin typeface="Calibri"/>
-              </a:rPr>
-              <a:t>El motor determinista y la normalización</a:t>
-            </a:r>
-          </a:p>
-        </p:txBody>
-      </p:sp>
-      <p:sp>
-        <p:nvSpPr>
-          <p:cNvPr id="6" name="TextBox 5"/>
-          <p:cNvSpPr txBox="1"/>
-          <p:nvPr/>
-        </p:nvSpPr>
-        <p:spPr>
-          <a:xfrm>
-            <a:off x="502920" y="6455664"/>
-            <a:ext cx="8229600" cy="292608"/>
-          </a:xfrm>
-          <a:prstGeom prst="rect">
-            <a:avLst/>
-          </a:prstGeom>
-          <a:noFill/>
-        </p:spPr>
-        <p:txBody>
-          <a:bodyPr wrap="square" anchor="t" lIns="38100" rIns="38100" tIns="12700" bIns="12700">
-            <a:spAutoFit/>
-          </a:bodyPr>
-          <a:lstStyle/>
-          <a:p>
-            <a:pPr algn="l">
-              <a:spcAft>
-                <a:spcPts val="600"/>
-              </a:spcAft>
-            </a:pPr>
-            <a:r>
-              <a:rPr sz="1000" b="0">
-                <a:solidFill>
-                  <a:srgbClr val="4A5B68"/>
-                </a:solidFill>
-                <a:latin typeface="Calibri"/>
-              </a:rPr>
-              <a:t>Comparador Regulatorio de Calidad de Gas — Enagás</a:t>
-            </a:r>
-          </a:p>
-        </p:txBody>
-      </p:sp>
-      <p:sp>
-        <p:nvSpPr>
-          <p:cNvPr id="7" name="TextBox 6"/>
-          <p:cNvSpPr txBox="1"/>
-          <p:nvPr/>
-        </p:nvSpPr>
-        <p:spPr>
-          <a:xfrm>
-            <a:off x="11155680" y="6455664"/>
-            <a:ext cx="777240" cy="292608"/>
-          </a:xfrm>
-          <a:prstGeom prst="rect">
-            <a:avLst/>
-          </a:prstGeom>
-          <a:noFill/>
-        </p:spPr>
-        <p:txBody>
-          <a:bodyPr wrap="square" anchor="t" lIns="38100" rIns="38100" tIns="12700" bIns="12700">
-            <a:spAutoFit/>
-          </a:bodyPr>
-          <a:lstStyle/>
-          <a:p>
-            <a:pPr algn="r">
-              <a:spcAft>
-                <a:spcPts val="600"/>
-              </a:spcAft>
-            </a:pPr>
-            <a:r>
-              <a:rPr sz="1000" b="0">
-                <a:solidFill>
-                  <a:srgbClr val="4A5B68"/>
-                </a:solidFill>
-                <a:latin typeface="Calibri"/>
-              </a:rPr>
-              <a:t>6</a:t>
-            </a:r>
-          </a:p>
-        </p:txBody>
-      </p:sp>
-      <p:sp>
-        <p:nvSpPr>
-          <p:cNvPr id="8" name="TextBox 7"/>
-          <p:cNvSpPr txBox="1"/>
-          <p:nvPr/>
-        </p:nvSpPr>
-        <p:spPr>
-          <a:xfrm>
-            <a:off x="548640" y="1234440"/>
-            <a:ext cx="11155680" cy="320040"/>
-          </a:xfrm>
-          <a:prstGeom prst="rect">
-            <a:avLst/>
-          </a:prstGeom>
-          <a:noFill/>
-        </p:spPr>
-        <p:txBody>
-          <a:bodyPr wrap="square" anchor="t" lIns="38100" rIns="38100" tIns="12700" bIns="12700">
-            <a:spAutoFit/>
-          </a:bodyPr>
-          <a:lstStyle/>
-          <a:p>
-            <a:pPr algn="l">
-              <a:spcAft>
-                <a:spcPts val="600"/>
-              </a:spcAft>
-            </a:pPr>
-            <a:r>
-              <a:rPr sz="1400" b="0">
-                <a:solidFill>
-                  <a:srgbClr val="4A5B68"/>
-                </a:solidFill>
-                <a:latin typeface="Calibri"/>
-              </a:rPr>
-              <a:t>«Determinista» = ante la misma consulta, siempre la misma respuesta, calculada por código, sin azar ni IA.</a:t>
-            </a:r>
-          </a:p>
-        </p:txBody>
-      </p:sp>
-      <p:sp>
-        <p:nvSpPr>
-          <p:cNvPr id="9" name="Rounded Rectangle 8"/>
+              <a:t>Las garantías del sistema</a:t>
+            </a:r>
+          </a:p>
+        </p:txBody>
+      </p:sp>
+      <p:sp>
+        <p:nvSpPr>
+          <p:cNvPr id="5" name="Rectangle 4"/>
           <p:cNvSpPr/>
           <p:nvPr/>
         </p:nvSpPr>
         <p:spPr>
           <a:xfrm>
-            <a:off x="548640" y="1691640"/>
-            <a:ext cx="5440680" cy="2286000"/>
-          </a:xfrm>
-          <a:prstGeom prst="roundRect">
-            <a:avLst>
-              <a:gd name="adj" fmla="val 6000"/>
-            </a:avLst>
-          </a:prstGeom>
-          <a:solidFill>
-            <a:srgbClr val="EEF2F6"/>
-          </a:solidFill>
-          <a:ln w="12700">
-            <a:solidFill>
-              <a:srgbClr val="C8D4DD"/>
-            </a:solidFill>
-          </a:ln>
-          <a:effectLst/>
-        </p:spPr>
-        <p:style>
-          <a:lnRef idx="1">
-            <a:schemeClr val="accent1"/>
-          </a:lnRef>
-          <a:fillRef idx="3">
-            <a:schemeClr val="accent1"/>
-          </a:fillRef>
-          <a:effectRef idx="2">
-            <a:schemeClr val="accent1"/>
-          </a:effectRef>
-          <a:fontRef idx="minor">
-            <a:schemeClr val="lt1"/>
-          </a:fontRef>
-        </p:style>
-        <p:txBody>
-          <a:bodyPr rtlCol="0" anchor="ctr" wrap="square"/>
-          <a:lstStyle/>
-          <a:p>
-            <a:pPr algn="ctr"/>
-          </a:p>
-        </p:txBody>
-      </p:sp>
-      <p:sp>
-        <p:nvSpPr>
-          <p:cNvPr id="10" name="Rectangle 9"/>
-          <p:cNvSpPr/>
-          <p:nvPr/>
-        </p:nvSpPr>
-        <p:spPr>
-          <a:xfrm>
-            <a:off x="548640" y="1691640"/>
-            <a:ext cx="5440680" cy="457200"/>
-          </a:xfrm>
-          <a:prstGeom prst="rect">
-            <a:avLst/>
-          </a:prstGeom>
-          <a:solidFill>
-            <a:srgbClr val="013A57"/>
-          </a:solidFill>
-          <a:ln>
-            <a:noFill/>
-          </a:ln>
-          <a:effectLst/>
-        </p:spPr>
-        <p:style>
-          <a:lnRef idx="1">
-            <a:schemeClr val="accent1"/>
-          </a:lnRef>
-          <a:fillRef idx="3">
-            <a:schemeClr val="accent1"/>
-          </a:fillRef>
-          <a:effectRef idx="2">
-            <a:schemeClr val="accent1"/>
-          </a:effectRef>
-          <a:fontRef idx="minor">
-            <a:schemeClr val="lt1"/>
-          </a:fontRef>
-        </p:style>
-        <p:txBody>
-          <a:bodyPr rtlCol="0" anchor="ctr" wrap="square"/>
-          <a:lstStyle/>
-          <a:p>
-            <a:pPr algn="ctr"/>
-          </a:p>
-        </p:txBody>
-      </p:sp>
-      <p:sp>
-        <p:nvSpPr>
-          <p:cNvPr id="11" name="TextBox 10"/>
-          <p:cNvSpPr txBox="1"/>
-          <p:nvPr/>
-        </p:nvSpPr>
-        <p:spPr>
-          <a:xfrm>
-            <a:off x="713232" y="1737360"/>
-            <a:ext cx="5120640" cy="384048"/>
-          </a:xfrm>
-          <a:prstGeom prst="rect">
-            <a:avLst/>
-          </a:prstGeom>
-          <a:noFill/>
-        </p:spPr>
-        <p:txBody>
-          <a:bodyPr wrap="square" anchor="t" lIns="38100" rIns="38100" tIns="12700" bIns="12700">
-            <a:spAutoFit/>
-          </a:bodyPr>
-          <a:lstStyle/>
-          <a:p>
-            <a:pPr algn="l">
-              <a:spcAft>
-                <a:spcPts val="600"/>
-              </a:spcAft>
-            </a:pPr>
-            <a:r>
-              <a:rPr sz="1400" b="1">
-                <a:solidFill>
-                  <a:srgbClr val="FFFFFF"/>
-                </a:solidFill>
-                <a:latin typeface="Calibri"/>
-              </a:rPr>
-              <a:t>RESUELVE SIN IA — 7 tipos de intención</a:t>
-            </a:r>
-          </a:p>
-        </p:txBody>
-      </p:sp>
-      <p:sp>
-        <p:nvSpPr>
-          <p:cNvPr id="12" name="TextBox 11"/>
-          <p:cNvSpPr txBox="1"/>
-          <p:nvPr/>
-        </p:nvSpPr>
-        <p:spPr>
-          <a:xfrm>
-            <a:off x="731520" y="2286000"/>
-            <a:ext cx="5074920" cy="1600200"/>
-          </a:xfrm>
-          <a:prstGeom prst="rect">
-            <a:avLst/>
-          </a:prstGeom>
-          <a:noFill/>
-        </p:spPr>
-        <p:txBody>
-          <a:bodyPr wrap="square" anchor="t" lIns="38100" rIns="38100" tIns="12700" bIns="12700">
-            <a:spAutoFit/>
-          </a:bodyPr>
-          <a:lstStyle/>
-          <a:p>
-            <a:pPr algn="l">
-              <a:spcAft>
-                <a:spcPts val="400"/>
-              </a:spcAft>
-            </a:pPr>
-            <a:r>
-              <a:rPr sz="1250" b="0">
-                <a:solidFill>
-                  <a:srgbClr val="1B2A38"/>
-                </a:solidFill>
-                <a:latin typeface="Calibri"/>
-              </a:rPr>
-              <a:t>• El valor de un límite</a:t>
-            </a:r>
-          </a:p>
-          <a:p>
-            <a:pPr algn="l">
-              <a:spcAft>
-                <a:spcPts val="400"/>
-              </a:spcAft>
-            </a:pPr>
-            <a:r>
-              <a:rPr sz="1250" b="0">
-                <a:solidFill>
-                  <a:srgbClr val="1B2A38"/>
-                </a:solidFill>
-                <a:latin typeface="Calibri"/>
-              </a:rPr>
-              <a:t>• Si un valor medido cumple</a:t>
-            </a:r>
-          </a:p>
-          <a:p>
-            <a:pPr algn="l">
-              <a:spcAft>
-                <a:spcPts val="400"/>
-              </a:spcAft>
-            </a:pPr>
-            <a:r>
-              <a:rPr sz="1250" b="0">
-                <a:solidFill>
-                  <a:srgbClr val="1B2A38"/>
-                </a:solidFill>
-                <a:latin typeface="Calibri"/>
-              </a:rPr>
-              <a:t>• De qué norma procede</a:t>
-            </a:r>
-          </a:p>
-          <a:p>
-            <a:pPr algn="l">
-              <a:spcAft>
-                <a:spcPts val="400"/>
-              </a:spcAft>
-            </a:pPr>
-            <a:r>
-              <a:rPr sz="1250" b="0">
-                <a:solidFill>
-                  <a:srgbClr val="1B2A38"/>
-                </a:solidFill>
-                <a:latin typeface="Calibri"/>
-              </a:rPr>
-              <a:t>• Si dos gases son intercambiables</a:t>
-            </a:r>
-          </a:p>
-          <a:p>
-            <a:pPr algn="l">
-              <a:spcAft>
-                <a:spcPts val="400"/>
-              </a:spcAft>
-            </a:pPr>
-            <a:r>
-              <a:rPr sz="1250" b="0">
-                <a:solidFill>
-                  <a:srgbClr val="1B2A38"/>
-                </a:solidFill>
-                <a:latin typeface="Calibri"/>
-              </a:rPr>
-              <a:t>• Si un país es más restrictivo que España</a:t>
-            </a:r>
-          </a:p>
-          <a:p>
-            <a:pPr algn="l">
-              <a:spcAft>
-                <a:spcPts val="400"/>
-              </a:spcAft>
-            </a:pPr>
-            <a:r>
-              <a:rPr sz="1250" b="0">
-                <a:solidFill>
-                  <a:srgbClr val="1B2A38"/>
-                </a:solidFill>
-                <a:latin typeface="Calibri"/>
-              </a:rPr>
-              <a:t>• La comparación directa entre dos países</a:t>
-            </a:r>
-          </a:p>
-          <a:p>
-            <a:pPr algn="l">
-              <a:spcAft>
-                <a:spcPts val="400"/>
-              </a:spcAft>
-            </a:pPr>
-            <a:r>
-              <a:rPr sz="1250" b="0">
-                <a:solidFill>
-                  <a:srgbClr val="1B2A38"/>
-                </a:solidFill>
-                <a:latin typeface="Calibri"/>
-              </a:rPr>
-              <a:t>• La conversión de condiciones</a:t>
-            </a:r>
-          </a:p>
-        </p:txBody>
-      </p:sp>
-      <p:sp>
-        <p:nvSpPr>
-          <p:cNvPr id="13" name="Rounded Rectangle 12"/>
-          <p:cNvSpPr/>
-          <p:nvPr/>
-        </p:nvSpPr>
-        <p:spPr>
-          <a:xfrm>
-            <a:off x="6199632" y="1691640"/>
-            <a:ext cx="5440680" cy="2286000"/>
-          </a:xfrm>
-          <a:prstGeom prst="roundRect">
-            <a:avLst>
-              <a:gd name="adj" fmla="val 6000"/>
-            </a:avLst>
-          </a:prstGeom>
-          <a:solidFill>
-            <a:srgbClr val="EEF2F6"/>
-          </a:solidFill>
-          <a:ln w="12700">
-            <a:solidFill>
-              <a:srgbClr val="C8D4DD"/>
-            </a:solidFill>
-          </a:ln>
-          <a:effectLst/>
-        </p:spPr>
-        <p:style>
-          <a:lnRef idx="1">
-            <a:schemeClr val="accent1"/>
-          </a:lnRef>
-          <a:fillRef idx="3">
-            <a:schemeClr val="accent1"/>
-          </a:fillRef>
-          <a:effectRef idx="2">
-            <a:schemeClr val="accent1"/>
-          </a:effectRef>
-          <a:fontRef idx="minor">
-            <a:schemeClr val="lt1"/>
-          </a:fontRef>
-        </p:style>
-        <p:txBody>
-          <a:bodyPr rtlCol="0" anchor="ctr" wrap="square"/>
-          <a:lstStyle/>
-          <a:p>
-            <a:pPr algn="ctr"/>
-          </a:p>
-        </p:txBody>
-      </p:sp>
-      <p:sp>
-        <p:nvSpPr>
-          <p:cNvPr id="14" name="Rectangle 13"/>
-          <p:cNvSpPr/>
-          <p:nvPr/>
-        </p:nvSpPr>
-        <p:spPr>
-          <a:xfrm>
-            <a:off x="6199632" y="1691640"/>
-            <a:ext cx="5440680" cy="457200"/>
-          </a:xfrm>
-          <a:prstGeom prst="rect">
-            <a:avLst/>
-          </a:prstGeom>
-          <a:solidFill>
-            <a:srgbClr val="E88A1A"/>
-          </a:solidFill>
-          <a:ln>
-            <a:noFill/>
-          </a:ln>
-          <a:effectLst/>
-        </p:spPr>
-        <p:style>
-          <a:lnRef idx="1">
-            <a:schemeClr val="accent1"/>
-          </a:lnRef>
-          <a:fillRef idx="3">
-            <a:schemeClr val="accent1"/>
-          </a:fillRef>
-          <a:effectRef idx="2">
-            <a:schemeClr val="accent1"/>
-          </a:effectRef>
-          <a:fontRef idx="minor">
-            <a:schemeClr val="lt1"/>
-          </a:fontRef>
-        </p:style>
-        <p:txBody>
-          <a:bodyPr rtlCol="0" anchor="ctr" wrap="square"/>
-          <a:lstStyle/>
-          <a:p>
-            <a:pPr algn="ctr"/>
-          </a:p>
-        </p:txBody>
-      </p:sp>
-      <p:sp>
-        <p:nvSpPr>
-          <p:cNvPr id="15" name="TextBox 14"/>
-          <p:cNvSpPr txBox="1"/>
-          <p:nvPr/>
-        </p:nvSpPr>
-        <p:spPr>
-          <a:xfrm>
-            <a:off x="6364224" y="1737360"/>
-            <a:ext cx="5120640" cy="384048"/>
-          </a:xfrm>
-          <a:prstGeom prst="rect">
-            <a:avLst/>
-          </a:prstGeom>
-          <a:noFill/>
-        </p:spPr>
-        <p:txBody>
-          <a:bodyPr wrap="square" anchor="t" lIns="38100" rIns="38100" tIns="12700" bIns="12700">
-            <a:spAutoFit/>
-          </a:bodyPr>
-          <a:lstStyle/>
-          <a:p>
-            <a:pPr algn="l">
-              <a:spcAft>
-                <a:spcPts val="600"/>
-              </a:spcAft>
-            </a:pPr>
-            <a:r>
-              <a:rPr sz="1400" b="1">
-                <a:solidFill>
-                  <a:srgbClr val="FFFFFF"/>
-                </a:solidFill>
-                <a:latin typeface="Calibri"/>
-              </a:rPr>
-              <a:t>EL PROBLEMA DE LA COMPARABILIDAD</a:t>
-            </a:r>
-          </a:p>
-        </p:txBody>
-      </p:sp>
-      <p:sp>
-        <p:nvSpPr>
-          <p:cNvPr id="16" name="TextBox 15"/>
-          <p:cNvSpPr txBox="1"/>
-          <p:nvPr/>
-        </p:nvSpPr>
-        <p:spPr>
-          <a:xfrm>
-            <a:off x="6382512" y="2286000"/>
-            <a:ext cx="5074920" cy="1600200"/>
-          </a:xfrm>
-          <a:prstGeom prst="rect">
-            <a:avLst/>
-          </a:prstGeom>
-          <a:noFill/>
-        </p:spPr>
-        <p:txBody>
-          <a:bodyPr wrap="square" anchor="t" lIns="38100" rIns="38100" tIns="12700" bIns="12700">
-            <a:spAutoFit/>
-          </a:bodyPr>
-          <a:lstStyle/>
-          <a:p>
-            <a:pPr algn="l">
-              <a:spcAft>
-                <a:spcPts val="600"/>
-              </a:spcAft>
-            </a:pPr>
-            <a:r>
-              <a:rPr sz="1250" b="0">
-                <a:solidFill>
-                  <a:srgbClr val="1B2A38"/>
-                </a:solidFill>
-                <a:latin typeface="Calibri"/>
-              </a:rPr>
-              <a:t>• Unos países miden en kWh/m3, otros en MJ/m3 o kcal/m3.</a:t>
-            </a:r>
-          </a:p>
-          <a:p>
-            <a:pPr algn="l">
-              <a:spcAft>
-                <a:spcPts val="600"/>
-              </a:spcAft>
-            </a:pPr>
-            <a:r>
-              <a:rPr sz="1250" b="0">
-                <a:solidFill>
-                  <a:srgbClr val="1B2A38"/>
-                </a:solidFill>
-                <a:latin typeface="Calibri"/>
-              </a:rPr>
-              <a:t>• Unos refieren el volumen a 0 °C, otros a 15 o a 25 °C.</a:t>
-            </a:r>
-          </a:p>
-          <a:p>
-            <a:pPr algn="l">
-              <a:spcAft>
-                <a:spcPts val="600"/>
-              </a:spcAft>
-            </a:pPr>
-            <a:r>
-              <a:rPr sz="1250" b="0">
-                <a:solidFill>
-                  <a:srgbClr val="1B2A38"/>
-                </a:solidFill>
-                <a:latin typeface="Calibri"/>
-              </a:rPr>
-              <a:t>• Comparar esos valores EN BRUTO sería metodológicamente incorrecto.</a:t>
-            </a:r>
-          </a:p>
-          <a:p>
-            <a:pPr algn="l">
-              <a:spcAft>
-                <a:spcPts val="600"/>
-              </a:spcAft>
-            </a:pPr>
-            <a:r>
-              <a:rPr sz="1250" b="1">
-                <a:solidFill>
-                  <a:srgbClr val="013A57"/>
-                </a:solidFill>
-                <a:latin typeface="Calibri"/>
-              </a:rPr>
-              <a:t>• Solución: llevar TODO a la base española (0/0) con la norma ISO 13443.</a:t>
-            </a:r>
-          </a:p>
-        </p:txBody>
-      </p:sp>
-      <p:sp>
-        <p:nvSpPr>
-          <p:cNvPr id="17" name="Rectangle 16"/>
-          <p:cNvSpPr/>
-          <p:nvPr/>
-        </p:nvSpPr>
-        <p:spPr>
-          <a:xfrm>
-            <a:off x="548640" y="4160520"/>
-            <a:ext cx="11091672" cy="411480"/>
-          </a:xfrm>
-          <a:prstGeom prst="rect">
-            <a:avLst/>
-          </a:prstGeom>
-          <a:solidFill>
-            <a:srgbClr val="013A57"/>
-          </a:solidFill>
-          <a:ln>
-            <a:noFill/>
-          </a:ln>
-          <a:effectLst/>
-        </p:spPr>
-        <p:style>
-          <a:lnRef idx="1">
-            <a:schemeClr val="accent1"/>
-          </a:lnRef>
-          <a:fillRef idx="3">
-            <a:schemeClr val="accent1"/>
-          </a:fillRef>
-          <a:effectRef idx="2">
-            <a:schemeClr val="accent1"/>
-          </a:effectRef>
-          <a:fontRef idx="minor">
-            <a:schemeClr val="lt1"/>
-          </a:fontRef>
-        </p:style>
-        <p:txBody>
-          <a:bodyPr rtlCol="0" anchor="ctr" wrap="square"/>
-          <a:lstStyle/>
-          <a:p>
-            <a:pPr algn="ctr"/>
-          </a:p>
-        </p:txBody>
-      </p:sp>
-      <p:sp>
-        <p:nvSpPr>
-          <p:cNvPr id="18" name="TextBox 17"/>
-          <p:cNvSpPr txBox="1"/>
-          <p:nvPr/>
-        </p:nvSpPr>
-        <p:spPr>
-          <a:xfrm>
-            <a:off x="731520" y="4187952"/>
-            <a:ext cx="4572000" cy="365760"/>
-          </a:xfrm>
-          <a:prstGeom prst="rect">
-            <a:avLst/>
-          </a:prstGeom>
-          <a:noFill/>
-        </p:spPr>
-        <p:txBody>
-          <a:bodyPr wrap="square" anchor="ctr" lIns="38100" rIns="38100" tIns="12700" bIns="12700">
-            <a:spAutoFit/>
-          </a:bodyPr>
-          <a:lstStyle/>
-          <a:p>
-            <a:pPr algn="l">
-              <a:spcAft>
-                <a:spcPts val="600"/>
-              </a:spcAft>
-            </a:pPr>
-            <a:r>
-              <a:rPr sz="1300" b="1">
-                <a:solidFill>
-                  <a:srgbClr val="FFFFFF"/>
-                </a:solidFill>
-                <a:latin typeface="Calibri"/>
-              </a:rPr>
-              <a:t>Factores literales de la Tabla A.1 · ISO 13443</a:t>
-            </a:r>
-          </a:p>
-        </p:txBody>
-      </p:sp>
-      <p:sp>
-        <p:nvSpPr>
-          <p:cNvPr id="19" name="TextBox 18"/>
-          <p:cNvSpPr txBox="1"/>
-          <p:nvPr/>
-        </p:nvSpPr>
-        <p:spPr>
-          <a:xfrm>
-            <a:off x="7772400" y="4187952"/>
-            <a:ext cx="1828800" cy="365760"/>
-          </a:xfrm>
-          <a:prstGeom prst="rect">
-            <a:avLst/>
-          </a:prstGeom>
-          <a:noFill/>
-        </p:spPr>
-        <p:txBody>
-          <a:bodyPr wrap="square" anchor="ctr" lIns="38100" rIns="38100" tIns="12700" bIns="12700">
-            <a:spAutoFit/>
-          </a:bodyPr>
-          <a:lstStyle/>
-          <a:p>
-            <a:pPr algn="ctr">
-              <a:spcAft>
-                <a:spcPts val="600"/>
-              </a:spcAft>
-            </a:pPr>
-            <a:r>
-              <a:rPr sz="1300" b="1">
-                <a:solidFill>
-                  <a:srgbClr val="0099D6"/>
-                </a:solidFill>
-                <a:latin typeface="Calibri"/>
-              </a:rPr>
-              <a:t>PCS</a:t>
-            </a:r>
-          </a:p>
-        </p:txBody>
-      </p:sp>
-      <p:sp>
-        <p:nvSpPr>
-          <p:cNvPr id="20" name="TextBox 19"/>
-          <p:cNvSpPr txBox="1"/>
-          <p:nvPr/>
-        </p:nvSpPr>
-        <p:spPr>
-          <a:xfrm>
-            <a:off x="9692640" y="4187952"/>
-            <a:ext cx="1828800" cy="365760"/>
-          </a:xfrm>
-          <a:prstGeom prst="rect">
-            <a:avLst/>
-          </a:prstGeom>
-          <a:noFill/>
-        </p:spPr>
-        <p:txBody>
-          <a:bodyPr wrap="square" anchor="ctr" lIns="38100" rIns="38100" tIns="12700" bIns="12700">
-            <a:spAutoFit/>
-          </a:bodyPr>
-          <a:lstStyle/>
-          <a:p>
-            <a:pPr algn="ctr">
-              <a:spcAft>
-                <a:spcPts val="600"/>
-              </a:spcAft>
-            </a:pPr>
-            <a:r>
-              <a:rPr sz="1300" b="1">
-                <a:solidFill>
-                  <a:srgbClr val="0099D6"/>
-                </a:solidFill>
-                <a:latin typeface="Calibri"/>
-              </a:rPr>
-              <a:t>Wobbe</a:t>
-            </a:r>
-          </a:p>
-        </p:txBody>
-      </p:sp>
-      <p:sp>
-        <p:nvSpPr>
-          <p:cNvPr id="21" name="Rectangle 20"/>
-          <p:cNvSpPr/>
-          <p:nvPr/>
-        </p:nvSpPr>
-        <p:spPr>
-          <a:xfrm>
-            <a:off x="548640" y="4572000"/>
-            <a:ext cx="11091672" cy="384048"/>
-          </a:xfrm>
-          <a:prstGeom prst="rect">
-            <a:avLst/>
-          </a:prstGeom>
-          <a:solidFill>
-            <a:srgbClr val="EEF2F6"/>
-          </a:solidFill>
-          <a:ln>
-            <a:noFill/>
-          </a:ln>
-          <a:effectLst/>
-        </p:spPr>
-        <p:style>
-          <a:lnRef idx="1">
-            <a:schemeClr val="accent1"/>
-          </a:lnRef>
-          <a:fillRef idx="3">
-            <a:schemeClr val="accent1"/>
-          </a:fillRef>
-          <a:effectRef idx="2">
-            <a:schemeClr val="accent1"/>
-          </a:effectRef>
-          <a:fontRef idx="minor">
-            <a:schemeClr val="lt1"/>
-          </a:fontRef>
-        </p:style>
-        <p:txBody>
-          <a:bodyPr rtlCol="0" anchor="ctr" wrap="square"/>
-          <a:lstStyle/>
-          <a:p>
-            <a:pPr algn="ctr"/>
-          </a:p>
-        </p:txBody>
-      </p:sp>
-      <p:sp>
-        <p:nvSpPr>
-          <p:cNvPr id="22" name="TextBox 21"/>
-          <p:cNvSpPr txBox="1"/>
-          <p:nvPr/>
-        </p:nvSpPr>
-        <p:spPr>
-          <a:xfrm>
-            <a:off x="731520" y="4581144"/>
-            <a:ext cx="1645920" cy="365760"/>
-          </a:xfrm>
-          <a:prstGeom prst="rect">
-            <a:avLst/>
-          </a:prstGeom>
-          <a:noFill/>
-        </p:spPr>
-        <p:txBody>
-          <a:bodyPr wrap="square" anchor="ctr" lIns="38100" rIns="38100" tIns="12700" bIns="12700">
-            <a:spAutoFit/>
-          </a:bodyPr>
-          <a:lstStyle/>
-          <a:p>
-            <a:pPr algn="l">
-              <a:spcAft>
-                <a:spcPts val="600"/>
-              </a:spcAft>
-            </a:pPr>
-            <a:r>
-              <a:rPr sz="1200" b="1">
-                <a:solidFill>
-                  <a:srgbClr val="013A57"/>
-                </a:solidFill>
-                <a:latin typeface="Calibri"/>
-              </a:rPr>
-              <a:t>25/0 → 0/0</a:t>
-            </a:r>
-          </a:p>
-        </p:txBody>
-      </p:sp>
-      <p:sp>
-        <p:nvSpPr>
-          <p:cNvPr id="23" name="TextBox 22"/>
-          <p:cNvSpPr txBox="1"/>
-          <p:nvPr/>
-        </p:nvSpPr>
-        <p:spPr>
-          <a:xfrm>
-            <a:off x="2377440" y="4581144"/>
-            <a:ext cx="5303520" cy="365760"/>
-          </a:xfrm>
-          <a:prstGeom prst="rect">
-            <a:avLst/>
-          </a:prstGeom>
-          <a:noFill/>
-        </p:spPr>
-        <p:txBody>
-          <a:bodyPr wrap="square" anchor="ctr" lIns="38100" rIns="38100" tIns="12700" bIns="12700">
-            <a:spAutoFit/>
-          </a:bodyPr>
-          <a:lstStyle/>
-          <a:p>
-            <a:pPr algn="l">
-              <a:spcAft>
-                <a:spcPts val="600"/>
-              </a:spcAft>
-            </a:pPr>
-            <a:r>
-              <a:rPr sz="1100" b="0">
-                <a:solidFill>
-                  <a:srgbClr val="4A5B68"/>
-                </a:solidFill>
-                <a:latin typeface="Calibri"/>
-              </a:rPr>
-              <a:t>Portugal, Alemania, P. Bajos, Bélgica, Noruega, Polonia, Dinamarca, Hungría, Austria, Suiza, Grecia</a:t>
-            </a:r>
-          </a:p>
-        </p:txBody>
-      </p:sp>
-      <p:sp>
-        <p:nvSpPr>
-          <p:cNvPr id="24" name="TextBox 23"/>
-          <p:cNvSpPr txBox="1"/>
-          <p:nvPr/>
-        </p:nvSpPr>
-        <p:spPr>
-          <a:xfrm>
-            <a:off x="7772400" y="4581144"/>
-            <a:ext cx="1828800" cy="365760"/>
-          </a:xfrm>
-          <a:prstGeom prst="rect">
-            <a:avLst/>
-          </a:prstGeom>
-          <a:noFill/>
-        </p:spPr>
-        <p:txBody>
-          <a:bodyPr wrap="square" anchor="ctr" lIns="38100" rIns="38100" tIns="12700" bIns="12700">
-            <a:spAutoFit/>
-          </a:bodyPr>
-          <a:lstStyle/>
-          <a:p>
-            <a:pPr algn="ctr">
-              <a:spcAft>
-                <a:spcPts val="600"/>
-              </a:spcAft>
-            </a:pPr>
-            <a:r>
-              <a:rPr sz="1200" b="1">
-                <a:solidFill>
-                  <a:srgbClr val="1B2A38"/>
-                </a:solidFill>
-                <a:latin typeface="Calibri"/>
-              </a:rPr>
-              <a:t>1,0026</a:t>
-            </a:r>
-          </a:p>
-        </p:txBody>
-      </p:sp>
-      <p:sp>
-        <p:nvSpPr>
-          <p:cNvPr id="25" name="TextBox 24"/>
-          <p:cNvSpPr txBox="1"/>
-          <p:nvPr/>
-        </p:nvSpPr>
-        <p:spPr>
-          <a:xfrm>
-            <a:off x="9692640" y="4581144"/>
-            <a:ext cx="1828800" cy="365760"/>
-          </a:xfrm>
-          <a:prstGeom prst="rect">
-            <a:avLst/>
-          </a:prstGeom>
-          <a:noFill/>
-        </p:spPr>
-        <p:txBody>
-          <a:bodyPr wrap="square" anchor="ctr" lIns="38100" rIns="38100" tIns="12700" bIns="12700">
-            <a:spAutoFit/>
-          </a:bodyPr>
-          <a:lstStyle/>
-          <a:p>
-            <a:pPr algn="ctr">
-              <a:spcAft>
-                <a:spcPts val="600"/>
-              </a:spcAft>
-            </a:pPr>
-            <a:r>
-              <a:rPr sz="1200" b="1">
-                <a:solidFill>
-                  <a:srgbClr val="1B2A38"/>
-                </a:solidFill>
-                <a:latin typeface="Calibri"/>
-              </a:rPr>
-              <a:t>1,0026</a:t>
-            </a:r>
-          </a:p>
-        </p:txBody>
-      </p:sp>
-      <p:sp>
-        <p:nvSpPr>
-          <p:cNvPr id="26" name="Rectangle 25"/>
-          <p:cNvSpPr/>
-          <p:nvPr/>
-        </p:nvSpPr>
-        <p:spPr>
-          <a:xfrm>
-            <a:off x="548640" y="4974336"/>
-            <a:ext cx="11091672" cy="384048"/>
-          </a:xfrm>
-          <a:prstGeom prst="rect">
-            <a:avLst/>
-          </a:prstGeom>
-          <a:solidFill>
-            <a:srgbClr val="FFFFFF"/>
-          </a:solidFill>
-          <a:ln>
-            <a:noFill/>
-          </a:ln>
-          <a:effectLst/>
-        </p:spPr>
-        <p:style>
-          <a:lnRef idx="1">
-            <a:schemeClr val="accent1"/>
-          </a:lnRef>
-          <a:fillRef idx="3">
-            <a:schemeClr val="accent1"/>
-          </a:fillRef>
-          <a:effectRef idx="2">
-            <a:schemeClr val="accent1"/>
-          </a:effectRef>
-          <a:fontRef idx="minor">
-            <a:schemeClr val="lt1"/>
-          </a:fontRef>
-        </p:style>
-        <p:txBody>
-          <a:bodyPr rtlCol="0" anchor="ctr" wrap="square"/>
-          <a:lstStyle/>
-          <a:p>
-            <a:pPr algn="ctr"/>
-          </a:p>
-        </p:txBody>
-      </p:sp>
-      <p:sp>
-        <p:nvSpPr>
-          <p:cNvPr id="27" name="TextBox 26"/>
-          <p:cNvSpPr txBox="1"/>
-          <p:nvPr/>
-        </p:nvSpPr>
-        <p:spPr>
-          <a:xfrm>
-            <a:off x="731520" y="4983480"/>
-            <a:ext cx="1645920" cy="365760"/>
-          </a:xfrm>
-          <a:prstGeom prst="rect">
-            <a:avLst/>
-          </a:prstGeom>
-          <a:noFill/>
-        </p:spPr>
-        <p:txBody>
-          <a:bodyPr wrap="square" anchor="ctr" lIns="38100" rIns="38100" tIns="12700" bIns="12700">
-            <a:spAutoFit/>
-          </a:bodyPr>
-          <a:lstStyle/>
-          <a:p>
-            <a:pPr algn="l">
-              <a:spcAft>
-                <a:spcPts val="600"/>
-              </a:spcAft>
-            </a:pPr>
-            <a:r>
-              <a:rPr sz="1200" b="1">
-                <a:solidFill>
-                  <a:srgbClr val="013A57"/>
-                </a:solidFill>
-                <a:latin typeface="Calibri"/>
-              </a:rPr>
-              <a:t>15/15 → 0/0</a:t>
-            </a:r>
-          </a:p>
-        </p:txBody>
-      </p:sp>
-      <p:sp>
-        <p:nvSpPr>
-          <p:cNvPr id="28" name="TextBox 27"/>
-          <p:cNvSpPr txBox="1"/>
-          <p:nvPr/>
-        </p:nvSpPr>
-        <p:spPr>
-          <a:xfrm>
-            <a:off x="2377440" y="4983480"/>
-            <a:ext cx="5303520" cy="365760"/>
-          </a:xfrm>
-          <a:prstGeom prst="rect">
-            <a:avLst/>
-          </a:prstGeom>
-          <a:noFill/>
-        </p:spPr>
-        <p:txBody>
-          <a:bodyPr wrap="square" anchor="ctr" lIns="38100" rIns="38100" tIns="12700" bIns="12700">
-            <a:spAutoFit/>
-          </a:bodyPr>
-          <a:lstStyle/>
-          <a:p>
-            <a:pPr algn="l">
-              <a:spcAft>
-                <a:spcPts val="600"/>
-              </a:spcAft>
-            </a:pPr>
-            <a:r>
-              <a:rPr sz="1100" b="0">
-                <a:solidFill>
-                  <a:srgbClr val="4A5B68"/>
-                </a:solidFill>
-                <a:latin typeface="Calibri"/>
-              </a:rPr>
-              <a:t>Italia, UE, Chequia, Irlanda, Rumanía, Turquía, Reino Unido</a:t>
-            </a:r>
-          </a:p>
-        </p:txBody>
-      </p:sp>
-      <p:sp>
-        <p:nvSpPr>
-          <p:cNvPr id="29" name="TextBox 28"/>
-          <p:cNvSpPr txBox="1"/>
-          <p:nvPr/>
-        </p:nvSpPr>
-        <p:spPr>
-          <a:xfrm>
-            <a:off x="7772400" y="4983480"/>
-            <a:ext cx="1828800" cy="365760"/>
-          </a:xfrm>
-          <a:prstGeom prst="rect">
-            <a:avLst/>
-          </a:prstGeom>
-          <a:noFill/>
-        </p:spPr>
-        <p:txBody>
-          <a:bodyPr wrap="square" anchor="ctr" lIns="38100" rIns="38100" tIns="12700" bIns="12700">
-            <a:spAutoFit/>
-          </a:bodyPr>
-          <a:lstStyle/>
-          <a:p>
-            <a:pPr algn="ctr">
-              <a:spcAft>
-                <a:spcPts val="600"/>
-              </a:spcAft>
-            </a:pPr>
-            <a:r>
-              <a:rPr sz="1200" b="1">
-                <a:solidFill>
-                  <a:srgbClr val="1B2A38"/>
-                </a:solidFill>
-                <a:latin typeface="Calibri"/>
-              </a:rPr>
-              <a:t>1,0570</a:t>
-            </a:r>
-          </a:p>
-        </p:txBody>
-      </p:sp>
-      <p:sp>
-        <p:nvSpPr>
-          <p:cNvPr id="30" name="TextBox 29"/>
-          <p:cNvSpPr txBox="1"/>
-          <p:nvPr/>
-        </p:nvSpPr>
-        <p:spPr>
-          <a:xfrm>
-            <a:off x="9692640" y="4983480"/>
-            <a:ext cx="1828800" cy="365760"/>
-          </a:xfrm>
-          <a:prstGeom prst="rect">
-            <a:avLst/>
-          </a:prstGeom>
-          <a:noFill/>
-        </p:spPr>
-        <p:txBody>
-          <a:bodyPr wrap="square" anchor="ctr" lIns="38100" rIns="38100" tIns="12700" bIns="12700">
-            <a:spAutoFit/>
-          </a:bodyPr>
-          <a:lstStyle/>
-          <a:p>
-            <a:pPr algn="ctr">
-              <a:spcAft>
-                <a:spcPts val="600"/>
-              </a:spcAft>
-            </a:pPr>
-            <a:r>
-              <a:rPr sz="1200" b="1">
-                <a:solidFill>
-                  <a:srgbClr val="1B2A38"/>
-                </a:solidFill>
-                <a:latin typeface="Calibri"/>
-              </a:rPr>
-              <a:t>1,0569</a:t>
-            </a:r>
-          </a:p>
-        </p:txBody>
-      </p:sp>
-      <p:sp>
-        <p:nvSpPr>
-          <p:cNvPr id="31" name="Rectangle 30"/>
-          <p:cNvSpPr/>
-          <p:nvPr/>
-        </p:nvSpPr>
-        <p:spPr>
-          <a:xfrm>
-            <a:off x="548640" y="5376672"/>
-            <a:ext cx="11091672" cy="384048"/>
-          </a:xfrm>
-          <a:prstGeom prst="rect">
-            <a:avLst/>
-          </a:prstGeom>
-          <a:solidFill>
-            <a:srgbClr val="EEF2F6"/>
-          </a:solidFill>
-          <a:ln>
-            <a:noFill/>
-          </a:ln>
-          <a:effectLst/>
-        </p:spPr>
-        <p:style>
-          <a:lnRef idx="1">
-            <a:schemeClr val="accent1"/>
-          </a:lnRef>
-          <a:fillRef idx="3">
-            <a:schemeClr val="accent1"/>
-          </a:fillRef>
-          <a:effectRef idx="2">
-            <a:schemeClr val="accent1"/>
-          </a:effectRef>
-          <a:fontRef idx="minor">
-            <a:schemeClr val="lt1"/>
-          </a:fontRef>
-        </p:style>
-        <p:txBody>
-          <a:bodyPr rtlCol="0" anchor="ctr" wrap="square"/>
-          <a:lstStyle/>
-          <a:p>
-            <a:pPr algn="ctr"/>
-          </a:p>
-        </p:txBody>
-      </p:sp>
-      <p:sp>
-        <p:nvSpPr>
-          <p:cNvPr id="32" name="TextBox 31"/>
-          <p:cNvSpPr txBox="1"/>
-          <p:nvPr/>
-        </p:nvSpPr>
-        <p:spPr>
-          <a:xfrm>
-            <a:off x="731520" y="5385816"/>
-            <a:ext cx="1645920" cy="365760"/>
-          </a:xfrm>
-          <a:prstGeom prst="rect">
-            <a:avLst/>
-          </a:prstGeom>
-          <a:noFill/>
-        </p:spPr>
-        <p:txBody>
-          <a:bodyPr wrap="square" anchor="ctr" lIns="38100" rIns="38100" tIns="12700" bIns="12700">
-            <a:spAutoFit/>
-          </a:bodyPr>
-          <a:lstStyle/>
-          <a:p>
-            <a:pPr algn="l">
-              <a:spcAft>
-                <a:spcPts val="600"/>
-              </a:spcAft>
-            </a:pPr>
-            <a:r>
-              <a:rPr sz="1200" b="1">
-                <a:solidFill>
-                  <a:srgbClr val="013A57"/>
-                </a:solidFill>
-                <a:latin typeface="Calibri"/>
-              </a:rPr>
-              <a:t>25/20 → 0/0</a:t>
-            </a:r>
-          </a:p>
-        </p:txBody>
-      </p:sp>
-      <p:sp>
-        <p:nvSpPr>
-          <p:cNvPr id="33" name="TextBox 32"/>
-          <p:cNvSpPr txBox="1"/>
-          <p:nvPr/>
-        </p:nvSpPr>
-        <p:spPr>
-          <a:xfrm>
-            <a:off x="2377440" y="5385816"/>
-            <a:ext cx="5303520" cy="365760"/>
-          </a:xfrm>
-          <a:prstGeom prst="rect">
-            <a:avLst/>
-          </a:prstGeom>
-          <a:noFill/>
-        </p:spPr>
-        <p:txBody>
-          <a:bodyPr wrap="square" anchor="ctr" lIns="38100" rIns="38100" tIns="12700" bIns="12700">
-            <a:spAutoFit/>
-          </a:bodyPr>
-          <a:lstStyle/>
-          <a:p>
-            <a:pPr algn="l">
-              <a:spcAft>
-                <a:spcPts val="600"/>
-              </a:spcAft>
-            </a:pPr>
-            <a:r>
-              <a:rPr sz="1100" b="0">
-                <a:solidFill>
-                  <a:srgbClr val="4A5B68"/>
-                </a:solidFill>
-                <a:latin typeface="Calibri"/>
-              </a:rPr>
-              <a:t>Eslovaquia — par no tabulado: se calcula con las ecuaciones del Anexo B de la norma</a:t>
-            </a:r>
-          </a:p>
-        </p:txBody>
-      </p:sp>
-      <p:sp>
-        <p:nvSpPr>
-          <p:cNvPr id="34" name="TextBox 33"/>
-          <p:cNvSpPr txBox="1"/>
-          <p:nvPr/>
-        </p:nvSpPr>
-        <p:spPr>
-          <a:xfrm>
-            <a:off x="7772400" y="5385816"/>
-            <a:ext cx="1828800" cy="365760"/>
-          </a:xfrm>
-          <a:prstGeom prst="rect">
-            <a:avLst/>
-          </a:prstGeom>
-          <a:noFill/>
-        </p:spPr>
-        <p:txBody>
-          <a:bodyPr wrap="square" anchor="ctr" lIns="38100" rIns="38100" tIns="12700" bIns="12700">
-            <a:spAutoFit/>
-          </a:bodyPr>
-          <a:lstStyle/>
-          <a:p>
-            <a:pPr algn="ctr">
-              <a:spcAft>
-                <a:spcPts val="600"/>
-              </a:spcAft>
-            </a:pPr>
-            <a:r>
-              <a:rPr sz="1200" b="1">
-                <a:solidFill>
-                  <a:srgbClr val="1B2A38"/>
-                </a:solidFill>
-                <a:latin typeface="Calibri"/>
-              </a:rPr>
-              <a:t>≈1,076</a:t>
-            </a:r>
-          </a:p>
-        </p:txBody>
-      </p:sp>
-      <p:sp>
-        <p:nvSpPr>
-          <p:cNvPr id="35" name="TextBox 34"/>
-          <p:cNvSpPr txBox="1"/>
-          <p:nvPr/>
-        </p:nvSpPr>
-        <p:spPr>
-          <a:xfrm>
-            <a:off x="9692640" y="5385816"/>
-            <a:ext cx="1828800" cy="365760"/>
-          </a:xfrm>
-          <a:prstGeom prst="rect">
-            <a:avLst/>
-          </a:prstGeom>
-          <a:noFill/>
-        </p:spPr>
-        <p:txBody>
-          <a:bodyPr wrap="square" anchor="ctr" lIns="38100" rIns="38100" tIns="12700" bIns="12700">
-            <a:spAutoFit/>
-          </a:bodyPr>
-          <a:lstStyle/>
-          <a:p>
-            <a:pPr algn="ctr">
-              <a:spcAft>
-                <a:spcPts val="600"/>
-              </a:spcAft>
-            </a:pPr>
-            <a:r>
-              <a:rPr sz="1200" b="1">
-                <a:solidFill>
-                  <a:srgbClr val="1B2A38"/>
-                </a:solidFill>
-                <a:latin typeface="Calibri"/>
-              </a:rPr>
-              <a:t>≈1,076</a:t>
-            </a:r>
-          </a:p>
-        </p:txBody>
-      </p:sp>
-      <p:sp>
-        <p:nvSpPr>
-          <p:cNvPr id="36" name="Rectangle 35"/>
-          <p:cNvSpPr/>
-          <p:nvPr/>
-        </p:nvSpPr>
-        <p:spPr>
-          <a:xfrm>
-            <a:off x="548640" y="5779008"/>
-            <a:ext cx="11091672" cy="384048"/>
-          </a:xfrm>
-          <a:prstGeom prst="rect">
-            <a:avLst/>
-          </a:prstGeom>
-          <a:solidFill>
-            <a:srgbClr val="FFFFFF"/>
-          </a:solidFill>
-          <a:ln>
-            <a:noFill/>
-          </a:ln>
-          <a:effectLst/>
-        </p:spPr>
-        <p:style>
-          <a:lnRef idx="1">
-            <a:schemeClr val="accent1"/>
-          </a:lnRef>
-          <a:fillRef idx="3">
-            <a:schemeClr val="accent1"/>
-          </a:fillRef>
-          <a:effectRef idx="2">
-            <a:schemeClr val="accent1"/>
-          </a:effectRef>
-          <a:fontRef idx="minor">
-            <a:schemeClr val="lt1"/>
-          </a:fontRef>
-        </p:style>
-        <p:txBody>
-          <a:bodyPr rtlCol="0" anchor="ctr" wrap="square"/>
-          <a:lstStyle/>
-          <a:p>
-            <a:pPr algn="ctr"/>
-          </a:p>
-        </p:txBody>
-      </p:sp>
-      <p:sp>
-        <p:nvSpPr>
-          <p:cNvPr id="37" name="TextBox 36"/>
-          <p:cNvSpPr txBox="1"/>
-          <p:nvPr/>
-        </p:nvSpPr>
-        <p:spPr>
-          <a:xfrm>
-            <a:off x="731520" y="5788152"/>
-            <a:ext cx="1645920" cy="365760"/>
-          </a:xfrm>
-          <a:prstGeom prst="rect">
-            <a:avLst/>
-          </a:prstGeom>
-          <a:noFill/>
-        </p:spPr>
-        <p:txBody>
-          <a:bodyPr wrap="square" anchor="ctr" lIns="38100" rIns="38100" tIns="12700" bIns="12700">
-            <a:spAutoFit/>
-          </a:bodyPr>
-          <a:lstStyle/>
-          <a:p>
-            <a:pPr algn="l">
-              <a:spcAft>
-                <a:spcPts val="600"/>
-              </a:spcAft>
-            </a:pPr>
-            <a:r>
-              <a:rPr sz="1200" b="1">
-                <a:solidFill>
-                  <a:srgbClr val="013A57"/>
-                </a:solidFill>
-                <a:latin typeface="Calibri"/>
-              </a:rPr>
-              <a:t>0/0 → 0/0</a:t>
-            </a:r>
-          </a:p>
-        </p:txBody>
-      </p:sp>
-      <p:sp>
-        <p:nvSpPr>
-          <p:cNvPr id="38" name="TextBox 37"/>
-          <p:cNvSpPr txBox="1"/>
-          <p:nvPr/>
-        </p:nvSpPr>
-        <p:spPr>
-          <a:xfrm>
-            <a:off x="2377440" y="5788152"/>
-            <a:ext cx="5303520" cy="365760"/>
-          </a:xfrm>
-          <a:prstGeom prst="rect">
-            <a:avLst/>
-          </a:prstGeom>
-          <a:noFill/>
-        </p:spPr>
-        <p:txBody>
-          <a:bodyPr wrap="square" anchor="ctr" lIns="38100" rIns="38100" tIns="12700" bIns="12700">
-            <a:spAutoFit/>
-          </a:bodyPr>
-          <a:lstStyle/>
-          <a:p>
-            <a:pPr algn="l">
-              <a:spcAft>
-                <a:spcPts val="600"/>
-              </a:spcAft>
-            </a:pPr>
-            <a:r>
-              <a:rPr sz="1100" b="0">
-                <a:solidFill>
-                  <a:srgbClr val="4A5B68"/>
-                </a:solidFill>
-                <a:latin typeface="Calibri"/>
-              </a:rPr>
-              <a:t>España (base) y Francia — identidad, no hay conversión</a:t>
-            </a:r>
-          </a:p>
-        </p:txBody>
-      </p:sp>
-      <p:sp>
-        <p:nvSpPr>
-          <p:cNvPr id="39" name="TextBox 38"/>
-          <p:cNvSpPr txBox="1"/>
-          <p:nvPr/>
-        </p:nvSpPr>
-        <p:spPr>
-          <a:xfrm>
-            <a:off x="7772400" y="5788152"/>
-            <a:ext cx="1828800" cy="365760"/>
-          </a:xfrm>
-          <a:prstGeom prst="rect">
-            <a:avLst/>
-          </a:prstGeom>
-          <a:noFill/>
-        </p:spPr>
-        <p:txBody>
-          <a:bodyPr wrap="square" anchor="ctr" lIns="38100" rIns="38100" tIns="12700" bIns="12700">
-            <a:spAutoFit/>
-          </a:bodyPr>
-          <a:lstStyle/>
-          <a:p>
-            <a:pPr algn="ctr">
-              <a:spcAft>
-                <a:spcPts val="600"/>
-              </a:spcAft>
-            </a:pPr>
-            <a:r>
-              <a:rPr sz="1200" b="1">
-                <a:solidFill>
-                  <a:srgbClr val="1B2A38"/>
-                </a:solidFill>
-                <a:latin typeface="Calibri"/>
-              </a:rPr>
-              <a:t>×1</a:t>
-            </a:r>
-          </a:p>
-        </p:txBody>
-      </p:sp>
-      <p:sp>
-        <p:nvSpPr>
-          <p:cNvPr id="40" name="TextBox 39"/>
-          <p:cNvSpPr txBox="1"/>
-          <p:nvPr/>
-        </p:nvSpPr>
-        <p:spPr>
-          <a:xfrm>
-            <a:off x="9692640" y="5788152"/>
-            <a:ext cx="1828800" cy="365760"/>
-          </a:xfrm>
-          <a:prstGeom prst="rect">
-            <a:avLst/>
-          </a:prstGeom>
-          <a:noFill/>
-        </p:spPr>
-        <p:txBody>
-          <a:bodyPr wrap="square" anchor="ctr" lIns="38100" rIns="38100" tIns="12700" bIns="12700">
-            <a:spAutoFit/>
-          </a:bodyPr>
-          <a:lstStyle/>
-          <a:p>
-            <a:pPr algn="ctr">
-              <a:spcAft>
-                <a:spcPts val="600"/>
-              </a:spcAft>
-            </a:pPr>
-            <a:r>
-              <a:rPr sz="1200" b="1">
-                <a:solidFill>
-                  <a:srgbClr val="1B2A38"/>
-                </a:solidFill>
-                <a:latin typeface="Calibri"/>
-              </a:rPr>
-              <a:t>×1</a:t>
-            </a:r>
-          </a:p>
-        </p:txBody>
-      </p:sp>
-      <p:sp>
-        <p:nvSpPr>
-          <p:cNvPr id="41" name="TextBox 40"/>
-          <p:cNvSpPr txBox="1"/>
-          <p:nvPr/>
-        </p:nvSpPr>
-        <p:spPr>
-          <a:xfrm>
-            <a:off x="548640" y="6199632"/>
-            <a:ext cx="11091672" cy="274320"/>
-          </a:xfrm>
-          <a:prstGeom prst="rect">
-            <a:avLst/>
-          </a:prstGeom>
-          <a:noFill/>
-        </p:spPr>
-        <p:txBody>
-          <a:bodyPr wrap="square" anchor="t" lIns="38100" rIns="38100" tIns="12700" bIns="12700">
-            <a:spAutoFit/>
-          </a:bodyPr>
-          <a:lstStyle/>
-          <a:p>
-            <a:pPr algn="l">
-              <a:spcAft>
-                <a:spcPts val="600"/>
-              </a:spcAft>
-            </a:pPr>
-            <a:r>
-              <a:rPr sz="1200" b="1">
-                <a:solidFill>
-                  <a:srgbClr val="013A57"/>
-                </a:solidFill>
-                <a:latin typeface="Calibri"/>
-              </a:rPr>
-              <a:t>Estos factores NO se estiman: se toman literalmente de la norma. España es siempre la base de referencia.</a:t>
-            </a:r>
-          </a:p>
-        </p:txBody>
-      </p:sp>
-    </p:spTree>
-  </p:cSld>
-  <p:clrMapOvr>
-    <a:masterClrMapping/>
-  </p:clrMapOvr>
-</p:sld>
-</file>
-
-<file path=ppt/slides/slide8.xml><?xml version="1.0" encoding="utf-8"?>
-<p:sld xmlns:a="http://schemas.openxmlformats.org/drawingml/2006/main" xmlns:p="http://schemas.openxmlformats.org/presentationml/2006/main" xmlns:r="http://schemas.openxmlformats.org/officeDocument/2006/relationships">
-  <p:cSld>
-    <p:spTree>
-      <p:nvGrpSpPr>
-        <p:cNvPr id="1" name=""/>
-        <p:cNvGrpSpPr/>
-        <p:nvPr/>
-      </p:nvGrpSpPr>
-      <p:grpSpPr/>
-      <p:sp>
-        <p:nvSpPr>
-          <p:cNvPr id="2" name="Rectangle 1"/>
-          <p:cNvSpPr/>
-          <p:nvPr/>
-        </p:nvSpPr>
-        <p:spPr>
-          <a:xfrm>
-            <a:off x="0" y="0"/>
-            <a:ext cx="12191695" cy="932688"/>
-          </a:xfrm>
-          <a:prstGeom prst="rect">
-            <a:avLst/>
-          </a:prstGeom>
-          <a:solidFill>
-            <a:srgbClr val="013A57"/>
-          </a:solidFill>
-          <a:ln>
-            <a:noFill/>
-          </a:ln>
-          <a:effectLst/>
-        </p:spPr>
-        <p:style>
-          <a:lnRef idx="1">
-            <a:schemeClr val="accent1"/>
-          </a:lnRef>
-          <a:fillRef idx="3">
-            <a:schemeClr val="accent1"/>
-          </a:fillRef>
-          <a:effectRef idx="2">
-            <a:schemeClr val="accent1"/>
-          </a:effectRef>
-          <a:fontRef idx="minor">
-            <a:schemeClr val="lt1"/>
-          </a:fontRef>
-        </p:style>
-        <p:txBody>
-          <a:bodyPr rtlCol="0" anchor="ctr" wrap="square"/>
-          <a:lstStyle/>
-          <a:p>
-            <a:pPr algn="ctr"/>
-          </a:p>
-        </p:txBody>
-      </p:sp>
-      <p:sp>
-        <p:nvSpPr>
-          <p:cNvPr id="3" name="Rectangle 2"/>
-          <p:cNvSpPr/>
-          <p:nvPr/>
-        </p:nvSpPr>
-        <p:spPr>
-          <a:xfrm>
-            <a:off x="0" y="932688"/>
-            <a:ext cx="12191695" cy="50292"/>
-          </a:xfrm>
-          <a:prstGeom prst="rect">
-            <a:avLst/>
-          </a:prstGeom>
-          <a:solidFill>
-            <a:srgbClr val="0099D6"/>
-          </a:solidFill>
-          <a:ln>
-            <a:noFill/>
-          </a:ln>
-          <a:effectLst/>
-        </p:spPr>
-        <p:style>
-          <a:lnRef idx="1">
-            <a:schemeClr val="accent1"/>
-          </a:lnRef>
-          <a:fillRef idx="3">
-            <a:schemeClr val="accent1"/>
-          </a:fillRef>
-          <a:effectRef idx="2">
-            <a:schemeClr val="accent1"/>
-          </a:effectRef>
-          <a:fontRef idx="minor">
-            <a:schemeClr val="lt1"/>
-          </a:fontRef>
-        </p:style>
-        <p:txBody>
-          <a:bodyPr rtlCol="0" anchor="ctr" wrap="square"/>
-          <a:lstStyle/>
-          <a:p>
-            <a:pPr algn="ctr"/>
-          </a:p>
-        </p:txBody>
-      </p:sp>
-      <p:sp>
-        <p:nvSpPr>
-          <p:cNvPr id="4" name="TextBox 3"/>
-          <p:cNvSpPr txBox="1"/>
-          <p:nvPr/>
-        </p:nvSpPr>
-        <p:spPr>
-          <a:xfrm>
-            <a:off x="502920" y="118872"/>
-            <a:ext cx="10515600" cy="237744"/>
-          </a:xfrm>
-          <a:prstGeom prst="rect">
-            <a:avLst/>
-          </a:prstGeom>
-          <a:noFill/>
-        </p:spPr>
-        <p:txBody>
-          <a:bodyPr wrap="square" anchor="t" lIns="38100" rIns="38100" tIns="12700" bIns="12700">
-            <a:spAutoFit/>
-          </a:bodyPr>
-          <a:lstStyle/>
-          <a:p>
-            <a:pPr algn="l">
-              <a:spcAft>
-                <a:spcPts val="600"/>
-              </a:spcAft>
-            </a:pPr>
-            <a:r>
-              <a:rPr sz="1100" b="1">
-                <a:solidFill>
-                  <a:srgbClr val="0099D6"/>
-                </a:solidFill>
-                <a:latin typeface="Calibri"/>
-              </a:rPr>
-              <a:t>CÓMO FUNCIONA</a:t>
-            </a:r>
-          </a:p>
-        </p:txBody>
-      </p:sp>
-      <p:sp>
-        <p:nvSpPr>
-          <p:cNvPr id="5" name="TextBox 4"/>
-          <p:cNvSpPr txBox="1"/>
-          <p:nvPr/>
-        </p:nvSpPr>
-        <p:spPr>
-          <a:xfrm>
-            <a:off x="502920" y="347472"/>
-            <a:ext cx="10607040" cy="530352"/>
-          </a:xfrm>
-          <a:prstGeom prst="rect">
-            <a:avLst/>
-          </a:prstGeom>
-          <a:noFill/>
-        </p:spPr>
-        <p:txBody>
-          <a:bodyPr wrap="square" anchor="t" lIns="38100" rIns="38100" tIns="12700" bIns="12700">
-            <a:spAutoFit/>
-          </a:bodyPr>
-          <a:lstStyle/>
-          <a:p>
-            <a:pPr algn="l">
-              <a:spcAft>
-                <a:spcPts val="600"/>
-              </a:spcAft>
-            </a:pPr>
-            <a:r>
-              <a:rPr sz="2500" b="1">
-                <a:solidFill>
-                  <a:srgbClr val="FFFFFF"/>
-                </a:solidFill>
-                <a:latin typeface="Calibri"/>
-              </a:rPr>
-              <a:t>La IA, sus salvaguardas y el RAG</a:t>
-            </a:r>
-          </a:p>
-        </p:txBody>
-      </p:sp>
-      <p:sp>
-        <p:nvSpPr>
-          <p:cNvPr id="6" name="TextBox 5"/>
-          <p:cNvSpPr txBox="1"/>
-          <p:nvPr/>
-        </p:nvSpPr>
-        <p:spPr>
-          <a:xfrm>
-            <a:off x="502920" y="6455664"/>
-            <a:ext cx="8229600" cy="292608"/>
-          </a:xfrm>
-          <a:prstGeom prst="rect">
-            <a:avLst/>
-          </a:prstGeom>
-          <a:noFill/>
-        </p:spPr>
-        <p:txBody>
-          <a:bodyPr wrap="square" anchor="t" lIns="38100" rIns="38100" tIns="12700" bIns="12700">
-            <a:spAutoFit/>
-          </a:bodyPr>
-          <a:lstStyle/>
-          <a:p>
-            <a:pPr algn="l">
-              <a:spcAft>
-                <a:spcPts val="600"/>
-              </a:spcAft>
-            </a:pPr>
-            <a:r>
-              <a:rPr sz="1000" b="0">
-                <a:solidFill>
-                  <a:srgbClr val="4A5B68"/>
-                </a:solidFill>
-                <a:latin typeface="Calibri"/>
-              </a:rPr>
-              <a:t>Comparador Regulatorio de Calidad de Gas — Enagás</a:t>
-            </a:r>
-          </a:p>
-        </p:txBody>
-      </p:sp>
-      <p:sp>
-        <p:nvSpPr>
-          <p:cNvPr id="7" name="TextBox 6"/>
-          <p:cNvSpPr txBox="1"/>
-          <p:nvPr/>
-        </p:nvSpPr>
-        <p:spPr>
-          <a:xfrm>
-            <a:off x="11155680" y="6455664"/>
-            <a:ext cx="777240" cy="292608"/>
-          </a:xfrm>
-          <a:prstGeom prst="rect">
-            <a:avLst/>
-          </a:prstGeom>
-          <a:noFill/>
-        </p:spPr>
-        <p:txBody>
-          <a:bodyPr wrap="square" anchor="t" lIns="38100" rIns="38100" tIns="12700" bIns="12700">
-            <a:spAutoFit/>
-          </a:bodyPr>
-          <a:lstStyle/>
-          <a:p>
-            <a:pPr algn="r">
-              <a:spcAft>
-                <a:spcPts val="600"/>
-              </a:spcAft>
-            </a:pPr>
-            <a:r>
-              <a:rPr sz="1000" b="0">
-                <a:solidFill>
-                  <a:srgbClr val="4A5B68"/>
-                </a:solidFill>
-                <a:latin typeface="Calibri"/>
-              </a:rPr>
-              <a:t>7</a:t>
-            </a:r>
-          </a:p>
-        </p:txBody>
-      </p:sp>
-      <p:sp>
-        <p:nvSpPr>
-          <p:cNvPr id="8" name="TextBox 7"/>
-          <p:cNvSpPr txBox="1"/>
-          <p:nvPr/>
-        </p:nvSpPr>
-        <p:spPr>
-          <a:xfrm>
-            <a:off x="548640" y="1234440"/>
-            <a:ext cx="11155680" cy="320040"/>
-          </a:xfrm>
-          <a:prstGeom prst="rect">
-            <a:avLst/>
-          </a:prstGeom>
-          <a:noFill/>
-        </p:spPr>
-        <p:txBody>
-          <a:bodyPr wrap="square" anchor="t" lIns="38100" rIns="38100" tIns="12700" bIns="12700">
-            <a:spAutoFit/>
-          </a:bodyPr>
-          <a:lstStyle/>
-          <a:p>
-            <a:pPr algn="l">
-              <a:spcAft>
-                <a:spcPts val="600"/>
-              </a:spcAft>
-            </a:pPr>
-            <a:r>
-              <a:rPr sz="1400" b="0">
-                <a:solidFill>
-                  <a:srgbClr val="4A5B68"/>
-                </a:solidFill>
-                <a:latin typeface="Calibri"/>
-              </a:rPr>
-              <a:t>Cuando una consulta sí llega al modelo, opera atada en corto.</a:t>
-            </a:r>
-          </a:p>
-        </p:txBody>
-      </p:sp>
-      <p:sp>
-        <p:nvSpPr>
-          <p:cNvPr id="9" name="Rounded Rectangle 8"/>
-          <p:cNvSpPr/>
-          <p:nvPr/>
-        </p:nvSpPr>
-        <p:spPr>
-          <a:xfrm>
-            <a:off x="548640" y="1645920"/>
-            <a:ext cx="5394960" cy="3383280"/>
-          </a:xfrm>
-          <a:prstGeom prst="roundRect">
-            <a:avLst>
-              <a:gd name="adj" fmla="val 6000"/>
-            </a:avLst>
-          </a:prstGeom>
-          <a:solidFill>
-            <a:srgbClr val="EEF2F6"/>
-          </a:solidFill>
-          <a:ln w="12700">
-            <a:solidFill>
-              <a:srgbClr val="C8D4DD"/>
-            </a:solidFill>
-          </a:ln>
-          <a:effectLst/>
-        </p:spPr>
-        <p:style>
-          <a:lnRef idx="1">
-            <a:schemeClr val="accent1"/>
-          </a:lnRef>
-          <a:fillRef idx="3">
-            <a:schemeClr val="accent1"/>
-          </a:fillRef>
-          <a:effectRef idx="2">
-            <a:schemeClr val="accent1"/>
-          </a:effectRef>
-          <a:fontRef idx="minor">
-            <a:schemeClr val="lt1"/>
-          </a:fontRef>
-        </p:style>
-        <p:txBody>
-          <a:bodyPr rtlCol="0" anchor="ctr" wrap="square"/>
-          <a:lstStyle/>
-          <a:p>
-            <a:pPr algn="ctr"/>
-          </a:p>
-        </p:txBody>
-      </p:sp>
-      <p:sp>
-        <p:nvSpPr>
-          <p:cNvPr id="10" name="Rectangle 9"/>
-          <p:cNvSpPr/>
-          <p:nvPr/>
-        </p:nvSpPr>
-        <p:spPr>
-          <a:xfrm>
-            <a:off x="548640" y="1645920"/>
-            <a:ext cx="5394960" cy="457200"/>
+            <a:off x="822960" y="1828800"/>
+            <a:ext cx="64008" cy="713232"/>
           </a:xfrm>
           <a:prstGeom prst="rect">
             <a:avLst/>
@@ -15067,14 +12729,14 @@
       </p:sp>
       <p:sp>
         <p:nvSpPr>
-          <p:cNvPr id="11" name="TextBox 10"/>
+          <p:cNvPr id="6" name="TextBox 5"/>
           <p:cNvSpPr txBox="1"/>
           <p:nvPr/>
         </p:nvSpPr>
         <p:spPr>
           <a:xfrm>
-            <a:off x="713232" y="1691640"/>
-            <a:ext cx="5029200" cy="384048"/>
+            <a:off x="1143000" y="1801368"/>
+            <a:ext cx="10332720" cy="384048"/>
           </a:xfrm>
           <a:prstGeom prst="rect">
             <a:avLst/>
@@ -15093,27 +12755,27 @@
               </a:spcAft>
             </a:pPr>
             <a:r>
-              <a:rPr sz="1400" b="1">
-                <a:solidFill>
-                  <a:srgbClr val="FFFFFF"/>
+              <a:rPr sz="1800" b="1">
+                <a:solidFill>
+                  <a:srgbClr val="0099D6"/>
                 </a:solidFill>
                 <a:latin typeface="Calibri"/>
               </a:rPr>
-              <a:t>QUÉ PUEDE Y QUÉ NO PUEDE EL MODELO</a:t>
-            </a:r>
-          </a:p>
-        </p:txBody>
-      </p:sp>
-      <p:sp>
-        <p:nvSpPr>
-          <p:cNvPr id="12" name="TextBox 11"/>
+              <a:t>Cero cifras inventadas</a:t>
+            </a:r>
+          </a:p>
+        </p:txBody>
+      </p:sp>
+      <p:sp>
+        <p:nvSpPr>
+          <p:cNvPr id="7" name="TextBox 6"/>
           <p:cNvSpPr txBox="1"/>
           <p:nvPr/>
         </p:nvSpPr>
         <p:spPr>
           <a:xfrm>
-            <a:off x="731520" y="2240280"/>
-            <a:ext cx="5029200" cy="2651760"/>
+            <a:off x="1143000" y="2130552"/>
+            <a:ext cx="10332720" cy="384048"/>
           </a:xfrm>
           <a:prstGeom prst="rect">
             <a:avLst/>
@@ -15128,1030 +12790,31 @@
           <a:p>
             <a:pPr algn="l">
               <a:spcAft>
-                <a:spcPts val="900"/>
-              </a:spcAft>
-            </a:pPr>
-            <a:r>
-              <a:rPr sz="1300" b="0">
-                <a:solidFill>
-                  <a:srgbClr val="1B2A38"/>
+                <a:spcPts val="600"/>
+              </a:spcAft>
+            </a:pPr>
+            <a:r>
+              <a:rPr sz="1400" b="0">
+                <a:solidFill>
+                  <a:srgbClr val="C9D6E0"/>
                 </a:solidFill>
                 <a:latin typeface="Calibri"/>
               </a:rPr>
-              <a:t>• PUEDE: interpretar la pregunta, detectar la intención y REDACTAR la respuesta.</a:t>
-            </a:r>
-          </a:p>
-          <a:p>
-            <a:pPr algn="l">
-              <a:spcAft>
-                <a:spcPts val="900"/>
-              </a:spcAft>
-            </a:pPr>
-            <a:r>
-              <a:rPr sz="1300" b="1">
-                <a:solidFill>
-                  <a:srgbClr val="013A57"/>
-                </a:solidFill>
-                <a:latin typeface="Calibri"/>
-              </a:rPr>
-              <a:t>• NO PUEDE: generar límites, inventar valores, deducir conversiones ni inferir comparabilidad.</a:t>
-            </a:r>
-          </a:p>
-          <a:p>
-            <a:pPr algn="l">
-              <a:spcAft>
-                <a:spcPts val="900"/>
-              </a:spcAft>
-            </a:pPr>
-            <a:r>
-              <a:rPr sz="1300" b="0">
-                <a:solidFill>
-                  <a:srgbClr val="1B2A38"/>
-                </a:solidFill>
-                <a:latin typeface="Calibri"/>
-              </a:rPr>
-              <a:t>• Para cualquier número invoca una herramienta: consultar · evaluar_cumplimiento · convertir_unidades · buscar_pdfs.</a:t>
-            </a:r>
-          </a:p>
-          <a:p>
-            <a:pPr algn="l">
-              <a:spcAft>
-                <a:spcPts val="900"/>
-              </a:spcAft>
-            </a:pPr>
-            <a:r>
-              <a:rPr sz="1300" b="0">
-                <a:solidFill>
-                  <a:srgbClr val="1B2A38"/>
-                </a:solidFill>
-                <a:latin typeface="Calibri"/>
-              </a:rPr>
-              <a:t>• El SYSTEM_PROMPT le prohíbe inventar cifras, le obliga a citar y acota su ámbito. Temperatura 0.</a:t>
-            </a:r>
-          </a:p>
-        </p:txBody>
-      </p:sp>
-      <p:sp>
-        <p:nvSpPr>
-          <p:cNvPr id="13" name="Rounded Rectangle 12"/>
+              <a:t>Los valores proceden de código y datos verificados, nunca del modelo.</a:t>
+            </a:r>
+          </a:p>
+        </p:txBody>
+      </p:sp>
+      <p:sp>
+        <p:nvSpPr>
+          <p:cNvPr id="8" name="Rectangle 7"/>
           <p:cNvSpPr/>
           <p:nvPr/>
         </p:nvSpPr>
         <p:spPr>
           <a:xfrm>
-            <a:off x="6263640" y="1645920"/>
-            <a:ext cx="5394960" cy="3383280"/>
-          </a:xfrm>
-          <a:prstGeom prst="roundRect">
-            <a:avLst>
-              <a:gd name="adj" fmla="val 6000"/>
-            </a:avLst>
-          </a:prstGeom>
-          <a:solidFill>
-            <a:srgbClr val="EEF2F6"/>
-          </a:solidFill>
-          <a:ln w="12700">
-            <a:solidFill>
-              <a:srgbClr val="C8D4DD"/>
-            </a:solidFill>
-          </a:ln>
-          <a:effectLst/>
-        </p:spPr>
-        <p:style>
-          <a:lnRef idx="1">
-            <a:schemeClr val="accent1"/>
-          </a:lnRef>
-          <a:fillRef idx="3">
-            <a:schemeClr val="accent1"/>
-          </a:fillRef>
-          <a:effectRef idx="2">
-            <a:schemeClr val="accent1"/>
-          </a:effectRef>
-          <a:fontRef idx="minor">
-            <a:schemeClr val="lt1"/>
-          </a:fontRef>
-        </p:style>
-        <p:txBody>
-          <a:bodyPr rtlCol="0" anchor="ctr" wrap="square"/>
-          <a:lstStyle/>
-          <a:p>
-            <a:pPr algn="ctr"/>
-          </a:p>
-        </p:txBody>
-      </p:sp>
-      <p:sp>
-        <p:nvSpPr>
-          <p:cNvPr id="14" name="Rectangle 13"/>
-          <p:cNvSpPr/>
-          <p:nvPr/>
-        </p:nvSpPr>
-        <p:spPr>
-          <a:xfrm>
-            <a:off x="6263640" y="1645920"/>
-            <a:ext cx="5394960" cy="457200"/>
-          </a:xfrm>
-          <a:prstGeom prst="rect">
-            <a:avLst/>
-          </a:prstGeom>
-          <a:solidFill>
-            <a:srgbClr val="0099D6"/>
-          </a:solidFill>
-          <a:ln>
-            <a:noFill/>
-          </a:ln>
-          <a:effectLst/>
-        </p:spPr>
-        <p:style>
-          <a:lnRef idx="1">
-            <a:schemeClr val="accent1"/>
-          </a:lnRef>
-          <a:fillRef idx="3">
-            <a:schemeClr val="accent1"/>
-          </a:fillRef>
-          <a:effectRef idx="2">
-            <a:schemeClr val="accent1"/>
-          </a:effectRef>
-          <a:fontRef idx="minor">
-            <a:schemeClr val="lt1"/>
-          </a:fontRef>
-        </p:style>
-        <p:txBody>
-          <a:bodyPr rtlCol="0" anchor="ctr" wrap="square"/>
-          <a:lstStyle/>
-          <a:p>
-            <a:pPr algn="ctr"/>
-          </a:p>
-        </p:txBody>
-      </p:sp>
-      <p:sp>
-        <p:nvSpPr>
-          <p:cNvPr id="15" name="TextBox 14"/>
-          <p:cNvSpPr txBox="1"/>
-          <p:nvPr/>
-        </p:nvSpPr>
-        <p:spPr>
-          <a:xfrm>
-            <a:off x="6428232" y="1691640"/>
-            <a:ext cx="5029200" cy="384048"/>
-          </a:xfrm>
-          <a:prstGeom prst="rect">
-            <a:avLst/>
-          </a:prstGeom>
-          <a:noFill/>
-        </p:spPr>
-        <p:txBody>
-          <a:bodyPr wrap="square" anchor="t" lIns="38100" rIns="38100" tIns="12700" bIns="12700">
-            <a:spAutoFit/>
-          </a:bodyPr>
-          <a:lstStyle/>
-          <a:p>
-            <a:pPr algn="l">
-              <a:spcAft>
-                <a:spcPts val="600"/>
-              </a:spcAft>
-            </a:pPr>
-            <a:r>
-              <a:rPr sz="1400" b="1">
-                <a:solidFill>
-                  <a:srgbClr val="FFFFFF"/>
-                </a:solidFill>
-                <a:latin typeface="Calibri"/>
-              </a:rPr>
-              <a:t>LA RECUPERACIÓN DOCUMENTAL (RAG)</a:t>
-            </a:r>
-          </a:p>
-        </p:txBody>
-      </p:sp>
-      <p:sp>
-        <p:nvSpPr>
-          <p:cNvPr id="16" name="TextBox 15"/>
-          <p:cNvSpPr txBox="1"/>
-          <p:nvPr/>
-        </p:nvSpPr>
-        <p:spPr>
-          <a:xfrm>
-            <a:off x="6446520" y="2240280"/>
-            <a:ext cx="5029200" cy="2651760"/>
-          </a:xfrm>
-          <a:prstGeom prst="rect">
-            <a:avLst/>
-          </a:prstGeom>
-          <a:noFill/>
-        </p:spPr>
-        <p:txBody>
-          <a:bodyPr wrap="square" anchor="t" lIns="38100" rIns="38100" tIns="12700" bIns="12700">
-            <a:spAutoFit/>
-          </a:bodyPr>
-          <a:lstStyle/>
-          <a:p>
-            <a:pPr algn="l">
-              <a:spcAft>
-                <a:spcPts val="900"/>
-              </a:spcAft>
-            </a:pPr>
-            <a:r>
-              <a:rPr sz="1300" b="0">
-                <a:solidFill>
-                  <a:srgbClr val="1B2A38"/>
-                </a:solidFill>
-                <a:latin typeface="Calibri"/>
-              </a:rPr>
-              <a:t>• INDEXACIÓN: pdfplumber extrae el texto y lo trocea en fragmentos CON SOLAPE (ventana deslizante, no por página).</a:t>
-            </a:r>
-          </a:p>
-          <a:p>
-            <a:pPr algn="l">
-              <a:spcAft>
-                <a:spcPts val="900"/>
-              </a:spcAft>
-            </a:pPr>
-            <a:r>
-              <a:rPr sz="1300" b="0">
-                <a:solidFill>
-                  <a:srgbClr val="1B2A38"/>
-                </a:solidFill>
-                <a:latin typeface="Calibri"/>
-              </a:rPr>
-              <a:t>• Así, una respuesta partida entre dos páginas queda ENTERA dentro de un mismo fragmento.</a:t>
-            </a:r>
-          </a:p>
-          <a:p>
-            <a:pPr algn="l">
-              <a:spcAft>
-                <a:spcPts val="900"/>
-              </a:spcAft>
-            </a:pPr>
-            <a:r>
-              <a:rPr sz="1300" b="0">
-                <a:solidFill>
-                  <a:srgbClr val="1B2A38"/>
-                </a:solidFill>
-                <a:latin typeface="Calibri"/>
-              </a:rPr>
-              <a:t>• RECUPERACIÓN: búsqueda LÉXICA (SQLite LIKE); devuelve archivo, página y extracto.</a:t>
-            </a:r>
-          </a:p>
-          <a:p>
-            <a:pPr algn="l">
-              <a:spcAft>
-                <a:spcPts val="900"/>
-              </a:spcAft>
-            </a:pPr>
-            <a:r>
-              <a:rPr sz="1300" b="1">
-                <a:solidFill>
-                  <a:srgbClr val="013A57"/>
-                </a:solidFill>
-                <a:latin typeface="Calibri"/>
-              </a:rPr>
-              <a:t>• Es léxica, NO vectorial. Decisión consciente: reproducible y sin depender de terceros.</a:t>
-            </a:r>
-          </a:p>
-        </p:txBody>
-      </p:sp>
-      <p:sp>
-        <p:nvSpPr>
-          <p:cNvPr id="17" name="Rectangle 16"/>
-          <p:cNvSpPr/>
-          <p:nvPr/>
-        </p:nvSpPr>
-        <p:spPr>
-          <a:xfrm>
-            <a:off x="548640" y="5212080"/>
-            <a:ext cx="11109960" cy="1097280"/>
-          </a:xfrm>
-          <a:prstGeom prst="rect">
-            <a:avLst/>
-          </a:prstGeom>
-          <a:solidFill>
-            <a:srgbClr val="E4EFF6"/>
-          </a:solidFill>
-          <a:ln>
-            <a:noFill/>
-          </a:ln>
-          <a:effectLst/>
-        </p:spPr>
-        <p:style>
-          <a:lnRef idx="1">
-            <a:schemeClr val="accent1"/>
-          </a:lnRef>
-          <a:fillRef idx="3">
-            <a:schemeClr val="accent1"/>
-          </a:fillRef>
-          <a:effectRef idx="2">
-            <a:schemeClr val="accent1"/>
-          </a:effectRef>
-          <a:fontRef idx="minor">
-            <a:schemeClr val="lt1"/>
-          </a:fontRef>
-        </p:style>
-        <p:txBody>
-          <a:bodyPr rtlCol="0" anchor="ctr" wrap="square"/>
-          <a:lstStyle/>
-          <a:p>
-            <a:pPr algn="ctr"/>
-          </a:p>
-        </p:txBody>
-      </p:sp>
-      <p:sp>
-        <p:nvSpPr>
-          <p:cNvPr id="18" name="Rectangle 17"/>
-          <p:cNvSpPr/>
-          <p:nvPr/>
-        </p:nvSpPr>
-        <p:spPr>
-          <a:xfrm>
-            <a:off x="548640" y="5212080"/>
-            <a:ext cx="82296" cy="1097280"/>
-          </a:xfrm>
-          <a:prstGeom prst="rect">
-            <a:avLst/>
-          </a:prstGeom>
-          <a:solidFill>
-            <a:srgbClr val="013A57"/>
-          </a:solidFill>
-          <a:ln>
-            <a:noFill/>
-          </a:ln>
-          <a:effectLst/>
-        </p:spPr>
-        <p:style>
-          <a:lnRef idx="1">
-            <a:schemeClr val="accent1"/>
-          </a:lnRef>
-          <a:fillRef idx="3">
-            <a:schemeClr val="accent1"/>
-          </a:fillRef>
-          <a:effectRef idx="2">
-            <a:schemeClr val="accent1"/>
-          </a:effectRef>
-          <a:fontRef idx="minor">
-            <a:schemeClr val="lt1"/>
-          </a:fontRef>
-        </p:style>
-        <p:txBody>
-          <a:bodyPr rtlCol="0" anchor="ctr" wrap="square"/>
-          <a:lstStyle/>
-          <a:p>
-            <a:pPr algn="ctr"/>
-          </a:p>
-        </p:txBody>
-      </p:sp>
-      <p:sp>
-        <p:nvSpPr>
-          <p:cNvPr id="19" name="TextBox 18"/>
-          <p:cNvSpPr txBox="1"/>
-          <p:nvPr/>
-        </p:nvSpPr>
-        <p:spPr>
-          <a:xfrm>
-            <a:off x="822960" y="5276088"/>
-            <a:ext cx="10744200" cy="1005840"/>
-          </a:xfrm>
-          <a:prstGeom prst="rect">
-            <a:avLst/>
-          </a:prstGeom>
-          <a:noFill/>
-        </p:spPr>
-        <p:txBody>
-          <a:bodyPr wrap="square" anchor="t" lIns="38100" rIns="38100" tIns="12700" bIns="12700">
-            <a:spAutoFit/>
-          </a:bodyPr>
-          <a:lstStyle/>
-          <a:p>
-            <a:pPr algn="l">
-              <a:spcAft>
-                <a:spcPts val="300"/>
-              </a:spcAft>
-            </a:pPr>
-            <a:r>
-              <a:rPr sz="1400" b="1">
-                <a:solidFill>
-                  <a:srgbClr val="013A57"/>
-                </a:solidFill>
-                <a:latin typeface="Calibri"/>
-              </a:rPr>
-              <a:t>La salvaguarda que lo cierra todo: si OpenAI no está disponible —sin clave, sin red o por límite—, el sistema conmuta al motor determinista. EL CHAT NUNCA DEVUELVE ERROR.</a:t>
-            </a:r>
-          </a:p>
-          <a:p>
-            <a:pPr algn="l">
-              <a:spcAft>
-                <a:spcPts val="300"/>
-              </a:spcAft>
-            </a:pPr>
-            <a:r>
-              <a:rPr sz="1250" b="0">
-                <a:solidFill>
-                  <a:srgbClr val="4A5B68"/>
-                </a:solidFill>
-                <a:latin typeface="Calibri"/>
-              </a:rPr>
-              <a:t>¿Y una búsqueda semántica? Lo medimos antes de decidir: el estudio de terminología dio un índice de variación de 27,4 en gas natural. La capa semántica queda preparada y activable, pero desactivada por defecto por reproducibilidad.</a:t>
-            </a:r>
-          </a:p>
-        </p:txBody>
-      </p:sp>
-    </p:spTree>
-  </p:cSld>
-  <p:clrMapOvr>
-    <a:masterClrMapping/>
-  </p:clrMapOvr>
-</p:sld>
-</file>
-
-<file path=ppt/slides/slide9.xml><?xml version="1.0" encoding="utf-8"?>
-<p:sld xmlns:a="http://schemas.openxmlformats.org/drawingml/2006/main" xmlns:p="http://schemas.openxmlformats.org/presentationml/2006/main" xmlns:r="http://schemas.openxmlformats.org/officeDocument/2006/relationships">
-  <p:cSld>
-    <p:spTree>
-      <p:nvGrpSpPr>
-        <p:cNvPr id="1" name=""/>
-        <p:cNvGrpSpPr/>
-        <p:nvPr/>
-      </p:nvGrpSpPr>
-      <p:grpSpPr/>
-      <p:sp>
-        <p:nvSpPr>
-          <p:cNvPr id="2" name="Rectangle 1"/>
-          <p:cNvSpPr/>
-          <p:nvPr/>
-        </p:nvSpPr>
-        <p:spPr>
-          <a:xfrm>
-            <a:off x="0" y="0"/>
-            <a:ext cx="12191695" cy="932688"/>
-          </a:xfrm>
-          <a:prstGeom prst="rect">
-            <a:avLst/>
-          </a:prstGeom>
-          <a:solidFill>
-            <a:srgbClr val="013A57"/>
-          </a:solidFill>
-          <a:ln>
-            <a:noFill/>
-          </a:ln>
-          <a:effectLst/>
-        </p:spPr>
-        <p:style>
-          <a:lnRef idx="1">
-            <a:schemeClr val="accent1"/>
-          </a:lnRef>
-          <a:fillRef idx="3">
-            <a:schemeClr val="accent1"/>
-          </a:fillRef>
-          <a:effectRef idx="2">
-            <a:schemeClr val="accent1"/>
-          </a:effectRef>
-          <a:fontRef idx="minor">
-            <a:schemeClr val="lt1"/>
-          </a:fontRef>
-        </p:style>
-        <p:txBody>
-          <a:bodyPr rtlCol="0" anchor="ctr" wrap="square"/>
-          <a:lstStyle/>
-          <a:p>
-            <a:pPr algn="ctr"/>
-          </a:p>
-        </p:txBody>
-      </p:sp>
-      <p:sp>
-        <p:nvSpPr>
-          <p:cNvPr id="3" name="Rectangle 2"/>
-          <p:cNvSpPr/>
-          <p:nvPr/>
-        </p:nvSpPr>
-        <p:spPr>
-          <a:xfrm>
-            <a:off x="0" y="932688"/>
-            <a:ext cx="12191695" cy="50292"/>
-          </a:xfrm>
-          <a:prstGeom prst="rect">
-            <a:avLst/>
-          </a:prstGeom>
-          <a:solidFill>
-            <a:srgbClr val="0099D6"/>
-          </a:solidFill>
-          <a:ln>
-            <a:noFill/>
-          </a:ln>
-          <a:effectLst/>
-        </p:spPr>
-        <p:style>
-          <a:lnRef idx="1">
-            <a:schemeClr val="accent1"/>
-          </a:lnRef>
-          <a:fillRef idx="3">
-            <a:schemeClr val="accent1"/>
-          </a:fillRef>
-          <a:effectRef idx="2">
-            <a:schemeClr val="accent1"/>
-          </a:effectRef>
-          <a:fontRef idx="minor">
-            <a:schemeClr val="lt1"/>
-          </a:fontRef>
-        </p:style>
-        <p:txBody>
-          <a:bodyPr rtlCol="0" anchor="ctr" wrap="square"/>
-          <a:lstStyle/>
-          <a:p>
-            <a:pPr algn="ctr"/>
-          </a:p>
-        </p:txBody>
-      </p:sp>
-      <p:sp>
-        <p:nvSpPr>
-          <p:cNvPr id="4" name="TextBox 3"/>
-          <p:cNvSpPr txBox="1"/>
-          <p:nvPr/>
-        </p:nvSpPr>
-        <p:spPr>
-          <a:xfrm>
-            <a:off x="502920" y="118872"/>
-            <a:ext cx="10515600" cy="237744"/>
-          </a:xfrm>
-          <a:prstGeom prst="rect">
-            <a:avLst/>
-          </a:prstGeom>
-          <a:noFill/>
-        </p:spPr>
-        <p:txBody>
-          <a:bodyPr wrap="square" anchor="t" lIns="38100" rIns="38100" tIns="12700" bIns="12700">
-            <a:spAutoFit/>
-          </a:bodyPr>
-          <a:lstStyle/>
-          <a:p>
-            <a:pPr algn="l">
-              <a:spcAft>
-                <a:spcPts val="600"/>
-              </a:spcAft>
-            </a:pPr>
-            <a:r>
-              <a:rPr sz="1100" b="1">
-                <a:solidFill>
-                  <a:srgbClr val="0099D6"/>
-                </a:solidFill>
-                <a:latin typeface="Calibri"/>
-              </a:rPr>
-              <a:t>ALCANCE</a:t>
-            </a:r>
-          </a:p>
-        </p:txBody>
-      </p:sp>
-      <p:sp>
-        <p:nvSpPr>
-          <p:cNvPr id="5" name="TextBox 4"/>
-          <p:cNvSpPr txBox="1"/>
-          <p:nvPr/>
-        </p:nvSpPr>
-        <p:spPr>
-          <a:xfrm>
-            <a:off x="502920" y="347472"/>
-            <a:ext cx="10607040" cy="530352"/>
-          </a:xfrm>
-          <a:prstGeom prst="rect">
-            <a:avLst/>
-          </a:prstGeom>
-          <a:noFill/>
-        </p:spPr>
-        <p:txBody>
-          <a:bodyPr wrap="square" anchor="t" lIns="38100" rIns="38100" tIns="12700" bIns="12700">
-            <a:spAutoFit/>
-          </a:bodyPr>
-          <a:lstStyle/>
-          <a:p>
-            <a:pPr algn="l">
-              <a:spcAft>
-                <a:spcPts val="600"/>
-              </a:spcAft>
-            </a:pPr>
-            <a:r>
-              <a:rPr sz="2500" b="1">
-                <a:solidFill>
-                  <a:srgbClr val="FFFFFF"/>
-                </a:solidFill>
-                <a:latin typeface="Calibri"/>
-              </a:rPr>
-              <a:t>Ampliación: biometano e hidrógeno</a:t>
-            </a:r>
-          </a:p>
-        </p:txBody>
-      </p:sp>
-      <p:sp>
-        <p:nvSpPr>
-          <p:cNvPr id="6" name="TextBox 5"/>
-          <p:cNvSpPr txBox="1"/>
-          <p:nvPr/>
-        </p:nvSpPr>
-        <p:spPr>
-          <a:xfrm>
-            <a:off x="502920" y="6455664"/>
-            <a:ext cx="8229600" cy="292608"/>
-          </a:xfrm>
-          <a:prstGeom prst="rect">
-            <a:avLst/>
-          </a:prstGeom>
-          <a:noFill/>
-        </p:spPr>
-        <p:txBody>
-          <a:bodyPr wrap="square" anchor="t" lIns="38100" rIns="38100" tIns="12700" bIns="12700">
-            <a:spAutoFit/>
-          </a:bodyPr>
-          <a:lstStyle/>
-          <a:p>
-            <a:pPr algn="l">
-              <a:spcAft>
-                <a:spcPts val="600"/>
-              </a:spcAft>
-            </a:pPr>
-            <a:r>
-              <a:rPr sz="1000" b="0">
-                <a:solidFill>
-                  <a:srgbClr val="4A5B68"/>
-                </a:solidFill>
-                <a:latin typeface="Calibri"/>
-              </a:rPr>
-              <a:t>Comparador Regulatorio de Calidad de Gas — Enagás</a:t>
-            </a:r>
-          </a:p>
-        </p:txBody>
-      </p:sp>
-      <p:sp>
-        <p:nvSpPr>
-          <p:cNvPr id="7" name="TextBox 6"/>
-          <p:cNvSpPr txBox="1"/>
-          <p:nvPr/>
-        </p:nvSpPr>
-        <p:spPr>
-          <a:xfrm>
-            <a:off x="11155680" y="6455664"/>
-            <a:ext cx="777240" cy="292608"/>
-          </a:xfrm>
-          <a:prstGeom prst="rect">
-            <a:avLst/>
-          </a:prstGeom>
-          <a:noFill/>
-        </p:spPr>
-        <p:txBody>
-          <a:bodyPr wrap="square" anchor="t" lIns="38100" rIns="38100" tIns="12700" bIns="12700">
-            <a:spAutoFit/>
-          </a:bodyPr>
-          <a:lstStyle/>
-          <a:p>
-            <a:pPr algn="r">
-              <a:spcAft>
-                <a:spcPts val="600"/>
-              </a:spcAft>
-            </a:pPr>
-            <a:r>
-              <a:rPr sz="1000" b="0">
-                <a:solidFill>
-                  <a:srgbClr val="4A5B68"/>
-                </a:solidFill>
-                <a:latin typeface="Calibri"/>
-              </a:rPr>
-              <a:t>8</a:t>
-            </a:r>
-          </a:p>
-        </p:txBody>
-      </p:sp>
-      <p:sp>
-        <p:nvSpPr>
-          <p:cNvPr id="8" name="TextBox 7"/>
-          <p:cNvSpPr txBox="1"/>
-          <p:nvPr/>
-        </p:nvSpPr>
-        <p:spPr>
-          <a:xfrm>
-            <a:off x="548640" y="1234440"/>
-            <a:ext cx="11155680" cy="320040"/>
-          </a:xfrm>
-          <a:prstGeom prst="rect">
-            <a:avLst/>
-          </a:prstGeom>
-          <a:noFill/>
-        </p:spPr>
-        <p:txBody>
-          <a:bodyPr wrap="square" anchor="t" lIns="38100" rIns="38100" tIns="12700" bIns="12700">
-            <a:spAutoFit/>
-          </a:bodyPr>
-          <a:lstStyle/>
-          <a:p>
-            <a:pPr algn="l">
-              <a:spcAft>
-                <a:spcPts val="600"/>
-              </a:spcAft>
-            </a:pPr>
-            <a:r>
-              <a:rPr sz="1400" b="0">
-                <a:solidFill>
-                  <a:srgbClr val="4A5B68"/>
-                </a:solidFill>
-                <a:latin typeface="Calibri"/>
-              </a:rPr>
-              <a:t>Añadidos como CAPA ADITIVA: se introduce la dimensión «tipo_gas», con gas_natural por defecto. El gas natural queda intacto.</a:t>
-            </a:r>
-          </a:p>
-        </p:txBody>
-      </p:sp>
-      <p:sp>
-        <p:nvSpPr>
-          <p:cNvPr id="9" name="Rounded Rectangle 8"/>
-          <p:cNvSpPr/>
-          <p:nvPr/>
-        </p:nvSpPr>
-        <p:spPr>
-          <a:xfrm>
-            <a:off x="548640" y="1737360"/>
-            <a:ext cx="3593592" cy="2514600"/>
-          </a:xfrm>
-          <a:prstGeom prst="roundRect">
-            <a:avLst>
-              <a:gd name="adj" fmla="val 6000"/>
-            </a:avLst>
-          </a:prstGeom>
-          <a:solidFill>
-            <a:srgbClr val="EEF2F6"/>
-          </a:solidFill>
-          <a:ln w="12700">
-            <a:solidFill>
-              <a:srgbClr val="C8D4DD"/>
-            </a:solidFill>
-          </a:ln>
-          <a:effectLst/>
-        </p:spPr>
-        <p:style>
-          <a:lnRef idx="1">
-            <a:schemeClr val="accent1"/>
-          </a:lnRef>
-          <a:fillRef idx="3">
-            <a:schemeClr val="accent1"/>
-          </a:fillRef>
-          <a:effectRef idx="2">
-            <a:schemeClr val="accent1"/>
-          </a:effectRef>
-          <a:fontRef idx="minor">
-            <a:schemeClr val="lt1"/>
-          </a:fontRef>
-        </p:style>
-        <p:txBody>
-          <a:bodyPr rtlCol="0" anchor="ctr" wrap="square"/>
-          <a:lstStyle/>
-          <a:p>
-            <a:pPr algn="ctr"/>
-          </a:p>
-        </p:txBody>
-      </p:sp>
-      <p:sp>
-        <p:nvSpPr>
-          <p:cNvPr id="10" name="Rectangle 9"/>
-          <p:cNvSpPr/>
-          <p:nvPr/>
-        </p:nvSpPr>
-        <p:spPr>
-          <a:xfrm>
-            <a:off x="548640" y="1737360"/>
-            <a:ext cx="3593592" cy="457200"/>
-          </a:xfrm>
-          <a:prstGeom prst="rect">
-            <a:avLst/>
-          </a:prstGeom>
-          <a:solidFill>
-            <a:srgbClr val="013A57"/>
-          </a:solidFill>
-          <a:ln>
-            <a:noFill/>
-          </a:ln>
-          <a:effectLst/>
-        </p:spPr>
-        <p:style>
-          <a:lnRef idx="1">
-            <a:schemeClr val="accent1"/>
-          </a:lnRef>
-          <a:fillRef idx="3">
-            <a:schemeClr val="accent1"/>
-          </a:fillRef>
-          <a:effectRef idx="2">
-            <a:schemeClr val="accent1"/>
-          </a:effectRef>
-          <a:fontRef idx="minor">
-            <a:schemeClr val="lt1"/>
-          </a:fontRef>
-        </p:style>
-        <p:txBody>
-          <a:bodyPr rtlCol="0" anchor="ctr" wrap="square"/>
-          <a:lstStyle/>
-          <a:p>
-            <a:pPr algn="ctr"/>
-          </a:p>
-        </p:txBody>
-      </p:sp>
-      <p:sp>
-        <p:nvSpPr>
-          <p:cNvPr id="11" name="TextBox 10"/>
-          <p:cNvSpPr txBox="1"/>
-          <p:nvPr/>
-        </p:nvSpPr>
-        <p:spPr>
-          <a:xfrm>
-            <a:off x="713232" y="1783080"/>
-            <a:ext cx="3291840" cy="384048"/>
-          </a:xfrm>
-          <a:prstGeom prst="rect">
-            <a:avLst/>
-          </a:prstGeom>
-          <a:noFill/>
-        </p:spPr>
-        <p:txBody>
-          <a:bodyPr wrap="square" anchor="t" lIns="38100" rIns="38100" tIns="12700" bIns="12700">
-            <a:spAutoFit/>
-          </a:bodyPr>
-          <a:lstStyle/>
-          <a:p>
-            <a:pPr algn="l">
-              <a:spcAft>
-                <a:spcPts val="600"/>
-              </a:spcAft>
-            </a:pPr>
-            <a:r>
-              <a:rPr sz="1400" b="1">
-                <a:solidFill>
-                  <a:srgbClr val="FFFFFF"/>
-                </a:solidFill>
-                <a:latin typeface="Calibri"/>
-              </a:rPr>
-              <a:t>GAS NATURAL</a:t>
-            </a:r>
-          </a:p>
-        </p:txBody>
-      </p:sp>
-      <p:sp>
-        <p:nvSpPr>
-          <p:cNvPr id="12" name="TextBox 11"/>
-          <p:cNvSpPr txBox="1"/>
-          <p:nvPr/>
-        </p:nvSpPr>
-        <p:spPr>
-          <a:xfrm>
-            <a:off x="713232" y="2304288"/>
-            <a:ext cx="3291840" cy="274320"/>
-          </a:xfrm>
-          <a:prstGeom prst="rect">
-            <a:avLst/>
-          </a:prstGeom>
-          <a:noFill/>
-        </p:spPr>
-        <p:txBody>
-          <a:bodyPr wrap="square" anchor="t" lIns="38100" rIns="38100" tIns="12700" bIns="12700">
-            <a:spAutoFit/>
-          </a:bodyPr>
-          <a:lstStyle/>
-          <a:p>
-            <a:pPr algn="l">
-              <a:spcAft>
-                <a:spcPts val="600"/>
-              </a:spcAft>
-            </a:pPr>
-            <a:r>
-              <a:rPr sz="1150" b="1">
-                <a:solidFill>
-                  <a:srgbClr val="013A57"/>
-                </a:solidFill>
-                <a:latin typeface="Consolas"/>
-              </a:rPr>
-              <a:t>parametros</a:t>
-            </a:r>
-          </a:p>
-        </p:txBody>
-      </p:sp>
-      <p:sp>
-        <p:nvSpPr>
-          <p:cNvPr id="13" name="TextBox 12"/>
-          <p:cNvSpPr txBox="1"/>
-          <p:nvPr/>
-        </p:nvSpPr>
-        <p:spPr>
-          <a:xfrm>
-            <a:off x="713232" y="2651760"/>
-            <a:ext cx="3291840" cy="1508760"/>
-          </a:xfrm>
-          <a:prstGeom prst="rect">
-            <a:avLst/>
-          </a:prstGeom>
-          <a:noFill/>
-        </p:spPr>
-        <p:txBody>
-          <a:bodyPr wrap="square" anchor="t" lIns="38100" rIns="38100" tIns="12700" bIns="12700">
-            <a:spAutoFit/>
-          </a:bodyPr>
-          <a:lstStyle/>
-          <a:p>
-            <a:pPr algn="l">
-              <a:spcAft>
-                <a:spcPts val="600"/>
-              </a:spcAft>
-            </a:pPr>
-            <a:r>
-              <a:rPr sz="1300" b="0">
-                <a:solidFill>
-                  <a:srgbClr val="1B2A38"/>
-                </a:solidFill>
-                <a:latin typeface="Calibri"/>
-              </a:rPr>
-              <a:t>• 21 jurisdicciones</a:t>
-            </a:r>
-          </a:p>
-          <a:p>
-            <a:pPr algn="l">
-              <a:spcAft>
-                <a:spcPts val="600"/>
-              </a:spcAft>
-            </a:pPr>
-            <a:r>
-              <a:rPr sz="1300" b="0">
-                <a:solidFill>
-                  <a:srgbClr val="1B2A38"/>
-                </a:solidFill>
-                <a:latin typeface="Calibri"/>
-              </a:rPr>
-              <a:t>• 10 parámetros</a:t>
-            </a:r>
-          </a:p>
-          <a:p>
-            <a:pPr algn="l" lvl="1">
-              <a:spcAft>
-                <a:spcPts val="600"/>
-              </a:spcAft>
-            </a:pPr>
-            <a:r>
-              <a:rPr sz="1150" b="0">
-                <a:solidFill>
-                  <a:srgbClr val="4A5B68"/>
-                </a:solidFill>
-                <a:latin typeface="Calibri"/>
-              </a:rPr>
-              <a:t>176 verificados · 34 no verificables</a:t>
-            </a:r>
-          </a:p>
-        </p:txBody>
-      </p:sp>
-      <p:sp>
-        <p:nvSpPr>
-          <p:cNvPr id="14" name="Rounded Rectangle 13"/>
-          <p:cNvSpPr/>
-          <p:nvPr/>
-        </p:nvSpPr>
-        <p:spPr>
-          <a:xfrm>
-            <a:off x="4270248" y="1737360"/>
-            <a:ext cx="3593592" cy="2514600"/>
-          </a:xfrm>
-          <a:prstGeom prst="roundRect">
-            <a:avLst>
-              <a:gd name="adj" fmla="val 6000"/>
-            </a:avLst>
-          </a:prstGeom>
-          <a:solidFill>
-            <a:srgbClr val="EEF2F6"/>
-          </a:solidFill>
-          <a:ln w="12700">
-            <a:solidFill>
-              <a:srgbClr val="C8D4DD"/>
-            </a:solidFill>
-          </a:ln>
-          <a:effectLst/>
-        </p:spPr>
-        <p:style>
-          <a:lnRef idx="1">
-            <a:schemeClr val="accent1"/>
-          </a:lnRef>
-          <a:fillRef idx="3">
-            <a:schemeClr val="accent1"/>
-          </a:fillRef>
-          <a:effectRef idx="2">
-            <a:schemeClr val="accent1"/>
-          </a:effectRef>
-          <a:fontRef idx="minor">
-            <a:schemeClr val="lt1"/>
-          </a:fontRef>
-        </p:style>
-        <p:txBody>
-          <a:bodyPr rtlCol="0" anchor="ctr" wrap="square"/>
-          <a:lstStyle/>
-          <a:p>
-            <a:pPr algn="ctr"/>
-          </a:p>
-        </p:txBody>
-      </p:sp>
-      <p:sp>
-        <p:nvSpPr>
-          <p:cNvPr id="15" name="Rectangle 14"/>
-          <p:cNvSpPr/>
-          <p:nvPr/>
-        </p:nvSpPr>
-        <p:spPr>
-          <a:xfrm>
-            <a:off x="4270248" y="1737360"/>
-            <a:ext cx="3593592" cy="457200"/>
+            <a:off x="822960" y="2670048"/>
+            <a:ext cx="64008" cy="713232"/>
           </a:xfrm>
           <a:prstGeom prst="rect">
             <a:avLst/>
@@ -16188,14 +12851,14 @@
       </p:sp>
       <p:sp>
         <p:nvSpPr>
-          <p:cNvPr id="16" name="TextBox 15"/>
+          <p:cNvPr id="9" name="TextBox 8"/>
           <p:cNvSpPr txBox="1"/>
           <p:nvPr/>
         </p:nvSpPr>
         <p:spPr>
           <a:xfrm>
-            <a:off x="4434840" y="1783080"/>
-            <a:ext cx="3291840" cy="384048"/>
+            <a:off x="1143000" y="2642616"/>
+            <a:ext cx="10332720" cy="384048"/>
           </a:xfrm>
           <a:prstGeom prst="rect">
             <a:avLst/>
@@ -16214,27 +12877,27 @@
               </a:spcAft>
             </a:pPr>
             <a:r>
-              <a:rPr sz="1400" b="1">
-                <a:solidFill>
-                  <a:srgbClr val="FFFFFF"/>
+              <a:rPr sz="1800" b="1">
+                <a:solidFill>
+                  <a:srgbClr val="0099D6"/>
                 </a:solidFill>
                 <a:latin typeface="Calibri"/>
               </a:rPr>
-              <a:t>BIOMETANO</a:t>
-            </a:r>
-          </a:p>
-        </p:txBody>
-      </p:sp>
-      <p:sp>
-        <p:nvSpPr>
-          <p:cNvPr id="17" name="TextBox 16"/>
+              <a:t>Trazabilidad completa</a:t>
+            </a:r>
+          </a:p>
+        </p:txBody>
+      </p:sp>
+      <p:sp>
+        <p:nvSpPr>
+          <p:cNvPr id="10" name="TextBox 9"/>
           <p:cNvSpPr txBox="1"/>
           <p:nvPr/>
         </p:nvSpPr>
         <p:spPr>
           <a:xfrm>
-            <a:off x="4434840" y="2304288"/>
-            <a:ext cx="3291840" cy="274320"/>
+            <a:off x="1143000" y="2971800"/>
+            <a:ext cx="10332720" cy="384048"/>
           </a:xfrm>
           <a:prstGeom prst="rect">
             <a:avLst/>
@@ -16253,111 +12916,36 @@
               </a:spcAft>
             </a:pPr>
             <a:r>
-              <a:rPr sz="1150" b="1">
-                <a:solidFill>
-                  <a:srgbClr val="6CB33E"/>
-                </a:solidFill>
-                <a:latin typeface="Consolas"/>
-              </a:rPr>
-              <a:t>parametros_biometano</a:t>
-            </a:r>
-          </a:p>
-        </p:txBody>
-      </p:sp>
-      <p:sp>
-        <p:nvSpPr>
-          <p:cNvPr id="18" name="TextBox 17"/>
-          <p:cNvSpPr txBox="1"/>
-          <p:nvPr/>
-        </p:nvSpPr>
-        <p:spPr>
-          <a:xfrm>
-            <a:off x="4434840" y="2651760"/>
-            <a:ext cx="3291840" cy="1508760"/>
-          </a:xfrm>
-          <a:prstGeom prst="rect">
-            <a:avLst/>
-          </a:prstGeom>
-          <a:noFill/>
-        </p:spPr>
-        <p:txBody>
-          <a:bodyPr wrap="square" anchor="t" lIns="38100" rIns="38100" tIns="12700" bIns="12700">
-            <a:spAutoFit/>
-          </a:bodyPr>
-          <a:lstStyle/>
-          <a:p>
-            <a:pPr algn="l">
-              <a:spcAft>
-                <a:spcPts val="600"/>
-              </a:spcAft>
-            </a:pPr>
-            <a:r>
-              <a:rPr sz="1300" b="0">
-                <a:solidFill>
-                  <a:srgbClr val="1B2A38"/>
+              <a:rPr sz="1400" b="0">
+                <a:solidFill>
+                  <a:srgbClr val="C9D6E0"/>
                 </a:solidFill>
                 <a:latin typeface="Calibri"/>
               </a:rPr>
-              <a:t>• 4 · ES · PT · FR · UE</a:t>
-            </a:r>
-          </a:p>
-          <a:p>
-            <a:pPr algn="l">
-              <a:spcAft>
-                <a:spcPts val="600"/>
-              </a:spcAft>
-            </a:pPr>
-            <a:r>
-              <a:rPr sz="1300" b="0">
-                <a:solidFill>
-                  <a:srgbClr val="1B2A38"/>
-                </a:solidFill>
-                <a:latin typeface="Calibri"/>
-              </a:rPr>
-              <a:t>• 12 parámetros</a:t>
-            </a:r>
-          </a:p>
-          <a:p>
-            <a:pPr algn="l" lvl="1">
-              <a:spcAft>
-                <a:spcPts val="600"/>
-              </a:spcAft>
-            </a:pPr>
-            <a:r>
-              <a:rPr sz="1150" b="0">
-                <a:solidFill>
-                  <a:srgbClr val="4A5B68"/>
-                </a:solidFill>
-                <a:latin typeface="Calibri"/>
-              </a:rPr>
-              <a:t>Inyección en red: CH4 mín · CO2 máx · siloxanos</a:t>
-            </a:r>
-          </a:p>
-        </p:txBody>
-      </p:sp>
-      <p:sp>
-        <p:nvSpPr>
-          <p:cNvPr id="19" name="Rounded Rectangle 18"/>
+              <a:t>Cada valor cita su norma, su artículo, su página y su enlace.</a:t>
+            </a:r>
+          </a:p>
+        </p:txBody>
+      </p:sp>
+      <p:sp>
+        <p:nvSpPr>
+          <p:cNvPr id="11" name="Rectangle 10"/>
           <p:cNvSpPr/>
           <p:nvPr/>
         </p:nvSpPr>
         <p:spPr>
           <a:xfrm>
-            <a:off x="7991856" y="1737360"/>
-            <a:ext cx="3593592" cy="2514600"/>
-          </a:xfrm>
-          <a:prstGeom prst="roundRect">
-            <a:avLst>
-              <a:gd name="adj" fmla="val 6000"/>
-            </a:avLst>
+            <a:off x="822960" y="3511296"/>
+            <a:ext cx="64008" cy="713232"/>
+          </a:xfrm>
+          <a:prstGeom prst="rect">
+            <a:avLst/>
           </a:prstGeom>
           <a:solidFill>
-            <a:srgbClr val="EEF2F6"/>
+            <a:srgbClr val="6CB33E"/>
           </a:solidFill>
-          <a:ln w="12700">
-            <a:solidFill>
-              <a:srgbClr val="C8D4DD"/>
-            </a:solidFill>
+          <a:ln>
+            <a:noFill/>
           </a:ln>
           <a:effectLst/>
         </p:spPr>
@@ -16385,20 +12973,98 @@
       </p:sp>
       <p:sp>
         <p:nvSpPr>
-          <p:cNvPr id="20" name="Rectangle 19"/>
+          <p:cNvPr id="12" name="TextBox 11"/>
+          <p:cNvSpPr txBox="1"/>
+          <p:nvPr/>
+        </p:nvSpPr>
+        <p:spPr>
+          <a:xfrm>
+            <a:off x="1143000" y="3483864"/>
+            <a:ext cx="10332720" cy="384048"/>
+          </a:xfrm>
+          <a:prstGeom prst="rect">
+            <a:avLst/>
+          </a:prstGeom>
+          <a:noFill/>
+        </p:spPr>
+        <p:txBody>
+          <a:bodyPr wrap="square" anchor="t" lIns="38100" rIns="38100" tIns="12700" bIns="12700">
+            <a:spAutoFit/>
+          </a:bodyPr>
+          <a:lstStyle/>
+          <a:p>
+            <a:pPr algn="l">
+              <a:spcAft>
+                <a:spcPts val="600"/>
+              </a:spcAft>
+            </a:pPr>
+            <a:r>
+              <a:rPr sz="1800" b="1">
+                <a:solidFill>
+                  <a:srgbClr val="0099D6"/>
+                </a:solidFill>
+                <a:latin typeface="Calibri"/>
+              </a:rPr>
+              <a:t>Transparencia</a:t>
+            </a:r>
+          </a:p>
+        </p:txBody>
+      </p:sp>
+      <p:sp>
+        <p:nvSpPr>
+          <p:cNvPr id="13" name="TextBox 12"/>
+          <p:cNvSpPr txBox="1"/>
+          <p:nvPr/>
+        </p:nvSpPr>
+        <p:spPr>
+          <a:xfrm>
+            <a:off x="1143000" y="3813048"/>
+            <a:ext cx="10332720" cy="384048"/>
+          </a:xfrm>
+          <a:prstGeom prst="rect">
+            <a:avLst/>
+          </a:prstGeom>
+          <a:noFill/>
+        </p:spPr>
+        <p:txBody>
+          <a:bodyPr wrap="square" anchor="t" lIns="38100" rIns="38100" tIns="12700" bIns="12700">
+            <a:spAutoFit/>
+          </a:bodyPr>
+          <a:lstStyle/>
+          <a:p>
+            <a:pPr algn="l">
+              <a:spcAft>
+                <a:spcPts val="600"/>
+              </a:spcAft>
+            </a:pPr>
+            <a:r>
+              <a:rPr sz="1400" b="0">
+                <a:solidFill>
+                  <a:srgbClr val="C9D6E0"/>
+                </a:solidFill>
+                <a:latin typeface="Calibri"/>
+              </a:rPr>
+              <a:t>Lo que la norma no fija se declara explícitamente; no se completa.</a:t>
+            </a:r>
+          </a:p>
+        </p:txBody>
+      </p:sp>
+      <p:sp>
+        <p:nvSpPr>
+          <p:cNvPr id="14" name="Rectangle 13"/>
           <p:cNvSpPr/>
           <p:nvPr/>
         </p:nvSpPr>
         <p:spPr>
           <a:xfrm>
-            <a:off x="7991856" y="1737360"/>
-            <a:ext cx="3593592" cy="457200"/>
+            <a:off x="822960" y="4352544"/>
+            <a:ext cx="64008" cy="713232"/>
           </a:xfrm>
           <a:prstGeom prst="rect">
             <a:avLst/>
           </a:prstGeom>
           <a:solidFill>
-            <a:srgbClr val="E88A1A"/>
+            <a:srgbClr val="6CB33E"/>
           </a:solidFill>
           <a:ln>
             <a:noFill/>
@@ -16429,14 +13095,14 @@
       </p:sp>
       <p:sp>
         <p:nvSpPr>
-          <p:cNvPr id="21" name="TextBox 20"/>
+          <p:cNvPr id="15" name="TextBox 14"/>
           <p:cNvSpPr txBox="1"/>
           <p:nvPr/>
         </p:nvSpPr>
         <p:spPr>
           <a:xfrm>
-            <a:off x="8156448" y="1783080"/>
-            <a:ext cx="3291840" cy="384048"/>
+            <a:off x="1143000" y="4325112"/>
+            <a:ext cx="10332720" cy="384048"/>
           </a:xfrm>
           <a:prstGeom prst="rect">
             <a:avLst/>
@@ -16455,27 +13121,27 @@
               </a:spcAft>
             </a:pPr>
             <a:r>
-              <a:rPr sz="1400" b="1">
-                <a:solidFill>
-                  <a:srgbClr val="FFFFFF"/>
+              <a:rPr sz="1800" b="1">
+                <a:solidFill>
+                  <a:srgbClr val="0099D6"/>
                 </a:solidFill>
                 <a:latin typeface="Calibri"/>
               </a:rPr>
-              <a:t>HIDRÓGENO</a:t>
-            </a:r>
-          </a:p>
-        </p:txBody>
-      </p:sp>
-      <p:sp>
-        <p:nvSpPr>
-          <p:cNvPr id="22" name="TextBox 21"/>
+              <a:t>Reproducibilidad</a:t>
+            </a:r>
+          </a:p>
+        </p:txBody>
+      </p:sp>
+      <p:sp>
+        <p:nvSpPr>
+          <p:cNvPr id="16" name="TextBox 15"/>
           <p:cNvSpPr txBox="1"/>
           <p:nvPr/>
         </p:nvSpPr>
         <p:spPr>
           <a:xfrm>
-            <a:off x="8156448" y="2304288"/>
-            <a:ext cx="3291840" cy="274320"/>
+            <a:off x="1143000" y="4654296"/>
+            <a:ext cx="10332720" cy="384048"/>
           </a:xfrm>
           <a:prstGeom prst="rect">
             <a:avLst/>
@@ -16494,104 +13160,33 @@
               </a:spcAft>
             </a:pPr>
             <a:r>
-              <a:rPr sz="1150" b="1">
-                <a:solidFill>
-                  <a:srgbClr val="E88A1A"/>
-                </a:solidFill>
-                <a:latin typeface="Consolas"/>
-              </a:rPr>
-              <a:t>parametros_hidrogeno</a:t>
-            </a:r>
-          </a:p>
-        </p:txBody>
-      </p:sp>
-      <p:sp>
-        <p:nvSpPr>
-          <p:cNvPr id="23" name="TextBox 22"/>
-          <p:cNvSpPr txBox="1"/>
-          <p:nvPr/>
-        </p:nvSpPr>
-        <p:spPr>
-          <a:xfrm>
-            <a:off x="8156448" y="2651760"/>
-            <a:ext cx="3291840" cy="1508760"/>
-          </a:xfrm>
-          <a:prstGeom prst="rect">
-            <a:avLst/>
-          </a:prstGeom>
-          <a:noFill/>
-        </p:spPr>
-        <p:txBody>
-          <a:bodyPr wrap="square" anchor="t" lIns="38100" rIns="38100" tIns="12700" bIns="12700">
-            <a:spAutoFit/>
-          </a:bodyPr>
-          <a:lstStyle/>
-          <a:p>
-            <a:pPr algn="l">
-              <a:spcAft>
-                <a:spcPts val="600"/>
-              </a:spcAft>
-            </a:pPr>
-            <a:r>
-              <a:rPr sz="1300" b="0">
-                <a:solidFill>
-                  <a:srgbClr val="1B2A38"/>
+              <a:rPr sz="1400" b="0">
+                <a:solidFill>
+                  <a:srgbClr val="C9D6E0"/>
                 </a:solidFill>
                 <a:latin typeface="Calibri"/>
               </a:rPr>
-              <a:t>• RED + PRODUCTO</a:t>
-            </a:r>
-          </a:p>
-          <a:p>
-            <a:pPr algn="l">
-              <a:spcAft>
-                <a:spcPts val="600"/>
-              </a:spcAft>
-            </a:pPr>
-            <a:r>
-              <a:rPr sz="1300" b="0">
-                <a:solidFill>
-                  <a:srgbClr val="1B2A38"/>
-                </a:solidFill>
-                <a:latin typeface="Calibri"/>
-              </a:rPr>
-              <a:t>• 18 parámetros</a:t>
-            </a:r>
-          </a:p>
-          <a:p>
-            <a:pPr algn="l" lvl="1">
-              <a:spcAft>
-                <a:spcPts val="600"/>
-              </a:spcAft>
-            </a:pPr>
-            <a:r>
-              <a:rPr sz="1150" b="0">
-                <a:solidFill>
-                  <a:srgbClr val="4A5B68"/>
-                </a:solidFill>
-                <a:latin typeface="Calibri"/>
-              </a:rPr>
-              <a:t>Marco aún en construcción: prospección normativa</a:t>
-            </a:r>
-          </a:p>
-        </p:txBody>
-      </p:sp>
-      <p:sp>
-        <p:nvSpPr>
-          <p:cNvPr id="24" name="Rectangle 23"/>
+              <a:t>Con el mismo código y los mismos datos, el resultado es idéntico en cualquier entorno.</a:t>
+            </a:r>
+          </a:p>
+        </p:txBody>
+      </p:sp>
+      <p:sp>
+        <p:nvSpPr>
+          <p:cNvPr id="17" name="Rectangle 16"/>
           <p:cNvSpPr/>
           <p:nvPr/>
         </p:nvSpPr>
         <p:spPr>
           <a:xfrm>
-            <a:off x="548640" y="4434840"/>
-            <a:ext cx="11091672" cy="1325880"/>
+            <a:off x="822960" y="5193792"/>
+            <a:ext cx="64008" cy="713232"/>
           </a:xfrm>
           <a:prstGeom prst="rect">
             <a:avLst/>
           </a:prstGeom>
           <a:solidFill>
-            <a:srgbClr val="FDF0DF"/>
+            <a:srgbClr val="6CB33E"/>
           </a:solidFill>
           <a:ln>
             <a:noFill/>
@@ -16622,20 +13217,98 @@
       </p:sp>
       <p:sp>
         <p:nvSpPr>
-          <p:cNvPr id="25" name="Rectangle 24"/>
+          <p:cNvPr id="18" name="TextBox 17"/>
+          <p:cNvSpPr txBox="1"/>
+          <p:nvPr/>
+        </p:nvSpPr>
+        <p:spPr>
+          <a:xfrm>
+            <a:off x="1143000" y="5166359"/>
+            <a:ext cx="10332720" cy="384048"/>
+          </a:xfrm>
+          <a:prstGeom prst="rect">
+            <a:avLst/>
+          </a:prstGeom>
+          <a:noFill/>
+        </p:spPr>
+        <p:txBody>
+          <a:bodyPr wrap="square" anchor="t" lIns="38100" rIns="38100" tIns="12700" bIns="12700">
+            <a:spAutoFit/>
+          </a:bodyPr>
+          <a:lstStyle/>
+          <a:p>
+            <a:pPr algn="l">
+              <a:spcAft>
+                <a:spcPts val="600"/>
+              </a:spcAft>
+            </a:pPr>
+            <a:r>
+              <a:rPr sz="1800" b="1">
+                <a:solidFill>
+                  <a:srgbClr val="0099D6"/>
+                </a:solidFill>
+                <a:latin typeface="Calibri"/>
+              </a:rPr>
+              <a:t>Auditabilidad</a:t>
+            </a:r>
+          </a:p>
+        </p:txBody>
+      </p:sp>
+      <p:sp>
+        <p:nvSpPr>
+          <p:cNvPr id="19" name="TextBox 18"/>
+          <p:cNvSpPr txBox="1"/>
+          <p:nvPr/>
+        </p:nvSpPr>
+        <p:spPr>
+          <a:xfrm>
+            <a:off x="1143000" y="5495544"/>
+            <a:ext cx="10332720" cy="384048"/>
+          </a:xfrm>
+          <a:prstGeom prst="rect">
+            <a:avLst/>
+          </a:prstGeom>
+          <a:noFill/>
+        </p:spPr>
+        <p:txBody>
+          <a:bodyPr wrap="square" anchor="t" lIns="38100" rIns="38100" tIns="12700" bIns="12700">
+            <a:spAutoFit/>
+          </a:bodyPr>
+          <a:lstStyle/>
+          <a:p>
+            <a:pPr algn="l">
+              <a:spcAft>
+                <a:spcPts val="600"/>
+              </a:spcAft>
+            </a:pPr>
+            <a:r>
+              <a:rPr sz="1400" b="0">
+                <a:solidFill>
+                  <a:srgbClr val="C9D6E0"/>
+                </a:solidFill>
+                <a:latin typeface="Calibri"/>
+              </a:rPr>
+              <a:t>La base de conocimiento es consultable: se puede verificar el origen de cada valor.</a:t>
+            </a:r>
+          </a:p>
+        </p:txBody>
+      </p:sp>
+      <p:sp>
+        <p:nvSpPr>
+          <p:cNvPr id="20" name="Rectangle 19"/>
           <p:cNvSpPr/>
           <p:nvPr/>
         </p:nvSpPr>
         <p:spPr>
           <a:xfrm>
-            <a:off x="548640" y="4434840"/>
-            <a:ext cx="82296" cy="1325880"/>
+            <a:off x="822960" y="6035040"/>
+            <a:ext cx="10607040" cy="54864"/>
           </a:xfrm>
           <a:prstGeom prst="rect">
             <a:avLst/>
           </a:prstGeom>
           <a:solidFill>
-            <a:srgbClr val="E88A1A"/>
+            <a:srgbClr val="6CB33E"/>
           </a:solidFill>
           <a:ln>
             <a:noFill/>
@@ -16666,14 +13339,14 @@
       </p:sp>
       <p:sp>
         <p:nvSpPr>
-          <p:cNvPr id="26" name="TextBox 25"/>
+          <p:cNvPr id="21" name="TextBox 20"/>
           <p:cNvSpPr txBox="1"/>
           <p:nvPr/>
         </p:nvSpPr>
         <p:spPr>
           <a:xfrm>
-            <a:off x="822960" y="4507992"/>
-            <a:ext cx="10698480" cy="1188720"/>
+            <a:off x="822960" y="6172200"/>
+            <a:ext cx="10607040" cy="457200"/>
           </a:xfrm>
           <a:prstGeom prst="rect">
             <a:avLst/>
@@ -16688,132 +13361,17 @@
           <a:p>
             <a:pPr algn="l">
               <a:spcAft>
-                <a:spcPts val="300"/>
-              </a:spcAft>
-            </a:pPr>
-            <a:r>
-              <a:rPr sz="1400" b="1">
-                <a:solidFill>
-                  <a:srgbClr val="A5610E"/>
+                <a:spcPts val="600"/>
+              </a:spcAft>
+            </a:pPr>
+            <a:r>
+              <a:rPr sz="1800" b="1">
+                <a:solidFill>
+                  <a:srgbClr val="FFFFFF"/>
                 </a:solidFill>
                 <a:latin typeface="Calibri"/>
               </a:rPr>
-              <a:t>Hidrógeno — la distinción esencial es de DOMINIO:</a:t>
-            </a:r>
-          </a:p>
-          <a:p>
-            <a:pPr algn="l">
-              <a:spcAft>
-                <a:spcPts val="300"/>
-              </a:spcAft>
-            </a:pPr>
-            <a:r>
-              <a:rPr sz="1250" b="0">
-                <a:solidFill>
-                  <a:srgbClr val="1B2A38"/>
-                </a:solidFill>
-                <a:latin typeface="Calibri"/>
-              </a:rPr>
-              <a:t>RED (el gasoducto, lo que compete a Enagás): CEN/TS 17977 y recomendación GIE — pureza H2 &gt;= 98 % mol.   Hoy solo PORTUGAL lo fija como vinculante; España y Francia regulan el blending; la UE lo recomienda.</a:t>
-            </a:r>
-          </a:p>
-          <a:p>
-            <a:pPr algn="l">
-              <a:spcAft>
-                <a:spcPts val="300"/>
-              </a:spcAft>
-            </a:pPr>
-            <a:r>
-              <a:rPr sz="1250" b="0">
-                <a:solidFill>
-                  <a:srgbClr val="1B2A38"/>
-                </a:solidFill>
-                <a:latin typeface="Calibri"/>
-              </a:rPr>
-              <a:t>PRODUCTO / VEHÍCULO: ISO 14687 Grade D — pureza 99,97 % para pilas de combustible. NO es lo que necesita un operador de red. La herramienta los mantiene SEPARADOS para no confundirlos.</a:t>
-            </a:r>
-          </a:p>
-        </p:txBody>
-      </p:sp>
-      <p:sp>
-        <p:nvSpPr>
-          <p:cNvPr id="27" name="Rectangle 26"/>
-          <p:cNvSpPr/>
-          <p:nvPr/>
-        </p:nvSpPr>
-        <p:spPr>
-          <a:xfrm>
-            <a:off x="548640" y="5897880"/>
-            <a:ext cx="11091672" cy="411480"/>
-          </a:xfrm>
-          <a:prstGeom prst="rect">
-            <a:avLst/>
-          </a:prstGeom>
-          <a:solidFill>
-            <a:srgbClr val="E4EFF6"/>
-          </a:solidFill>
-          <a:ln>
-            <a:noFill/>
-          </a:ln>
-          <a:effectLst/>
-        </p:spPr>
-        <p:style>
-          <a:lnRef idx="1">
-            <a:schemeClr val="accent1"/>
-          </a:lnRef>
-          <a:fillRef idx="3">
-            <a:schemeClr val="accent1"/>
-          </a:fillRef>
-          <a:effectRef idx="2">
-            <a:schemeClr val="accent1"/>
-          </a:effectRef>
-          <a:fontRef idx="minor">
-            <a:schemeClr val="lt1"/>
-          </a:fontRef>
-        </p:style>
-        <p:txBody>
-          <a:bodyPr rtlCol="0" anchor="ctr" wrap="square"/>
-          <a:lstStyle/>
-          <a:p>
-            <a:pPr algn="ctr"/>
-          </a:p>
-        </p:txBody>
-      </p:sp>
-      <p:sp>
-        <p:nvSpPr>
-          <p:cNvPr id="28" name="TextBox 27"/>
-          <p:cNvSpPr txBox="1"/>
-          <p:nvPr/>
-        </p:nvSpPr>
-        <p:spPr>
-          <a:xfrm>
-            <a:off x="822960" y="5916168"/>
-            <a:ext cx="10698480" cy="365760"/>
-          </a:xfrm>
-          <a:prstGeom prst="rect">
-            <a:avLst/>
-          </a:prstGeom>
-          <a:noFill/>
-        </p:spPr>
-        <p:txBody>
-          <a:bodyPr wrap="square" anchor="ctr" lIns="38100" rIns="38100" tIns="12700" bIns="12700">
-            <a:spAutoFit/>
-          </a:bodyPr>
-          <a:lstStyle/>
-          <a:p>
-            <a:pPr algn="l">
-              <a:spcAft>
-                <a:spcPts val="600"/>
-              </a:spcAft>
-            </a:pPr>
-            <a:r>
-              <a:rPr sz="1300" b="1">
-                <a:solidFill>
-                  <a:srgbClr val="013A57"/>
-                </a:solidFill>
-                <a:latin typeface="Calibri"/>
-              </a:rPr>
-              <a:t>Mismo motor, mismas garantías, mismas pruebas: la ampliación no degradó nada de lo anterior.</a:t>
+              <a:t>La IA redacta el texto. Los números salen siempre de la normativa oficial.</a:t>
             </a:r>
           </a:p>
         </p:txBody>

--- a/docs/Presentacion_Comparador_Gas.pptx
+++ b/docs/Presentacion_Comparador_Gas.pptx
@@ -578,7 +578,7 @@
           <a:lstStyle/>
           <a:p>
             <a:r>
-              <a:t>[~50 s] Recordad las cuatro cifras y saltad rápido al problema: la información regulatoria está dispersa y, sobre todo, NO ES DIRECTAMENTE COMPARABLE, porque cada país usa unidades y condiciones distintas. Y la promesa: cero cifras inventadas. De los 277 valores trazables, 209 están verificados verbatim, 20 por fuente pública secundaria (cuando la norma primaria es de pago) y 48 declarados 'no verificable' porque la norma no los fija. Cerrad enlazando: 'esto se sostiene sobre dos piezas, la arquitectura y la ontología'.</a:t>
+              <a:t>[~50 s] Recordad las cuatro cifras y saltad rápido al problema: la información regulatoria está dispersa y, sobre todo, NO ES DIRECTAMENTE COMPARABLE, porque cada país usa unidades y condiciones distintas. Y la promesa: cero cifras inventadas. De los 277 registros trazables, 209 están verificados verbatim, 20 por fuente pública secundaria (cuando la norma primaria es de pago) y 48 declarados 'no verificable' porque la norma no los fija. Cerrad enlazando: 'esto se sostiene sobre dos piezas, la arquitectura y la ontología'.</a:t>
             </a:r>
           </a:p>
         </p:txBody>
@@ -5009,7 +5009,7 @@
                 </a:solidFill>
                 <a:latin typeface="Calibri"/>
               </a:rPr>
-              <a:t>valores trazables</a:t>
+              <a:t>registros trazables</a:t>
             </a:r>
           </a:p>
         </p:txBody>
@@ -7136,7 +7136,7 @@
                 </a:solidFill>
                 <a:latin typeface="Calibri"/>
               </a:rPr>
-              <a:t>Las 277 cifras, cada una con su unidad, sus condiciones y su cita oficial.</a:t>
+              <a:t>Los 277 registros, cada uno con su valor, unidad, condiciones y su cita oficial.</a:t>
             </a:r>
           </a:p>
         </p:txBody>
@@ -8077,7 +8077,7 @@
                 </a:solidFill>
                 <a:latin typeface="Calibri"/>
               </a:rPr>
-              <a:t>pdfplumber</a:t>
+              <a:t>PDF oficial</a:t>
             </a:r>
           </a:p>
         </p:txBody>
@@ -8286,7 +8286,7 @@
                 </a:solidFill>
                 <a:latin typeface="Calibri"/>
               </a:rPr>
-              <a:t>• Las 277 cifras extraídas de esos PDF, con su contexto y su cita.</a:t>
+              <a:t>• Los 277 registros extraídos de esos PDF, con su contexto y su cita.</a:t>
             </a:r>
           </a:p>
           <a:p>
@@ -8612,7 +8612,7 @@
                 </a:solidFill>
                 <a:latin typeface="Calibri"/>
               </a:rPr>
-              <a:t>• El TEXTO de los PDF troceado en fragmentos con solape.</a:t>
+              <a:t>• pdfplumber trocea el TEXTO de los PDF en fragmentos con solape.</a:t>
             </a:r>
           </a:p>
           <a:p>
@@ -10627,7 +10627,7 @@
                 </a:solidFill>
                 <a:latin typeface="Calibri"/>
               </a:rPr>
-              <a:t>BIOMETANO — 12 parámetros × 4 jurisdicciones = 27 celdas.</a:t>
+              <a:t>BIOMETANO — 12 parámetros · 27 celdas (4 jurisdicciones: ES · PT · FR · UE).</a:t>
             </a:r>
           </a:p>
         </p:txBody>
@@ -10841,7 +10841,7 @@
                 </a:solidFill>
                 <a:latin typeface="Calibri"/>
               </a:rPr>
-              <a:t>HIDRÓGENO — 18 parámetros × 6 jurisdicciones = 40 celdas.</a:t>
+              <a:t>HIDRÓGENO — 18 parámetros · 40 celdas (dominio de red + producto).</a:t>
             </a:r>
           </a:p>
         </p:txBody>
